--- a/lib/reports/template.pptx
+++ b/lib/reports/template.pptx
@@ -1,24 +1,24 @@
 
 <file path=ppt/presentation.xml><?xml version="1.0" encoding="utf-8"?>
-<p:presentation xmlns:p="http://schemas.openxmlformats.org/presentationml/2006/main">
+<p:presentation xmlns:a="http://schemas.openxmlformats.org/drawingml/2006/main" xmlns:r="http://schemas.openxmlformats.org/officeDocument/2006/relationships" xmlns:p="http://schemas.openxmlformats.org/presentationml/2006/main">
   <p:sldMasterIdLst>
-    <p:sldMasterId xmlns:r="http://schemas.openxmlformats.org/officeDocument/2006/relationships" id="2147483648" r:id="Rba114033c7c54c67"/>
+    <p:sldMasterId id="2147483648" r:id="rId1"/>
   </p:sldMasterIdLst>
   <p:notesMasterIdLst>
-    <p:notesMasterId xmlns:r="http://schemas.openxmlformats.org/officeDocument/2006/relationships" r:id="R3747c8859df745f2"/>
+    <p:notesMasterId r:id="rId8"/>
   </p:notesMasterIdLst>
   <p:sldIdLst>
-    <p:sldId xmlns:r="http://schemas.openxmlformats.org/officeDocument/2006/relationships" id="256" r:id="R3035151523994b74"/>
-    <p:sldId xmlns:r="http://schemas.openxmlformats.org/officeDocument/2006/relationships" id="257" r:id="R7763aa33d01d4ff1"/>
-    <p:sldId xmlns:r="http://schemas.openxmlformats.org/officeDocument/2006/relationships" id="258" r:id="R69946a0acb3c43f6"/>
-    <p:sldId xmlns:r="http://schemas.openxmlformats.org/officeDocument/2006/relationships" id="259" r:id="R2e3cca1637fb4494"/>
-    <p:sldId xmlns:r="http://schemas.openxmlformats.org/officeDocument/2006/relationships" id="260" r:id="Rc90fbefa009c448a"/>
-    <p:sldId xmlns:r="http://schemas.openxmlformats.org/officeDocument/2006/relationships" id="261" r:id="R5046fd12b38f4036"/>
+    <p:sldId id="256" r:id="rId2"/>
+    <p:sldId id="257" r:id="rId3"/>
+    <p:sldId id="258" r:id="rId4"/>
+    <p:sldId id="259" r:id="rId5"/>
+    <p:sldId id="260" r:id="rId6"/>
+    <p:sldId id="261" r:id="rId7"/>
   </p:sldIdLst>
   <p:sldSz cx="12192000" cy="6858000"/>
   <p:notesSz cx="6858000" cy="9144000"/>
   <p:defaultTextStyle>
-    <a:defPPr xmlns:a="http://schemas.openxmlformats.org/drawingml/2006/main" marL="0" marR="0" indent="0" algn="l" defTabSz="914400">
+    <a:defPPr marL="0" marR="0" indent="0" algn="l" defTabSz="914400">
       <a:lnSpc>
         <a:spcPct val="100000"/>
       </a:lnSpc>
@@ -41,7 +41,7 @@
         </a:solidFill>
       </a:defRPr>
     </a:defPPr>
-    <a:lvl1pPr xmlns:a="http://schemas.openxmlformats.org/drawingml/2006/main" marL="0" marR="0" indent="0" algn="l" defTabSz="914400">
+    <a:lvl1pPr marL="0" marR="0" indent="0" algn="l" defTabSz="914400">
       <a:lnSpc>
         <a:spcPct val="100000"/>
       </a:lnSpc>
@@ -67,7 +67,7 @@
         <a:cs typeface="+mn-lt"/>
       </a:defRPr>
     </a:lvl1pPr>
-    <a:lvl2pPr xmlns:a="http://schemas.openxmlformats.org/drawingml/2006/main" marL="0" marR="0" indent="457200" algn="l" defTabSz="914400">
+    <a:lvl2pPr marL="0" marR="0" indent="457200" algn="l" defTabSz="914400">
       <a:lnSpc>
         <a:spcPct val="100000"/>
       </a:lnSpc>
@@ -93,7 +93,7 @@
         <a:cs typeface="+mn-lt"/>
       </a:defRPr>
     </a:lvl2pPr>
-    <a:lvl3pPr xmlns:a="http://schemas.openxmlformats.org/drawingml/2006/main" marL="0" marR="0" indent="914400" algn="l" defTabSz="914400">
+    <a:lvl3pPr marL="0" marR="0" indent="914400" algn="l" defTabSz="914400">
       <a:lnSpc>
         <a:spcPct val="100000"/>
       </a:lnSpc>
@@ -119,7 +119,7 @@
         <a:cs typeface="+mn-lt"/>
       </a:defRPr>
     </a:lvl3pPr>
-    <a:lvl4pPr xmlns:a="http://schemas.openxmlformats.org/drawingml/2006/main" marL="0" marR="0" indent="1371600" algn="l" defTabSz="914400">
+    <a:lvl4pPr marL="0" marR="0" indent="1371600" algn="l" defTabSz="914400">
       <a:lnSpc>
         <a:spcPct val="100000"/>
       </a:lnSpc>
@@ -145,7 +145,7 @@
         <a:cs typeface="+mn-lt"/>
       </a:defRPr>
     </a:lvl4pPr>
-    <a:lvl5pPr xmlns:a="http://schemas.openxmlformats.org/drawingml/2006/main" marL="0" marR="0" indent="1828800" algn="l" defTabSz="914400">
+    <a:lvl5pPr marL="0" marR="0" indent="1828800" algn="l" defTabSz="914400">
       <a:lnSpc>
         <a:spcPct val="100000"/>
       </a:lnSpc>
@@ -171,7 +171,7 @@
         <a:cs typeface="+mn-lt"/>
       </a:defRPr>
     </a:lvl5pPr>
-    <a:lvl6pPr xmlns:a="http://schemas.openxmlformats.org/drawingml/2006/main" marL="0" marR="0" indent="2286000" algn="l" defTabSz="914400">
+    <a:lvl6pPr marL="0" marR="0" indent="2286000" algn="l" defTabSz="914400">
       <a:lnSpc>
         <a:spcPct val="100000"/>
       </a:lnSpc>
@@ -197,7 +197,7 @@
         <a:cs typeface="+mn-lt"/>
       </a:defRPr>
     </a:lvl6pPr>
-    <a:lvl7pPr xmlns:a="http://schemas.openxmlformats.org/drawingml/2006/main" marL="0" marR="0" indent="2743200" algn="l" defTabSz="914400">
+    <a:lvl7pPr marL="0" marR="0" indent="2743200" algn="l" defTabSz="914400">
       <a:lnSpc>
         <a:spcPct val="100000"/>
       </a:lnSpc>
@@ -223,7 +223,7 @@
         <a:cs typeface="+mn-lt"/>
       </a:defRPr>
     </a:lvl7pPr>
-    <a:lvl8pPr xmlns:a="http://schemas.openxmlformats.org/drawingml/2006/main" marL="0" marR="0" indent="3200400" algn="l" defTabSz="914400">
+    <a:lvl8pPr marL="0" marR="0" indent="3200400" algn="l" defTabSz="914400">
       <a:lnSpc>
         <a:spcPct val="100000"/>
       </a:lnSpc>
@@ -249,7 +249,7 @@
         <a:cs typeface="+mn-lt"/>
       </a:defRPr>
     </a:lvl8pPr>
-    <a:lvl9pPr xmlns:a="http://schemas.openxmlformats.org/drawingml/2006/main" marL="0" marR="0" indent="3657600" algn="l" defTabSz="914400">
+    <a:lvl9pPr marL="0" marR="0" indent="3657600" algn="l" defTabSz="914400">
       <a:lnSpc>
         <a:spcPct val="100000"/>
       </a:lnSpc>
@@ -276,15 +276,20 @@
       </a:defRPr>
     </a:lvl9pPr>
   </p:defaultTextStyle>
+  <p:extLst>
+    <p:ext uri="{EFAFB233-063F-42B5-8137-9DF3F51BA10A}">
+      <p15:sldGuideLst xmlns:p15="http://schemas.microsoft.com/office/powerpoint/2012/main"/>
+    </p:ext>
+  </p:extLst>
 </p:presentation>
 </file>
 
 <file path=ppt/notesMasters/notesMaster1.xml><?xml version="1.0" encoding="utf-8"?>
-<p:notesMaster xmlns:p="http://schemas.openxmlformats.org/presentationml/2006/main">
+<p:notesMaster xmlns:a="http://schemas.openxmlformats.org/drawingml/2006/main" xmlns:r="http://schemas.openxmlformats.org/officeDocument/2006/relationships" xmlns:p="http://schemas.openxmlformats.org/presentationml/2006/main">
   <p:cSld>
     <p:bg>
       <p:bgRef idx="1001">
-        <a:schemeClr xmlns:a="http://schemas.openxmlformats.org/drawingml/2006/main" val="bg1"/>
+        <a:schemeClr val="bg1"/>
       </p:bgRef>
     </p:bg>
     <p:spTree>
@@ -294,325 +299,164 @@
         <p:nvPr/>
       </p:nvGrpSpPr>
       <p:grpSpPr>
-        <a:xfrm xmlns:a="http://schemas.openxmlformats.org/drawingml/2006/main"/>
+        <a:xfrm>
+          <a:off x="0" y="0"/>
+          <a:ext cx="0" cy="0"/>
+          <a:chOff x="0" y="0"/>
+          <a:chExt cx="0" cy="0"/>
+        </a:xfrm>
       </p:grpSpPr>
       <p:sp>
         <p:nvSpPr>
           <p:cNvPr id="2" name="Header Placeholder"/>
-          <p:cNvSpPr/>
+          <p:cNvSpPr>
+            <a:spLocks noGrp="1"/>
+          </p:cNvSpPr>
           <p:nvPr>
             <p:ph type="hdr" sz="quarter"/>
           </p:nvPr>
         </p:nvSpPr>
         <p:spPr>
-          <a:prstGeom xmlns:a="http://schemas.openxmlformats.org/drawingml/2006/main" prst="rect">
+          <a:prstGeom prst="rect">
             <a:avLst/>
           </a:prstGeom>
         </p:spPr>
         <p:txBody>
-          <a:bodyPr xmlns:a="http://schemas.openxmlformats.org/drawingml/2006/main"/>
-          <a:lstStyle xmlns:a="http://schemas.openxmlformats.org/drawingml/2006/main"/>
-          <a:p xmlns:a="http://schemas.openxmlformats.org/drawingml/2006/main"/>
+          <a:bodyPr/>
+          <a:lstStyle/>
+          <a:p>
+            <a:endParaRPr/>
+          </a:p>
         </p:txBody>
       </p:sp>
       <p:sp>
         <p:nvSpPr>
           <p:cNvPr id="3" name="Date Placeholder"/>
-          <p:cNvSpPr/>
+          <p:cNvSpPr>
+            <a:spLocks noGrp="1"/>
+          </p:cNvSpPr>
           <p:nvPr>
             <p:ph type="dt" sz="quarter" idx="1"/>
           </p:nvPr>
         </p:nvSpPr>
         <p:spPr>
-          <a:prstGeom xmlns:a="http://schemas.openxmlformats.org/drawingml/2006/main" prst="rect">
+          <a:prstGeom prst="rect">
             <a:avLst/>
           </a:prstGeom>
         </p:spPr>
         <p:txBody>
-          <a:bodyPr xmlns:a="http://schemas.openxmlformats.org/drawingml/2006/main"/>
-          <a:lstStyle xmlns:a="http://schemas.openxmlformats.org/drawingml/2006/main"/>
-          <a:p xmlns:a="http://schemas.openxmlformats.org/drawingml/2006/main"/>
+          <a:bodyPr/>
+          <a:lstStyle/>
+          <a:p>
+            <a:endParaRPr/>
+          </a:p>
         </p:txBody>
       </p:sp>
       <p:sp>
         <p:nvSpPr>
           <p:cNvPr id="4" name="Slide Image Placeholder"/>
-          <p:cNvSpPr/>
+          <p:cNvSpPr>
+            <a:spLocks noGrp="1" noRot="1" noChangeAspect="1"/>
+          </p:cNvSpPr>
           <p:nvPr>
             <p:ph type="sldImg" idx="2"/>
           </p:nvPr>
         </p:nvSpPr>
         <p:spPr>
-          <a:prstGeom xmlns:a="http://schemas.openxmlformats.org/drawingml/2006/main" prst="rect">
+          <a:prstGeom prst="rect">
             <a:avLst/>
           </a:prstGeom>
         </p:spPr>
         <p:txBody>
-          <a:bodyPr xmlns:a="http://schemas.openxmlformats.org/drawingml/2006/main"/>
-          <a:lstStyle xmlns:a="http://schemas.openxmlformats.org/drawingml/2006/main"/>
-          <a:p xmlns:a="http://schemas.openxmlformats.org/drawingml/2006/main"/>
+          <a:bodyPr/>
+          <a:lstStyle/>
+          <a:p>
+            <a:endParaRPr/>
+          </a:p>
         </p:txBody>
       </p:sp>
       <p:sp>
         <p:nvSpPr>
           <p:cNvPr id="5" name="Notes Placeholder"/>
-          <p:cNvSpPr/>
+          <p:cNvSpPr>
+            <a:spLocks noGrp="1"/>
+          </p:cNvSpPr>
           <p:nvPr>
             <p:ph type="body" sz="quarter" idx="3"/>
           </p:nvPr>
         </p:nvSpPr>
         <p:spPr>
-          <a:prstGeom xmlns:a="http://schemas.openxmlformats.org/drawingml/2006/main" prst="rect">
+          <a:prstGeom prst="rect">
             <a:avLst/>
           </a:prstGeom>
         </p:spPr>
         <p:txBody>
-          <a:bodyPr xmlns:a="http://schemas.openxmlformats.org/drawingml/2006/main"/>
-          <a:lstStyle xmlns:a="http://schemas.openxmlformats.org/drawingml/2006/main"/>
-          <a:p xmlns:a="http://schemas.openxmlformats.org/drawingml/2006/main"/>
+          <a:bodyPr/>
+          <a:lstStyle/>
+          <a:p>
+            <a:endParaRPr/>
+          </a:p>
         </p:txBody>
       </p:sp>
       <p:sp>
         <p:nvSpPr>
           <p:cNvPr id="6" name="Footer Placeholder"/>
-          <p:cNvSpPr/>
+          <p:cNvSpPr>
+            <a:spLocks noGrp="1"/>
+          </p:cNvSpPr>
           <p:nvPr>
             <p:ph type="ftr" sz="quarter" idx="4"/>
           </p:nvPr>
         </p:nvSpPr>
         <p:spPr>
-          <a:prstGeom xmlns:a="http://schemas.openxmlformats.org/drawingml/2006/main" prst="rect">
+          <a:prstGeom prst="rect">
             <a:avLst/>
           </a:prstGeom>
         </p:spPr>
         <p:txBody>
-          <a:bodyPr xmlns:a="http://schemas.openxmlformats.org/drawingml/2006/main"/>
-          <a:lstStyle xmlns:a="http://schemas.openxmlformats.org/drawingml/2006/main"/>
-          <a:p xmlns:a="http://schemas.openxmlformats.org/drawingml/2006/main"/>
+          <a:bodyPr/>
+          <a:lstStyle/>
+          <a:p>
+            <a:endParaRPr/>
+          </a:p>
         </p:txBody>
       </p:sp>
       <p:sp>
         <p:nvSpPr>
           <p:cNvPr id="7" name="Slide Number Placeholder"/>
-          <p:cNvSpPr/>
+          <p:cNvSpPr>
+            <a:spLocks noGrp="1"/>
+          </p:cNvSpPr>
           <p:nvPr>
             <p:ph type="sldNum" sz="quarter" idx="5"/>
           </p:nvPr>
         </p:nvSpPr>
         <p:spPr>
-          <a:prstGeom xmlns:a="http://schemas.openxmlformats.org/drawingml/2006/main" prst="rect">
+          <a:prstGeom prst="rect">
             <a:avLst/>
           </a:prstGeom>
         </p:spPr>
         <p:txBody>
-          <a:bodyPr xmlns:a="http://schemas.openxmlformats.org/drawingml/2006/main"/>
-          <a:lstStyle xmlns:a="http://schemas.openxmlformats.org/drawingml/2006/main"/>
-          <a:p xmlns:a="http://schemas.openxmlformats.org/drawingml/2006/main"/>
+          <a:bodyPr/>
+          <a:lstStyle/>
+          <a:p>
+            <a:endParaRPr/>
+          </a:p>
         </p:txBody>
       </p:sp>
     </p:spTree>
   </p:cSld>
   <p:clrMap bg1="lt1" tx1="dk1" bg2="lt2" tx2="dk2" accent1="accent1" accent2="accent2" accent3="accent3" accent4="accent4" accent5="accent5" accent6="accent6" hlink="hlink" folHlink="folHlink"/>
   <p:notesStyle>
-    <a:lvl1pPr xmlns:a="http://schemas.openxmlformats.org/drawingml/2006/main" marL="0" algn="l" defTabSz="914400" rtl="0" eaLnBrk="1" latinLnBrk="0" hangingPunct="1">
+    <a:lvl1pPr marL="0" algn="l" defTabSz="914400" rtl="0" eaLnBrk="1" latinLnBrk="0" hangingPunct="1">
       <a:defRPr sz="1200" kern="1200"/>
     </a:lvl1pPr>
   </p:notesStyle>
 </p:notesMaster>
 </file>
 
-<file path=ppt/notesMasters/theme/theme3.xml><?xml version="1.0" encoding="utf-8"?>
-<a:theme xmlns:a="http://schemas.openxmlformats.org/drawingml/2006/main" name="Tema de Office">
-  <a:themeElements>
-    <a:clrScheme name="Tema de Office">
-      <a:dk1>
-        <a:srgbClr val="000000"/>
-      </a:dk1>
-      <a:lt1>
-        <a:srgbClr val="FFFFFF"/>
-      </a:lt1>
-      <a:dk2>
-        <a:srgbClr val="A7A7A7"/>
-      </a:dk2>
-      <a:lt2>
-        <a:srgbClr val="535353"/>
-      </a:lt2>
-      <a:accent1>
-        <a:srgbClr val="4472C4"/>
-      </a:accent1>
-      <a:accent2>
-        <a:srgbClr val="ED7D31"/>
-      </a:accent2>
-      <a:accent3>
-        <a:srgbClr val="A5A5A5"/>
-      </a:accent3>
-      <a:accent4>
-        <a:srgbClr val="FFC000"/>
-      </a:accent4>
-      <a:accent5>
-        <a:srgbClr val="5B9BD5"/>
-      </a:accent5>
-      <a:accent6>
-        <a:srgbClr val="70AD47"/>
-      </a:accent6>
-      <a:hlink>
-        <a:srgbClr val="0000FF"/>
-      </a:hlink>
-      <a:folHlink>
-        <a:srgbClr val="FF00FF"/>
-      </a:folHlink>
-    </a:clrScheme>
-    <a:fontScheme name="Tema de Office">
-      <a:majorFont>
-        <a:latin typeface="Helvetica"/>
-        <a:ea typeface="Helvetica"/>
-        <a:cs typeface="Helvetica"/>
-      </a:majorFont>
-      <a:minorFont>
-        <a:latin typeface="Calibri"/>
-        <a:ea typeface="Calibri"/>
-        <a:cs typeface="Calibri"/>
-      </a:minorFont>
-    </a:fontScheme>
-    <a:fmtScheme name="Tema de Office">
-      <a:fillStyleLst>
-        <a:solidFill>
-          <a:schemeClr val="phClr"/>
-        </a:solidFill>
-        <a:gradFill rotWithShape="1">
-          <a:gsLst>
-            <a:gs pos="0">
-              <a:schemeClr val="phClr">
-                <a:tint val="50000"/>
-                <a:satMod val="300000"/>
-              </a:schemeClr>
-            </a:gs>
-            <a:gs pos="35000">
-              <a:schemeClr val="phClr">
-                <a:tint val="37000"/>
-                <a:satMod val="300000"/>
-              </a:schemeClr>
-            </a:gs>
-            <a:gs pos="100000">
-              <a:schemeClr val="phClr">
-                <a:tint val="15000"/>
-                <a:satMod val="350000"/>
-              </a:schemeClr>
-            </a:gs>
-          </a:gsLst>
-          <a:lin ang="16200000" scaled="1"/>
-        </a:gradFill>
-        <a:gradFill rotWithShape="1">
-          <a:gsLst>
-            <a:gs pos="0">
-              <a:schemeClr val="phClr">
-                <a:tint val="100000"/>
-                <a:shade val="100000"/>
-                <a:satMod val="129999"/>
-              </a:schemeClr>
-            </a:gs>
-            <a:gs pos="100000">
-              <a:schemeClr val="phClr">
-                <a:tint val="50000"/>
-                <a:shade val="100000"/>
-                <a:satMod val="350000"/>
-              </a:schemeClr>
-            </a:gs>
-          </a:gsLst>
-          <a:lin ang="16200000" scaled="0"/>
-        </a:gradFill>
-      </a:fillStyleLst>
-      <a:lnStyleLst>
-        <a:ln w="9525">
-          <a:solidFill>
-            <a:schemeClr val="phClr">
-              <a:shade val="95000"/>
-              <a:satMod val="104999"/>
-            </a:schemeClr>
-          </a:solidFill>
-          <a:prstDash val="solid"/>
-        </a:ln>
-        <a:ln w="25400">
-          <a:solidFill>
-            <a:schemeClr val="phClr"/>
-          </a:solidFill>
-          <a:prstDash val="solid"/>
-        </a:ln>
-        <a:ln w="38100">
-          <a:solidFill>
-            <a:schemeClr val="phClr"/>
-          </a:solidFill>
-          <a:prstDash val="solid"/>
-        </a:ln>
-      </a:lnStyleLst>
-      <a:effectStyleLst>
-        <a:effectStyle>
-          <a:effectLst/>
-        </a:effectStyle>
-        <a:effectStyle>
-          <a:effectLst/>
-        </a:effectStyle>
-        <a:effectStyle>
-          <a:effectLst/>
-        </a:effectStyle>
-      </a:effectStyleLst>
-      <a:bgFillStyleLst>
-        <a:solidFill>
-          <a:schemeClr val="phClr"/>
-        </a:solidFill>
-        <a:gradFill rotWithShape="1">
-          <a:gsLst>
-            <a:gs pos="0">
-              <a:schemeClr val="phClr">
-                <a:tint val="40000"/>
-                <a:satMod val="350000"/>
-              </a:schemeClr>
-            </a:gs>
-            <a:gs pos="40000">
-              <a:schemeClr val="phClr">
-                <a:tint val="45000"/>
-                <a:shade val="99000"/>
-                <a:satMod val="350000"/>
-              </a:schemeClr>
-            </a:gs>
-            <a:gs pos="100000">
-              <a:schemeClr val="phClr">
-                <a:shade val="20000"/>
-                <a:satMod val="255000"/>
-              </a:schemeClr>
-            </a:gs>
-          </a:gsLst>
-          <a:path path="circle">
-            <a:fillToRect l="50000" t="-80000" r="50000" b="180000"/>
-          </a:path>
-        </a:gradFill>
-        <a:gradFill rotWithShape="1">
-          <a:gsLst>
-            <a:gs pos="0">
-              <a:schemeClr val="phClr">
-                <a:tint val="80000"/>
-                <a:satMod val="300000"/>
-              </a:schemeClr>
-            </a:gs>
-            <a:gs pos="100000">
-              <a:schemeClr val="phClr">
-                <a:shade val="30000"/>
-                <a:satMod val="200000"/>
-              </a:schemeClr>
-            </a:gs>
-          </a:gsLst>
-          <a:path path="circle">
-            <a:fillToRect l="50000" t="50000" r="50000" b="50000"/>
-          </a:path>
-        </a:gradFill>
-      </a:bgFillStyleLst>
-    </a:fmtScheme>
-  </a:themeElements>
-</a:theme>
-</file>
-
 <file path=ppt/notesSlides/notesSlide1.xml><?xml version="1.0" encoding="utf-8"?>
-<p:notes xmlns:p="http://schemas.openxmlformats.org/presentationml/2006/main">
+<p:notes xmlns:a="http://schemas.openxmlformats.org/drawingml/2006/main" xmlns:r="http://schemas.openxmlformats.org/officeDocument/2006/relationships" xmlns:p="http://schemas.openxmlformats.org/presentationml/2006/main">
   <p:cSld>
     <p:spTree>
       <p:nvGrpSpPr>
@@ -621,16 +465,21 @@
         <p:nvPr/>
       </p:nvGrpSpPr>
       <p:grpSpPr>
-        <a:xfrm xmlns:a="http://schemas.openxmlformats.org/drawingml/2006/main"/>
+        <a:xfrm>
+          <a:off x="0" y="0"/>
+          <a:ext cx="0" cy="0"/>
+          <a:chOff x="0" y="0"/>
+          <a:chExt cx="0" cy="0"/>
+        </a:xfrm>
       </p:grpSpPr>
       <p:sp>
         <p:nvSpPr>
           <p:cNvPr id="2" name="Slide Image Placeholder 1"/>
           <p:cNvSpPr>
-            <a:spLocks xmlns:a="http://schemas.openxmlformats.org/drawingml/2006/main" noGrp="1"/>
+            <a:spLocks noGrp="1" noRot="1" noChangeAspect="1"/>
           </p:cNvSpPr>
           <p:nvPr>
-            <p:ph type="sldImg" idx="0"/>
+            <p:ph type="sldImg"/>
           </p:nvPr>
         </p:nvSpPr>
         <p:spPr/>
@@ -639,7 +488,7 @@
         <p:nvSpPr>
           <p:cNvPr id="3" name="Notes Placeholder 2"/>
           <p:cNvSpPr>
-            <a:spLocks xmlns:a="http://schemas.openxmlformats.org/drawingml/2006/main" noGrp="1"/>
+            <a:spLocks noGrp="1"/>
           </p:cNvSpPr>
           <p:nvPr>
             <p:ph type="body" idx="1"/>
@@ -647,11 +496,11 @@
         </p:nvSpPr>
         <p:spPr/>
         <p:txBody>
-          <a:bodyPr xmlns:a="http://schemas.openxmlformats.org/drawingml/2006/main"/>
-          <a:lstStyle xmlns:a="http://schemas.openxmlformats.org/drawingml/2006/main"/>
-          <a:p xmlns:a="http://schemas.openxmlformats.org/drawingml/2006/main">
+          <a:bodyPr/>
+          <a:lstStyle/>
+          <a:p>
             <a:r>
-              <a:t>Fuente: datos privados de las carpetas autorizadas de Drive, procesados en IMTES Recaudo 360. Corte y cifras se generan para cada semana.</a:t>
+              <a:t/>
             </a:r>
           </a:p>
         </p:txBody>
@@ -660,7 +509,7 @@
         <p:nvSpPr>
           <p:cNvPr id="4" name="Slide Number Placeholder 3"/>
           <p:cNvSpPr>
-            <a:spLocks xmlns:a="http://schemas.openxmlformats.org/drawingml/2006/main" noGrp="1"/>
+            <a:spLocks noGrp="1"/>
           </p:cNvSpPr>
           <p:nvPr>
             <p:ph type="sldNum" idx="5"/>
@@ -668,21 +517,23 @@
         </p:nvSpPr>
         <p:spPr/>
         <p:txBody>
-          <a:bodyPr xmlns:a="http://schemas.openxmlformats.org/drawingml/2006/main"/>
-          <a:lstStyle xmlns:a="http://schemas.openxmlformats.org/drawingml/2006/main"/>
-          <a:p xmlns:a="http://schemas.openxmlformats.org/drawingml/2006/main"/>
+          <a:bodyPr/>
+          <a:lstStyle/>
+          <a:p>
+            <a:endParaRPr/>
+          </a:p>
         </p:txBody>
       </p:sp>
     </p:spTree>
   </p:cSld>
   <p:clrMapOvr>
-    <a:masterClrMapping xmlns:a="http://schemas.openxmlformats.org/drawingml/2006/main"/>
+    <a:masterClrMapping/>
   </p:clrMapOvr>
 </p:notes>
 </file>
 
 <file path=ppt/notesSlides/notesSlide2.xml><?xml version="1.0" encoding="utf-8"?>
-<p:notes xmlns:p="http://schemas.openxmlformats.org/presentationml/2006/main">
+<p:notes xmlns:a="http://schemas.openxmlformats.org/drawingml/2006/main" xmlns:r="http://schemas.openxmlformats.org/officeDocument/2006/relationships" xmlns:p="http://schemas.openxmlformats.org/presentationml/2006/main">
   <p:cSld>
     <p:spTree>
       <p:nvGrpSpPr>
@@ -691,16 +542,21 @@
         <p:nvPr/>
       </p:nvGrpSpPr>
       <p:grpSpPr>
-        <a:xfrm xmlns:a="http://schemas.openxmlformats.org/drawingml/2006/main"/>
+        <a:xfrm>
+          <a:off x="0" y="0"/>
+          <a:ext cx="0" cy="0"/>
+          <a:chOff x="0" y="0"/>
+          <a:chExt cx="0" cy="0"/>
+        </a:xfrm>
       </p:grpSpPr>
       <p:sp>
         <p:nvSpPr>
           <p:cNvPr id="2" name="Slide Image Placeholder 1"/>
           <p:cNvSpPr>
-            <a:spLocks xmlns:a="http://schemas.openxmlformats.org/drawingml/2006/main" noGrp="1"/>
+            <a:spLocks noGrp="1" noRot="1" noChangeAspect="1"/>
           </p:cNvSpPr>
           <p:nvPr>
-            <p:ph type="sldImg" idx="0"/>
+            <p:ph type="sldImg"/>
           </p:nvPr>
         </p:nvSpPr>
         <p:spPr/>
@@ -709,7 +565,7 @@
         <p:nvSpPr>
           <p:cNvPr id="3" name="Notes Placeholder 2"/>
           <p:cNvSpPr>
-            <a:spLocks xmlns:a="http://schemas.openxmlformats.org/drawingml/2006/main" noGrp="1"/>
+            <a:spLocks noGrp="1"/>
           </p:cNvSpPr>
           <p:nvPr>
             <p:ph type="body" idx="1"/>
@@ -717,11 +573,11 @@
         </p:nvSpPr>
         <p:spPr/>
         <p:txBody>
-          <a:bodyPr xmlns:a="http://schemas.openxmlformats.org/drawingml/2006/main"/>
-          <a:lstStyle xmlns:a="http://schemas.openxmlformats.org/drawingml/2006/main"/>
-          <a:p xmlns:a="http://schemas.openxmlformats.org/drawingml/2006/main">
+          <a:bodyPr/>
+          <a:lstStyle/>
+          <a:p>
             <a:r>
-              <a:t>Fuente: datos privados de las carpetas autorizadas de Drive, procesados en IMTES Recaudo 360. Corte y cifras se generan para cada semana.</a:t>
+              <a:t/>
             </a:r>
           </a:p>
         </p:txBody>
@@ -730,7 +586,7 @@
         <p:nvSpPr>
           <p:cNvPr id="4" name="Slide Number Placeholder 3"/>
           <p:cNvSpPr>
-            <a:spLocks xmlns:a="http://schemas.openxmlformats.org/drawingml/2006/main" noGrp="1"/>
+            <a:spLocks noGrp="1"/>
           </p:cNvSpPr>
           <p:nvPr>
             <p:ph type="sldNum" idx="5"/>
@@ -738,21 +594,23 @@
         </p:nvSpPr>
         <p:spPr/>
         <p:txBody>
-          <a:bodyPr xmlns:a="http://schemas.openxmlformats.org/drawingml/2006/main"/>
-          <a:lstStyle xmlns:a="http://schemas.openxmlformats.org/drawingml/2006/main"/>
-          <a:p xmlns:a="http://schemas.openxmlformats.org/drawingml/2006/main"/>
+          <a:bodyPr/>
+          <a:lstStyle/>
+          <a:p>
+            <a:endParaRPr/>
+          </a:p>
         </p:txBody>
       </p:sp>
     </p:spTree>
   </p:cSld>
   <p:clrMapOvr>
-    <a:masterClrMapping xmlns:a="http://schemas.openxmlformats.org/drawingml/2006/main"/>
+    <a:masterClrMapping/>
   </p:clrMapOvr>
 </p:notes>
 </file>
 
 <file path=ppt/notesSlides/notesSlide3.xml><?xml version="1.0" encoding="utf-8"?>
-<p:notes xmlns:p="http://schemas.openxmlformats.org/presentationml/2006/main">
+<p:notes xmlns:a="http://schemas.openxmlformats.org/drawingml/2006/main" xmlns:r="http://schemas.openxmlformats.org/officeDocument/2006/relationships" xmlns:p="http://schemas.openxmlformats.org/presentationml/2006/main">
   <p:cSld>
     <p:spTree>
       <p:nvGrpSpPr>
@@ -761,16 +619,21 @@
         <p:nvPr/>
       </p:nvGrpSpPr>
       <p:grpSpPr>
-        <a:xfrm xmlns:a="http://schemas.openxmlformats.org/drawingml/2006/main"/>
+        <a:xfrm>
+          <a:off x="0" y="0"/>
+          <a:ext cx="0" cy="0"/>
+          <a:chOff x="0" y="0"/>
+          <a:chExt cx="0" cy="0"/>
+        </a:xfrm>
       </p:grpSpPr>
       <p:sp>
         <p:nvSpPr>
           <p:cNvPr id="2" name="Slide Image Placeholder 1"/>
           <p:cNvSpPr>
-            <a:spLocks xmlns:a="http://schemas.openxmlformats.org/drawingml/2006/main" noGrp="1"/>
+            <a:spLocks noGrp="1" noRot="1" noChangeAspect="1"/>
           </p:cNvSpPr>
           <p:nvPr>
-            <p:ph type="sldImg" idx="0"/>
+            <p:ph type="sldImg"/>
           </p:nvPr>
         </p:nvSpPr>
         <p:spPr/>
@@ -779,7 +642,7 @@
         <p:nvSpPr>
           <p:cNvPr id="3" name="Notes Placeholder 2"/>
           <p:cNvSpPr>
-            <a:spLocks xmlns:a="http://schemas.openxmlformats.org/drawingml/2006/main" noGrp="1"/>
+            <a:spLocks noGrp="1"/>
           </p:cNvSpPr>
           <p:nvPr>
             <p:ph type="body" idx="1"/>
@@ -787,11 +650,11 @@
         </p:nvSpPr>
         <p:spPr/>
         <p:txBody>
-          <a:bodyPr xmlns:a="http://schemas.openxmlformats.org/drawingml/2006/main"/>
-          <a:lstStyle xmlns:a="http://schemas.openxmlformats.org/drawingml/2006/main"/>
-          <a:p xmlns:a="http://schemas.openxmlformats.org/drawingml/2006/main">
+          <a:bodyPr/>
+          <a:lstStyle/>
+          <a:p>
             <a:r>
-              <a:t>Fuente: datos privados de las carpetas autorizadas de Drive, procesados en IMTES Recaudo 360. Corte y cifras se generan para cada semana.</a:t>
+              <a:t/>
             </a:r>
           </a:p>
         </p:txBody>
@@ -800,7 +663,7 @@
         <p:nvSpPr>
           <p:cNvPr id="4" name="Slide Number Placeholder 3"/>
           <p:cNvSpPr>
-            <a:spLocks xmlns:a="http://schemas.openxmlformats.org/drawingml/2006/main" noGrp="1"/>
+            <a:spLocks noGrp="1"/>
           </p:cNvSpPr>
           <p:nvPr>
             <p:ph type="sldNum" idx="5"/>
@@ -808,21 +671,23 @@
         </p:nvSpPr>
         <p:spPr/>
         <p:txBody>
-          <a:bodyPr xmlns:a="http://schemas.openxmlformats.org/drawingml/2006/main"/>
-          <a:lstStyle xmlns:a="http://schemas.openxmlformats.org/drawingml/2006/main"/>
-          <a:p xmlns:a="http://schemas.openxmlformats.org/drawingml/2006/main"/>
+          <a:bodyPr/>
+          <a:lstStyle/>
+          <a:p>
+            <a:endParaRPr/>
+          </a:p>
         </p:txBody>
       </p:sp>
     </p:spTree>
   </p:cSld>
   <p:clrMapOvr>
-    <a:masterClrMapping xmlns:a="http://schemas.openxmlformats.org/drawingml/2006/main"/>
+    <a:masterClrMapping/>
   </p:clrMapOvr>
 </p:notes>
 </file>
 
 <file path=ppt/notesSlides/notesSlide4.xml><?xml version="1.0" encoding="utf-8"?>
-<p:notes xmlns:p="http://schemas.openxmlformats.org/presentationml/2006/main">
+<p:notes xmlns:a="http://schemas.openxmlformats.org/drawingml/2006/main" xmlns:r="http://schemas.openxmlformats.org/officeDocument/2006/relationships" xmlns:p="http://schemas.openxmlformats.org/presentationml/2006/main">
   <p:cSld>
     <p:spTree>
       <p:nvGrpSpPr>
@@ -831,16 +696,21 @@
         <p:nvPr/>
       </p:nvGrpSpPr>
       <p:grpSpPr>
-        <a:xfrm xmlns:a="http://schemas.openxmlformats.org/drawingml/2006/main"/>
+        <a:xfrm>
+          <a:off x="0" y="0"/>
+          <a:ext cx="0" cy="0"/>
+          <a:chOff x="0" y="0"/>
+          <a:chExt cx="0" cy="0"/>
+        </a:xfrm>
       </p:grpSpPr>
       <p:sp>
         <p:nvSpPr>
           <p:cNvPr id="2" name="Slide Image Placeholder 1"/>
           <p:cNvSpPr>
-            <a:spLocks xmlns:a="http://schemas.openxmlformats.org/drawingml/2006/main" noGrp="1"/>
+            <a:spLocks noGrp="1" noRot="1" noChangeAspect="1"/>
           </p:cNvSpPr>
           <p:nvPr>
-            <p:ph type="sldImg" idx="0"/>
+            <p:ph type="sldImg"/>
           </p:nvPr>
         </p:nvSpPr>
         <p:spPr/>
@@ -849,7 +719,7 @@
         <p:nvSpPr>
           <p:cNvPr id="3" name="Notes Placeholder 2"/>
           <p:cNvSpPr>
-            <a:spLocks xmlns:a="http://schemas.openxmlformats.org/drawingml/2006/main" noGrp="1"/>
+            <a:spLocks noGrp="1"/>
           </p:cNvSpPr>
           <p:nvPr>
             <p:ph type="body" idx="1"/>
@@ -857,11 +727,11 @@
         </p:nvSpPr>
         <p:spPr/>
         <p:txBody>
-          <a:bodyPr xmlns:a="http://schemas.openxmlformats.org/drawingml/2006/main"/>
-          <a:lstStyle xmlns:a="http://schemas.openxmlformats.org/drawingml/2006/main"/>
-          <a:p xmlns:a="http://schemas.openxmlformats.org/drawingml/2006/main">
+          <a:bodyPr/>
+          <a:lstStyle/>
+          <a:p>
             <a:r>
-              <a:t>Fuente: datos privados de las carpetas autorizadas de Drive, procesados en IMTES Recaudo 360. Corte y cifras se generan para cada semana.</a:t>
+              <a:t/>
             </a:r>
           </a:p>
         </p:txBody>
@@ -870,7 +740,7 @@
         <p:nvSpPr>
           <p:cNvPr id="4" name="Slide Number Placeholder 3"/>
           <p:cNvSpPr>
-            <a:spLocks xmlns:a="http://schemas.openxmlformats.org/drawingml/2006/main" noGrp="1"/>
+            <a:spLocks noGrp="1"/>
           </p:cNvSpPr>
           <p:nvPr>
             <p:ph type="sldNum" idx="5"/>
@@ -878,21 +748,23 @@
         </p:nvSpPr>
         <p:spPr/>
         <p:txBody>
-          <a:bodyPr xmlns:a="http://schemas.openxmlformats.org/drawingml/2006/main"/>
-          <a:lstStyle xmlns:a="http://schemas.openxmlformats.org/drawingml/2006/main"/>
-          <a:p xmlns:a="http://schemas.openxmlformats.org/drawingml/2006/main"/>
+          <a:bodyPr/>
+          <a:lstStyle/>
+          <a:p>
+            <a:endParaRPr/>
+          </a:p>
         </p:txBody>
       </p:sp>
     </p:spTree>
   </p:cSld>
   <p:clrMapOvr>
-    <a:masterClrMapping xmlns:a="http://schemas.openxmlformats.org/drawingml/2006/main"/>
+    <a:masterClrMapping/>
   </p:clrMapOvr>
 </p:notes>
 </file>
 
 <file path=ppt/notesSlides/notesSlide5.xml><?xml version="1.0" encoding="utf-8"?>
-<p:notes xmlns:p="http://schemas.openxmlformats.org/presentationml/2006/main">
+<p:notes xmlns:a="http://schemas.openxmlformats.org/drawingml/2006/main" xmlns:r="http://schemas.openxmlformats.org/officeDocument/2006/relationships" xmlns:p="http://schemas.openxmlformats.org/presentationml/2006/main">
   <p:cSld>
     <p:spTree>
       <p:nvGrpSpPr>
@@ -901,16 +773,21 @@
         <p:nvPr/>
       </p:nvGrpSpPr>
       <p:grpSpPr>
-        <a:xfrm xmlns:a="http://schemas.openxmlformats.org/drawingml/2006/main"/>
+        <a:xfrm>
+          <a:off x="0" y="0"/>
+          <a:ext cx="0" cy="0"/>
+          <a:chOff x="0" y="0"/>
+          <a:chExt cx="0" cy="0"/>
+        </a:xfrm>
       </p:grpSpPr>
       <p:sp>
         <p:nvSpPr>
           <p:cNvPr id="2" name="Slide Image Placeholder 1"/>
           <p:cNvSpPr>
-            <a:spLocks xmlns:a="http://schemas.openxmlformats.org/drawingml/2006/main" noGrp="1"/>
+            <a:spLocks noGrp="1" noRot="1" noChangeAspect="1"/>
           </p:cNvSpPr>
           <p:nvPr>
-            <p:ph type="sldImg" idx="0"/>
+            <p:ph type="sldImg"/>
           </p:nvPr>
         </p:nvSpPr>
         <p:spPr/>
@@ -919,7 +796,7 @@
         <p:nvSpPr>
           <p:cNvPr id="3" name="Notes Placeholder 2"/>
           <p:cNvSpPr>
-            <a:spLocks xmlns:a="http://schemas.openxmlformats.org/drawingml/2006/main" noGrp="1"/>
+            <a:spLocks noGrp="1"/>
           </p:cNvSpPr>
           <p:nvPr>
             <p:ph type="body" idx="1"/>
@@ -927,11 +804,11 @@
         </p:nvSpPr>
         <p:spPr/>
         <p:txBody>
-          <a:bodyPr xmlns:a="http://schemas.openxmlformats.org/drawingml/2006/main"/>
-          <a:lstStyle xmlns:a="http://schemas.openxmlformats.org/drawingml/2006/main"/>
-          <a:p xmlns:a="http://schemas.openxmlformats.org/drawingml/2006/main">
+          <a:bodyPr/>
+          <a:lstStyle/>
+          <a:p>
             <a:r>
-              <a:t>Fuente: datos privados de las carpetas autorizadas de Drive, procesados en IMTES Recaudo 360. Corte y cifras se generan para cada semana.</a:t>
+              <a:t/>
             </a:r>
           </a:p>
         </p:txBody>
@@ -940,7 +817,7 @@
         <p:nvSpPr>
           <p:cNvPr id="4" name="Slide Number Placeholder 3"/>
           <p:cNvSpPr>
-            <a:spLocks xmlns:a="http://schemas.openxmlformats.org/drawingml/2006/main" noGrp="1"/>
+            <a:spLocks noGrp="1"/>
           </p:cNvSpPr>
           <p:nvPr>
             <p:ph type="sldNum" idx="5"/>
@@ -948,21 +825,23 @@
         </p:nvSpPr>
         <p:spPr/>
         <p:txBody>
-          <a:bodyPr xmlns:a="http://schemas.openxmlformats.org/drawingml/2006/main"/>
-          <a:lstStyle xmlns:a="http://schemas.openxmlformats.org/drawingml/2006/main"/>
-          <a:p xmlns:a="http://schemas.openxmlformats.org/drawingml/2006/main"/>
+          <a:bodyPr/>
+          <a:lstStyle/>
+          <a:p>
+            <a:endParaRPr/>
+          </a:p>
         </p:txBody>
       </p:sp>
     </p:spTree>
   </p:cSld>
   <p:clrMapOvr>
-    <a:masterClrMapping xmlns:a="http://schemas.openxmlformats.org/drawingml/2006/main"/>
+    <a:masterClrMapping/>
   </p:clrMapOvr>
 </p:notes>
 </file>
 
 <file path=ppt/notesSlides/notesSlide6.xml><?xml version="1.0" encoding="utf-8"?>
-<p:notes xmlns:p="http://schemas.openxmlformats.org/presentationml/2006/main">
+<p:notes xmlns:a="http://schemas.openxmlformats.org/drawingml/2006/main" xmlns:r="http://schemas.openxmlformats.org/officeDocument/2006/relationships" xmlns:p="http://schemas.openxmlformats.org/presentationml/2006/main">
   <p:cSld>
     <p:spTree>
       <p:nvGrpSpPr>
@@ -971,16 +850,21 @@
         <p:nvPr/>
       </p:nvGrpSpPr>
       <p:grpSpPr>
-        <a:xfrm xmlns:a="http://schemas.openxmlformats.org/drawingml/2006/main"/>
+        <a:xfrm>
+          <a:off x="0" y="0"/>
+          <a:ext cx="0" cy="0"/>
+          <a:chOff x="0" y="0"/>
+          <a:chExt cx="0" cy="0"/>
+        </a:xfrm>
       </p:grpSpPr>
       <p:sp>
         <p:nvSpPr>
           <p:cNvPr id="2" name="Slide Image Placeholder 1"/>
           <p:cNvSpPr>
-            <a:spLocks xmlns:a="http://schemas.openxmlformats.org/drawingml/2006/main" noGrp="1"/>
+            <a:spLocks noGrp="1" noRot="1" noChangeAspect="1"/>
           </p:cNvSpPr>
           <p:nvPr>
-            <p:ph type="sldImg" idx="0"/>
+            <p:ph type="sldImg"/>
           </p:nvPr>
         </p:nvSpPr>
         <p:spPr/>
@@ -989,7 +873,7 @@
         <p:nvSpPr>
           <p:cNvPr id="3" name="Notes Placeholder 2"/>
           <p:cNvSpPr>
-            <a:spLocks xmlns:a="http://schemas.openxmlformats.org/drawingml/2006/main" noGrp="1"/>
+            <a:spLocks noGrp="1"/>
           </p:cNvSpPr>
           <p:nvPr>
             <p:ph type="body" idx="1"/>
@@ -997,11 +881,11 @@
         </p:nvSpPr>
         <p:spPr/>
         <p:txBody>
-          <a:bodyPr xmlns:a="http://schemas.openxmlformats.org/drawingml/2006/main"/>
-          <a:lstStyle xmlns:a="http://schemas.openxmlformats.org/drawingml/2006/main"/>
-          <a:p xmlns:a="http://schemas.openxmlformats.org/drawingml/2006/main">
+          <a:bodyPr/>
+          <a:lstStyle/>
+          <a:p>
             <a:r>
-              <a:t>Fuente: datos privados de las carpetas autorizadas de Drive, procesados en IMTES Recaudo 360. Corte y cifras se generan para cada semana.</a:t>
+              <a:t/>
             </a:r>
           </a:p>
         </p:txBody>
@@ -1010,7 +894,7 @@
         <p:nvSpPr>
           <p:cNvPr id="4" name="Slide Number Placeholder 3"/>
           <p:cNvSpPr>
-            <a:spLocks xmlns:a="http://schemas.openxmlformats.org/drawingml/2006/main" noGrp="1"/>
+            <a:spLocks noGrp="1"/>
           </p:cNvSpPr>
           <p:nvPr>
             <p:ph type="sldNum" idx="5"/>
@@ -1018,21 +902,23 @@
         </p:nvSpPr>
         <p:spPr/>
         <p:txBody>
-          <a:bodyPr xmlns:a="http://schemas.openxmlformats.org/drawingml/2006/main"/>
-          <a:lstStyle xmlns:a="http://schemas.openxmlformats.org/drawingml/2006/main"/>
-          <a:p xmlns:a="http://schemas.openxmlformats.org/drawingml/2006/main"/>
+          <a:bodyPr/>
+          <a:lstStyle/>
+          <a:p>
+            <a:endParaRPr/>
+          </a:p>
         </p:txBody>
       </p:sp>
     </p:spTree>
   </p:cSld>
   <p:clrMapOvr>
-    <a:masterClrMapping xmlns:a="http://schemas.openxmlformats.org/drawingml/2006/main"/>
+    <a:masterClrMapping/>
   </p:clrMapOvr>
 </p:notes>
 </file>
 
 <file path=ppt/slideLayouts/slideLayout1.xml><?xml version="1.0" encoding="utf-8"?>
-<p:sldLayout xmlns:p="http://schemas.openxmlformats.org/presentationml/2006/main" type="title">
+<p:sldLayout xmlns:a="http://schemas.openxmlformats.org/drawingml/2006/main" xmlns:r="http://schemas.openxmlformats.org/officeDocument/2006/relationships" xmlns:p="http://schemas.openxmlformats.org/presentationml/2006/main" type="title">
   <p:cSld name="Diapositiva de título">
     <p:spTree>
       <p:nvGrpSpPr>
@@ -1041,42 +927,47 @@
         <p:nvPr/>
       </p:nvGrpSpPr>
       <p:grpSpPr>
-        <a:xfrm xmlns:a="http://schemas.openxmlformats.org/drawingml/2006/main"/>
+        <a:xfrm>
+          <a:off x="0" y="0"/>
+          <a:ext cx="0" cy="0"/>
+          <a:chOff x="0" y="0"/>
+          <a:chExt cx="0" cy="0"/>
+        </a:xfrm>
       </p:grpSpPr>
       <p:sp>
         <p:nvSpPr>
           <p:cNvPr id="11" name="Texto del título">
-            <a:extLst xmlns:a="http://schemas.openxmlformats.org/drawingml/2006/main">
+            <a:extLst>
               <a:ext uri="{FF2B5EF4-FFF2-40B4-BE49-F238E27FC236}">
                 <a16:creationId xmlns:a16="http://schemas.microsoft.com/office/drawing/2014/main" id="{4BA3C27B-65BE-47B1-B183-2C392811E281}"/>
               </a:ext>
             </a:extLst>
           </p:cNvPr>
           <p:cNvSpPr>
-            <a:spLocks xmlns:a="http://schemas.openxmlformats.org/drawingml/2006/main" noGrp="1"/>
+            <a:spLocks noGrp="1"/>
           </p:cNvSpPr>
           <p:nvPr>
-            <p:ph type="title" idx="0"/>
+            <p:ph type="title"/>
           </p:nvPr>
         </p:nvSpPr>
         <p:spPr>
-          <a:xfrm xmlns:a="http://schemas.openxmlformats.org/drawingml/2006/main">
+          <a:xfrm>
             <a:off x="1524000" y="1122362"/>
             <a:ext cx="9144000" cy="2387601"/>
           </a:xfrm>
-          <a:prstGeom xmlns:a="http://schemas.openxmlformats.org/drawingml/2006/main" prst="rect">
+          <a:prstGeom prst="rect">
             <a:avLst/>
           </a:prstGeom>
         </p:spPr>
         <p:txBody>
-          <a:bodyPr xmlns:a="http://schemas.openxmlformats.org/drawingml/2006/main" anchor="b"/>
-          <a:lstStyle xmlns:a="http://schemas.openxmlformats.org/drawingml/2006/main">
+          <a:bodyPr anchor="b"/>
+          <a:lstStyle>
             <a:lvl1pPr algn="ctr">
               <a:buNone/>
               <a:defRPr sz="6000"/>
             </a:lvl1pPr>
           </a:lstStyle>
-          <a:p xmlns:a="http://schemas.openxmlformats.org/drawingml/2006/main">
+          <a:p>
             <a:r>
               <a:t>Texto del título</a:t>
             </a:r>
@@ -1086,31 +977,31 @@
       <p:sp>
         <p:nvSpPr>
           <p:cNvPr id="12" name="Nivel de texto 1…">
-            <a:extLst xmlns:a="http://schemas.openxmlformats.org/drawingml/2006/main">
+            <a:extLst>
               <a:ext uri="{FF2B5EF4-FFF2-40B4-BE49-F238E27FC236}">
                 <a16:creationId xmlns:a16="http://schemas.microsoft.com/office/drawing/2014/main" id="{A490A59D-49E8-48F1-BC37-510573510B6D}"/>
               </a:ext>
             </a:extLst>
           </p:cNvPr>
           <p:cNvSpPr>
-            <a:spLocks xmlns:a="http://schemas.openxmlformats.org/drawingml/2006/main" noGrp="1"/>
+            <a:spLocks noGrp="1"/>
           </p:cNvSpPr>
           <p:nvPr>
             <p:ph type="body" idx="1"/>
           </p:nvPr>
         </p:nvSpPr>
         <p:spPr>
-          <a:xfrm xmlns:a="http://schemas.openxmlformats.org/drawingml/2006/main">
+          <a:xfrm>
             <a:off x="1524000" y="3602037"/>
             <a:ext cx="9144000" cy="1655763"/>
           </a:xfrm>
-          <a:prstGeom xmlns:a="http://schemas.openxmlformats.org/drawingml/2006/main" prst="rect">
+          <a:prstGeom prst="rect">
             <a:avLst/>
           </a:prstGeom>
         </p:spPr>
         <p:txBody>
-          <a:bodyPr xmlns:a="http://schemas.openxmlformats.org/drawingml/2006/main"/>
-          <a:lstStyle xmlns:a="http://schemas.openxmlformats.org/drawingml/2006/main">
+          <a:bodyPr/>
+          <a:lstStyle>
             <a:lvl1pPr marL="0" indent="0" algn="ctr">
               <a:buSzTx/>
               <a:buFontTx/>
@@ -1142,12 +1033,12 @@
               <a:defRPr sz="2400"/>
             </a:lvl5pPr>
           </a:lstStyle>
-          <a:p xmlns:a="http://schemas.openxmlformats.org/drawingml/2006/main">
+          <a:p>
             <a:r>
               <a:t>Nivel de texto 1</a:t>
             </a:r>
           </a:p>
-          <a:p xmlns:a="http://schemas.openxmlformats.org/drawingml/2006/main">
+          <a:p>
             <a:pPr lvl="1">
               <a:buNone/>
             </a:pPr>
@@ -1155,7 +1046,7 @@
               <a:t>Nivel de texto 2</a:t>
             </a:r>
           </a:p>
-          <a:p xmlns:a="http://schemas.openxmlformats.org/drawingml/2006/main">
+          <a:p>
             <a:pPr lvl="2">
               <a:buNone/>
             </a:pPr>
@@ -1163,7 +1054,7 @@
               <a:t>Nivel de texto 3</a:t>
             </a:r>
           </a:p>
-          <a:p xmlns:a="http://schemas.openxmlformats.org/drawingml/2006/main">
+          <a:p>
             <a:pPr lvl="3">
               <a:buNone/>
             </a:pPr>
@@ -1171,7 +1062,7 @@
               <a:t>Nivel de texto 4</a:t>
             </a:r>
           </a:p>
-          <a:p xmlns:a="http://schemas.openxmlformats.org/drawingml/2006/main">
+          <a:p>
             <a:pPr lvl="4">
               <a:buNone/>
             </a:pPr>
@@ -1184,30 +1075,30 @@
       <p:sp>
         <p:nvSpPr>
           <p:cNvPr id="13" name="Número de diapositiva">
-            <a:extLst xmlns:a="http://schemas.openxmlformats.org/drawingml/2006/main">
+            <a:extLst>
               <a:ext uri="{FF2B5EF4-FFF2-40B4-BE49-F238E27FC236}">
                 <a16:creationId xmlns:a16="http://schemas.microsoft.com/office/drawing/2014/main" id="{21E06E3D-EF41-4B19-85D9-95F312663B19}"/>
               </a:ext>
             </a:extLst>
           </p:cNvPr>
           <p:cNvSpPr>
-            <a:spLocks xmlns:a="http://schemas.openxmlformats.org/drawingml/2006/main" noGrp="1"/>
+            <a:spLocks noGrp="1"/>
           </p:cNvSpPr>
           <p:nvPr>
             <p:ph type="sldNum" idx="2"/>
           </p:nvPr>
         </p:nvSpPr>
         <p:spPr>
-          <a:prstGeom xmlns:a="http://schemas.openxmlformats.org/drawingml/2006/main" prst="rect">
+          <a:prstGeom prst="rect">
             <a:avLst/>
           </a:prstGeom>
         </p:spPr>
         <p:txBody>
-          <a:bodyPr xmlns:a="http://schemas.openxmlformats.org/drawingml/2006/main"/>
-          <a:lstStyle xmlns:a="http://schemas.openxmlformats.org/drawingml/2006/main"/>
-          <a:p xmlns:a="http://schemas.openxmlformats.org/drawingml/2006/main">
+          <a:bodyPr/>
+          <a:lstStyle/>
+          <a:p>
             <a:fld id="{86CB4B4D-7CA3-9044-876B-883B54F8677D}" type="slidenum">
-              <a:t>‹Nº›</a:t>
+              <a:t>‹#›</a:t>
             </a:fld>
             <a:endParaRPr/>
           </a:p>
@@ -1215,11 +1106,14 @@
       </p:sp>
     </p:spTree>
   </p:cSld>
+  <p:clrMapOvr>
+    <a:masterClrMapping/>
+  </p:clrMapOvr>
 </p:sldLayout>
 </file>
 
 <file path=ppt/slideLayouts/slideLayout2.xml><?xml version="1.0" encoding="utf-8"?>
-<p:sldLayout xmlns:p="http://schemas.openxmlformats.org/presentationml/2006/main">
+<p:sldLayout xmlns:a="http://schemas.openxmlformats.org/drawingml/2006/main" xmlns:r="http://schemas.openxmlformats.org/officeDocument/2006/relationships" xmlns:p="http://schemas.openxmlformats.org/presentationml/2006/main">
   <p:cSld name="Título y objetos">
     <p:spTree>
       <p:nvGrpSpPr>
@@ -1228,33 +1122,38 @@
         <p:nvPr/>
       </p:nvGrpSpPr>
       <p:grpSpPr>
-        <a:xfrm xmlns:a="http://schemas.openxmlformats.org/drawingml/2006/main"/>
+        <a:xfrm>
+          <a:off x="0" y="0"/>
+          <a:ext cx="0" cy="0"/>
+          <a:chOff x="0" y="0"/>
+          <a:chExt cx="0" cy="0"/>
+        </a:xfrm>
       </p:grpSpPr>
       <p:sp>
         <p:nvSpPr>
           <p:cNvPr id="20" name="Texto del título">
-            <a:extLst xmlns:a="http://schemas.openxmlformats.org/drawingml/2006/main">
+            <a:extLst>
               <a:ext uri="{FF2B5EF4-FFF2-40B4-BE49-F238E27FC236}">
                 <a16:creationId xmlns:a16="http://schemas.microsoft.com/office/drawing/2014/main" id="{7E91A765-E427-4D23-9237-71A31045CB6A}"/>
               </a:ext>
             </a:extLst>
           </p:cNvPr>
           <p:cNvSpPr>
-            <a:spLocks xmlns:a="http://schemas.openxmlformats.org/drawingml/2006/main" noGrp="1"/>
+            <a:spLocks noGrp="1"/>
           </p:cNvSpPr>
           <p:nvPr>
-            <p:ph type="title" idx="0"/>
+            <p:ph type="title"/>
           </p:nvPr>
         </p:nvSpPr>
         <p:spPr>
-          <a:prstGeom xmlns:a="http://schemas.openxmlformats.org/drawingml/2006/main" prst="rect">
+          <a:prstGeom prst="rect">
             <a:avLst/>
           </a:prstGeom>
         </p:spPr>
         <p:txBody>
-          <a:bodyPr xmlns:a="http://schemas.openxmlformats.org/drawingml/2006/main"/>
-          <a:lstStyle xmlns:a="http://schemas.openxmlformats.org/drawingml/2006/main"/>
-          <a:p xmlns:a="http://schemas.openxmlformats.org/drawingml/2006/main">
+          <a:bodyPr/>
+          <a:lstStyle/>
+          <a:p>
             <a:r>
               <a:t>Texto del título</a:t>
             </a:r>
@@ -1264,33 +1163,33 @@
       <p:sp>
         <p:nvSpPr>
           <p:cNvPr id="21" name="Nivel de texto 1…">
-            <a:extLst xmlns:a="http://schemas.openxmlformats.org/drawingml/2006/main">
+            <a:extLst>
               <a:ext uri="{FF2B5EF4-FFF2-40B4-BE49-F238E27FC236}">
                 <a16:creationId xmlns:a16="http://schemas.microsoft.com/office/drawing/2014/main" id="{B72084F3-184B-42C3-ABB3-3F08FD58EC87}"/>
               </a:ext>
             </a:extLst>
           </p:cNvPr>
           <p:cNvSpPr>
-            <a:spLocks xmlns:a="http://schemas.openxmlformats.org/drawingml/2006/main" noGrp="1"/>
+            <a:spLocks noGrp="1"/>
           </p:cNvSpPr>
           <p:nvPr>
             <p:ph type="body" idx="1"/>
           </p:nvPr>
         </p:nvSpPr>
         <p:spPr>
-          <a:prstGeom xmlns:a="http://schemas.openxmlformats.org/drawingml/2006/main" prst="rect">
+          <a:prstGeom prst="rect">
             <a:avLst/>
           </a:prstGeom>
         </p:spPr>
         <p:txBody>
-          <a:bodyPr xmlns:a="http://schemas.openxmlformats.org/drawingml/2006/main"/>
-          <a:lstStyle xmlns:a="http://schemas.openxmlformats.org/drawingml/2006/main"/>
-          <a:p xmlns:a="http://schemas.openxmlformats.org/drawingml/2006/main">
+          <a:bodyPr/>
+          <a:lstStyle/>
+          <a:p>
             <a:r>
               <a:t>Nivel de texto 1</a:t>
             </a:r>
           </a:p>
-          <a:p xmlns:a="http://schemas.openxmlformats.org/drawingml/2006/main">
+          <a:p>
             <a:pPr lvl="1">
               <a:buNone/>
             </a:pPr>
@@ -1298,7 +1197,7 @@
               <a:t>Nivel de texto 2</a:t>
             </a:r>
           </a:p>
-          <a:p xmlns:a="http://schemas.openxmlformats.org/drawingml/2006/main">
+          <a:p>
             <a:pPr lvl="2">
               <a:buNone/>
             </a:pPr>
@@ -1306,7 +1205,7 @@
               <a:t>Nivel de texto 3</a:t>
             </a:r>
           </a:p>
-          <a:p xmlns:a="http://schemas.openxmlformats.org/drawingml/2006/main">
+          <a:p>
             <a:pPr lvl="3">
               <a:buNone/>
             </a:pPr>
@@ -1314,7 +1213,7 @@
               <a:t>Nivel de texto 4</a:t>
             </a:r>
           </a:p>
-          <a:p xmlns:a="http://schemas.openxmlformats.org/drawingml/2006/main">
+          <a:p>
             <a:pPr lvl="4">
               <a:buNone/>
             </a:pPr>
@@ -1327,30 +1226,30 @@
       <p:sp>
         <p:nvSpPr>
           <p:cNvPr id="22" name="Número de diapositiva">
-            <a:extLst xmlns:a="http://schemas.openxmlformats.org/drawingml/2006/main">
+            <a:extLst>
               <a:ext uri="{FF2B5EF4-FFF2-40B4-BE49-F238E27FC236}">
                 <a16:creationId xmlns:a16="http://schemas.microsoft.com/office/drawing/2014/main" id="{ADB66C76-A025-4E74-B7E8-DAD7E5AE409C}"/>
               </a:ext>
             </a:extLst>
           </p:cNvPr>
           <p:cNvSpPr>
-            <a:spLocks xmlns:a="http://schemas.openxmlformats.org/drawingml/2006/main" noGrp="1"/>
+            <a:spLocks noGrp="1"/>
           </p:cNvSpPr>
           <p:nvPr>
             <p:ph type="sldNum" idx="2"/>
           </p:nvPr>
         </p:nvSpPr>
         <p:spPr>
-          <a:prstGeom xmlns:a="http://schemas.openxmlformats.org/drawingml/2006/main" prst="rect">
+          <a:prstGeom prst="rect">
             <a:avLst/>
           </a:prstGeom>
         </p:spPr>
         <p:txBody>
-          <a:bodyPr xmlns:a="http://schemas.openxmlformats.org/drawingml/2006/main"/>
-          <a:lstStyle xmlns:a="http://schemas.openxmlformats.org/drawingml/2006/main"/>
-          <a:p xmlns:a="http://schemas.openxmlformats.org/drawingml/2006/main">
+          <a:bodyPr/>
+          <a:lstStyle/>
+          <a:p>
             <a:fld id="{86CB4B4D-7CA3-9044-876B-883B54F8677D}" type="slidenum">
-              <a:t>‹Nº›</a:t>
+              <a:t>‹#›</a:t>
             </a:fld>
             <a:endParaRPr/>
           </a:p>
@@ -1358,11 +1257,14 @@
       </p:sp>
     </p:spTree>
   </p:cSld>
+  <p:clrMapOvr>
+    <a:masterClrMapping/>
+  </p:clrMapOvr>
 </p:sldLayout>
 </file>
 
 <file path=ppt/slideLayouts/slideLayout3.xml><?xml version="1.0" encoding="utf-8"?>
-<p:sldLayout xmlns:p="http://schemas.openxmlformats.org/presentationml/2006/main">
+<p:sldLayout xmlns:a="http://schemas.openxmlformats.org/drawingml/2006/main" xmlns:r="http://schemas.openxmlformats.org/officeDocument/2006/relationships" xmlns:p="http://schemas.openxmlformats.org/presentationml/2006/main">
   <p:cSld name="Encabezado de sección">
     <p:spTree>
       <p:nvGrpSpPr>
@@ -1371,42 +1273,47 @@
         <p:nvPr/>
       </p:nvGrpSpPr>
       <p:grpSpPr>
-        <a:xfrm xmlns:a="http://schemas.openxmlformats.org/drawingml/2006/main"/>
+        <a:xfrm>
+          <a:off x="0" y="0"/>
+          <a:ext cx="0" cy="0"/>
+          <a:chOff x="0" y="0"/>
+          <a:chExt cx="0" cy="0"/>
+        </a:xfrm>
       </p:grpSpPr>
       <p:sp>
         <p:nvSpPr>
           <p:cNvPr id="29" name="Texto del título">
-            <a:extLst xmlns:a="http://schemas.openxmlformats.org/drawingml/2006/main">
+            <a:extLst>
               <a:ext uri="{FF2B5EF4-FFF2-40B4-BE49-F238E27FC236}">
                 <a16:creationId xmlns:a16="http://schemas.microsoft.com/office/drawing/2014/main" id="{A6A2FD0D-038D-4C4D-B3CA-988B22C4A19B}"/>
               </a:ext>
             </a:extLst>
           </p:cNvPr>
           <p:cNvSpPr>
-            <a:spLocks xmlns:a="http://schemas.openxmlformats.org/drawingml/2006/main" noGrp="1"/>
+            <a:spLocks noGrp="1"/>
           </p:cNvSpPr>
           <p:nvPr>
-            <p:ph type="title" idx="0"/>
+            <p:ph type="title"/>
           </p:nvPr>
         </p:nvSpPr>
         <p:spPr>
-          <a:xfrm xmlns:a="http://schemas.openxmlformats.org/drawingml/2006/main">
+          <a:xfrm>
             <a:off x="831850" y="1709738"/>
             <a:ext cx="10515600" cy="2852737"/>
           </a:xfrm>
-          <a:prstGeom xmlns:a="http://schemas.openxmlformats.org/drawingml/2006/main" prst="rect">
+          <a:prstGeom prst="rect">
             <a:avLst/>
           </a:prstGeom>
         </p:spPr>
         <p:txBody>
-          <a:bodyPr xmlns:a="http://schemas.openxmlformats.org/drawingml/2006/main" anchor="b"/>
-          <a:lstStyle xmlns:a="http://schemas.openxmlformats.org/drawingml/2006/main">
+          <a:bodyPr anchor="b"/>
+          <a:lstStyle>
             <a:lvl1pPr>
               <a:buNone/>
               <a:defRPr sz="6000"/>
             </a:lvl1pPr>
           </a:lstStyle>
-          <a:p xmlns:a="http://schemas.openxmlformats.org/drawingml/2006/main">
+          <a:p>
             <a:r>
               <a:t>Texto del título</a:t>
             </a:r>
@@ -1416,31 +1323,31 @@
       <p:sp>
         <p:nvSpPr>
           <p:cNvPr id="30" name="Nivel de texto 1…">
-            <a:extLst xmlns:a="http://schemas.openxmlformats.org/drawingml/2006/main">
+            <a:extLst>
               <a:ext uri="{FF2B5EF4-FFF2-40B4-BE49-F238E27FC236}">
                 <a16:creationId xmlns:a16="http://schemas.microsoft.com/office/drawing/2014/main" id="{5F620563-E8A3-4B60-87B7-C88B10576EFE}"/>
               </a:ext>
             </a:extLst>
           </p:cNvPr>
           <p:cNvSpPr>
-            <a:spLocks xmlns:a="http://schemas.openxmlformats.org/drawingml/2006/main" noGrp="1"/>
+            <a:spLocks noGrp="1"/>
           </p:cNvSpPr>
           <p:nvPr>
             <p:ph type="body" idx="1"/>
           </p:nvPr>
         </p:nvSpPr>
         <p:spPr>
-          <a:xfrm xmlns:a="http://schemas.openxmlformats.org/drawingml/2006/main">
+          <a:xfrm>
             <a:off x="831850" y="4589462"/>
             <a:ext cx="10515600" cy="1500188"/>
           </a:xfrm>
-          <a:prstGeom xmlns:a="http://schemas.openxmlformats.org/drawingml/2006/main" prst="rect">
+          <a:prstGeom prst="rect">
             <a:avLst/>
           </a:prstGeom>
         </p:spPr>
         <p:txBody>
-          <a:bodyPr xmlns:a="http://schemas.openxmlformats.org/drawingml/2006/main"/>
-          <a:lstStyle xmlns:a="http://schemas.openxmlformats.org/drawingml/2006/main">
+          <a:bodyPr/>
+          <a:lstStyle>
             <a:lvl1pPr marL="0" indent="0">
               <a:buSzTx/>
               <a:buFontTx/>
@@ -1492,12 +1399,12 @@
               </a:defRPr>
             </a:lvl5pPr>
           </a:lstStyle>
-          <a:p xmlns:a="http://schemas.openxmlformats.org/drawingml/2006/main">
+          <a:p>
             <a:r>
               <a:t>Nivel de texto 1</a:t>
             </a:r>
           </a:p>
-          <a:p xmlns:a="http://schemas.openxmlformats.org/drawingml/2006/main">
+          <a:p>
             <a:pPr lvl="1">
               <a:buNone/>
             </a:pPr>
@@ -1505,7 +1412,7 @@
               <a:t>Nivel de texto 2</a:t>
             </a:r>
           </a:p>
-          <a:p xmlns:a="http://schemas.openxmlformats.org/drawingml/2006/main">
+          <a:p>
             <a:pPr lvl="2">
               <a:buNone/>
             </a:pPr>
@@ -1513,7 +1420,7 @@
               <a:t>Nivel de texto 3</a:t>
             </a:r>
           </a:p>
-          <a:p xmlns:a="http://schemas.openxmlformats.org/drawingml/2006/main">
+          <a:p>
             <a:pPr lvl="3">
               <a:buNone/>
             </a:pPr>
@@ -1521,7 +1428,7 @@
               <a:t>Nivel de texto 4</a:t>
             </a:r>
           </a:p>
-          <a:p xmlns:a="http://schemas.openxmlformats.org/drawingml/2006/main">
+          <a:p>
             <a:pPr lvl="4">
               <a:buNone/>
             </a:pPr>
@@ -1534,30 +1441,30 @@
       <p:sp>
         <p:nvSpPr>
           <p:cNvPr id="31" name="Número de diapositiva">
-            <a:extLst xmlns:a="http://schemas.openxmlformats.org/drawingml/2006/main">
+            <a:extLst>
               <a:ext uri="{FF2B5EF4-FFF2-40B4-BE49-F238E27FC236}">
                 <a16:creationId xmlns:a16="http://schemas.microsoft.com/office/drawing/2014/main" id="{5A3BAE71-954B-49C0-A17F-D2A554F3B68E}"/>
               </a:ext>
             </a:extLst>
           </p:cNvPr>
           <p:cNvSpPr>
-            <a:spLocks xmlns:a="http://schemas.openxmlformats.org/drawingml/2006/main" noGrp="1"/>
+            <a:spLocks noGrp="1"/>
           </p:cNvSpPr>
           <p:nvPr>
             <p:ph type="sldNum" idx="2"/>
           </p:nvPr>
         </p:nvSpPr>
         <p:spPr>
-          <a:prstGeom xmlns:a="http://schemas.openxmlformats.org/drawingml/2006/main" prst="rect">
+          <a:prstGeom prst="rect">
             <a:avLst/>
           </a:prstGeom>
         </p:spPr>
         <p:txBody>
-          <a:bodyPr xmlns:a="http://schemas.openxmlformats.org/drawingml/2006/main"/>
-          <a:lstStyle xmlns:a="http://schemas.openxmlformats.org/drawingml/2006/main"/>
-          <a:p xmlns:a="http://schemas.openxmlformats.org/drawingml/2006/main">
+          <a:bodyPr/>
+          <a:lstStyle/>
+          <a:p>
             <a:fld id="{86CB4B4D-7CA3-9044-876B-883B54F8677D}" type="slidenum">
-              <a:t>‹Nº›</a:t>
+              <a:t>‹#›</a:t>
             </a:fld>
             <a:endParaRPr/>
           </a:p>
@@ -1565,11 +1472,14 @@
       </p:sp>
     </p:spTree>
   </p:cSld>
+  <p:clrMapOvr>
+    <a:masterClrMapping/>
+  </p:clrMapOvr>
 </p:sldLayout>
 </file>
 
 <file path=ppt/slideLayouts/slideLayout4.xml><?xml version="1.0" encoding="utf-8"?>
-<p:sldLayout xmlns:p="http://schemas.openxmlformats.org/presentationml/2006/main">
+<p:sldLayout xmlns:a="http://schemas.openxmlformats.org/drawingml/2006/main" xmlns:r="http://schemas.openxmlformats.org/officeDocument/2006/relationships" xmlns:p="http://schemas.openxmlformats.org/presentationml/2006/main">
   <p:cSld name="Dos objetos">
     <p:spTree>
       <p:nvGrpSpPr>
@@ -1578,33 +1488,38 @@
         <p:nvPr/>
       </p:nvGrpSpPr>
       <p:grpSpPr>
-        <a:xfrm xmlns:a="http://schemas.openxmlformats.org/drawingml/2006/main"/>
+        <a:xfrm>
+          <a:off x="0" y="0"/>
+          <a:ext cx="0" cy="0"/>
+          <a:chOff x="0" y="0"/>
+          <a:chExt cx="0" cy="0"/>
+        </a:xfrm>
       </p:grpSpPr>
       <p:sp>
         <p:nvSpPr>
           <p:cNvPr id="38" name="Texto del título">
-            <a:extLst xmlns:a="http://schemas.openxmlformats.org/drawingml/2006/main">
+            <a:extLst>
               <a:ext uri="{FF2B5EF4-FFF2-40B4-BE49-F238E27FC236}">
                 <a16:creationId xmlns:a16="http://schemas.microsoft.com/office/drawing/2014/main" id="{A19727FE-A2C9-43E5-B87A-24B42CA92451}"/>
               </a:ext>
             </a:extLst>
           </p:cNvPr>
           <p:cNvSpPr>
-            <a:spLocks xmlns:a="http://schemas.openxmlformats.org/drawingml/2006/main" noGrp="1"/>
+            <a:spLocks noGrp="1"/>
           </p:cNvSpPr>
           <p:nvPr>
-            <p:ph type="title" idx="0"/>
+            <p:ph type="title"/>
           </p:nvPr>
         </p:nvSpPr>
         <p:spPr>
-          <a:prstGeom xmlns:a="http://schemas.openxmlformats.org/drawingml/2006/main" prst="rect">
+          <a:prstGeom prst="rect">
             <a:avLst/>
           </a:prstGeom>
         </p:spPr>
         <p:txBody>
-          <a:bodyPr xmlns:a="http://schemas.openxmlformats.org/drawingml/2006/main"/>
-          <a:lstStyle xmlns:a="http://schemas.openxmlformats.org/drawingml/2006/main"/>
-          <a:p xmlns:a="http://schemas.openxmlformats.org/drawingml/2006/main">
+          <a:bodyPr/>
+          <a:lstStyle/>
+          <a:p>
             <a:r>
               <a:t>Texto del título</a:t>
             </a:r>
@@ -1614,37 +1529,37 @@
       <p:sp>
         <p:nvSpPr>
           <p:cNvPr id="39" name="Nivel de texto 1…">
-            <a:extLst xmlns:a="http://schemas.openxmlformats.org/drawingml/2006/main">
+            <a:extLst>
               <a:ext uri="{FF2B5EF4-FFF2-40B4-BE49-F238E27FC236}">
                 <a16:creationId xmlns:a16="http://schemas.microsoft.com/office/drawing/2014/main" id="{C9421067-1C74-44DB-A9CF-A03A9BA3AB4B}"/>
               </a:ext>
             </a:extLst>
           </p:cNvPr>
           <p:cNvSpPr>
-            <a:spLocks xmlns:a="http://schemas.openxmlformats.org/drawingml/2006/main" noGrp="1"/>
+            <a:spLocks noGrp="1"/>
           </p:cNvSpPr>
           <p:nvPr>
             <p:ph type="body" idx="1"/>
           </p:nvPr>
         </p:nvSpPr>
         <p:spPr>
-          <a:xfrm xmlns:a="http://schemas.openxmlformats.org/drawingml/2006/main">
+          <a:xfrm>
             <a:off x="838200" y="1825625"/>
             <a:ext cx="5181600" cy="4351338"/>
           </a:xfrm>
-          <a:prstGeom xmlns:a="http://schemas.openxmlformats.org/drawingml/2006/main" prst="rect">
+          <a:prstGeom prst="rect">
             <a:avLst/>
           </a:prstGeom>
         </p:spPr>
         <p:txBody>
-          <a:bodyPr xmlns:a="http://schemas.openxmlformats.org/drawingml/2006/main"/>
-          <a:lstStyle xmlns:a="http://schemas.openxmlformats.org/drawingml/2006/main"/>
-          <a:p xmlns:a="http://schemas.openxmlformats.org/drawingml/2006/main">
+          <a:bodyPr/>
+          <a:lstStyle/>
+          <a:p>
             <a:r>
               <a:t>Nivel de texto 1</a:t>
             </a:r>
           </a:p>
-          <a:p xmlns:a="http://schemas.openxmlformats.org/drawingml/2006/main">
+          <a:p>
             <a:pPr lvl="1">
               <a:buNone/>
             </a:pPr>
@@ -1652,7 +1567,7 @@
               <a:t>Nivel de texto 2</a:t>
             </a:r>
           </a:p>
-          <a:p xmlns:a="http://schemas.openxmlformats.org/drawingml/2006/main">
+          <a:p>
             <a:pPr lvl="2">
               <a:buNone/>
             </a:pPr>
@@ -1660,7 +1575,7 @@
               <a:t>Nivel de texto 3</a:t>
             </a:r>
           </a:p>
-          <a:p xmlns:a="http://schemas.openxmlformats.org/drawingml/2006/main">
+          <a:p>
             <a:pPr lvl="3">
               <a:buNone/>
             </a:pPr>
@@ -1668,7 +1583,7 @@
               <a:t>Nivel de texto 4</a:t>
             </a:r>
           </a:p>
-          <a:p xmlns:a="http://schemas.openxmlformats.org/drawingml/2006/main">
+          <a:p>
             <a:pPr lvl="4">
               <a:buNone/>
             </a:pPr>
@@ -1681,30 +1596,30 @@
       <p:sp>
         <p:nvSpPr>
           <p:cNvPr id="40" name="Número de diapositiva">
-            <a:extLst xmlns:a="http://schemas.openxmlformats.org/drawingml/2006/main">
+            <a:extLst>
               <a:ext uri="{FF2B5EF4-FFF2-40B4-BE49-F238E27FC236}">
                 <a16:creationId xmlns:a16="http://schemas.microsoft.com/office/drawing/2014/main" id="{CAD3D6E9-4B47-4472-BDF6-EEB9F1B9D2E3}"/>
               </a:ext>
             </a:extLst>
           </p:cNvPr>
           <p:cNvSpPr>
-            <a:spLocks xmlns:a="http://schemas.openxmlformats.org/drawingml/2006/main" noGrp="1"/>
+            <a:spLocks noGrp="1"/>
           </p:cNvSpPr>
           <p:nvPr>
             <p:ph type="sldNum" idx="2"/>
           </p:nvPr>
         </p:nvSpPr>
         <p:spPr>
-          <a:prstGeom xmlns:a="http://schemas.openxmlformats.org/drawingml/2006/main" prst="rect">
+          <a:prstGeom prst="rect">
             <a:avLst/>
           </a:prstGeom>
         </p:spPr>
         <p:txBody>
-          <a:bodyPr xmlns:a="http://schemas.openxmlformats.org/drawingml/2006/main"/>
-          <a:lstStyle xmlns:a="http://schemas.openxmlformats.org/drawingml/2006/main"/>
-          <a:p xmlns:a="http://schemas.openxmlformats.org/drawingml/2006/main">
+          <a:bodyPr/>
+          <a:lstStyle/>
+          <a:p>
             <a:fld id="{86CB4B4D-7CA3-9044-876B-883B54F8677D}" type="slidenum">
-              <a:t>‹Nº›</a:t>
+              <a:t>‹#›</a:t>
             </a:fld>
             <a:endParaRPr/>
           </a:p>
@@ -1712,11 +1627,14 @@
       </p:sp>
     </p:spTree>
   </p:cSld>
+  <p:clrMapOvr>
+    <a:masterClrMapping/>
+  </p:clrMapOvr>
 </p:sldLayout>
 </file>
 
 <file path=ppt/slideLayouts/slideLayout5.xml><?xml version="1.0" encoding="utf-8"?>
-<p:sldLayout xmlns:p="http://schemas.openxmlformats.org/presentationml/2006/main">
+<p:sldLayout xmlns:a="http://schemas.openxmlformats.org/drawingml/2006/main" xmlns:r="http://schemas.openxmlformats.org/officeDocument/2006/relationships" xmlns:p="http://schemas.openxmlformats.org/presentationml/2006/main">
   <p:cSld name="Comparación">
     <p:spTree>
       <p:nvGrpSpPr>
@@ -1725,37 +1643,42 @@
         <p:nvPr/>
       </p:nvGrpSpPr>
       <p:grpSpPr>
-        <a:xfrm xmlns:a="http://schemas.openxmlformats.org/drawingml/2006/main"/>
+        <a:xfrm>
+          <a:off x="0" y="0"/>
+          <a:ext cx="0" cy="0"/>
+          <a:chOff x="0" y="0"/>
+          <a:chExt cx="0" cy="0"/>
+        </a:xfrm>
       </p:grpSpPr>
       <p:sp>
         <p:nvSpPr>
           <p:cNvPr id="47" name="Texto del título">
-            <a:extLst xmlns:a="http://schemas.openxmlformats.org/drawingml/2006/main">
+            <a:extLst>
               <a:ext uri="{FF2B5EF4-FFF2-40B4-BE49-F238E27FC236}">
                 <a16:creationId xmlns:a16="http://schemas.microsoft.com/office/drawing/2014/main" id="{12795592-87CB-44BE-83EE-B5FAD1DE6D12}"/>
               </a:ext>
             </a:extLst>
           </p:cNvPr>
           <p:cNvSpPr>
-            <a:spLocks xmlns:a="http://schemas.openxmlformats.org/drawingml/2006/main" noGrp="1"/>
+            <a:spLocks noGrp="1"/>
           </p:cNvSpPr>
           <p:nvPr>
-            <p:ph type="title" idx="0"/>
+            <p:ph type="title"/>
           </p:nvPr>
         </p:nvSpPr>
         <p:spPr>
-          <a:xfrm xmlns:a="http://schemas.openxmlformats.org/drawingml/2006/main">
+          <a:xfrm>
             <a:off x="839787" y="365125"/>
             <a:ext cx="10515601" cy="1325563"/>
           </a:xfrm>
-          <a:prstGeom xmlns:a="http://schemas.openxmlformats.org/drawingml/2006/main" prst="rect">
+          <a:prstGeom prst="rect">
             <a:avLst/>
           </a:prstGeom>
         </p:spPr>
         <p:txBody>
-          <a:bodyPr xmlns:a="http://schemas.openxmlformats.org/drawingml/2006/main"/>
-          <a:lstStyle xmlns:a="http://schemas.openxmlformats.org/drawingml/2006/main"/>
-          <a:p xmlns:a="http://schemas.openxmlformats.org/drawingml/2006/main">
+          <a:bodyPr/>
+          <a:lstStyle/>
+          <a:p>
             <a:r>
               <a:t>Texto del título</a:t>
             </a:r>
@@ -1765,31 +1688,31 @@
       <p:sp>
         <p:nvSpPr>
           <p:cNvPr id="48" name="Nivel de texto 1…">
-            <a:extLst xmlns:a="http://schemas.openxmlformats.org/drawingml/2006/main">
+            <a:extLst>
               <a:ext uri="{FF2B5EF4-FFF2-40B4-BE49-F238E27FC236}">
                 <a16:creationId xmlns:a16="http://schemas.microsoft.com/office/drawing/2014/main" id="{473F5B52-C230-4B97-87FA-0608059115A7}"/>
               </a:ext>
             </a:extLst>
           </p:cNvPr>
           <p:cNvSpPr>
-            <a:spLocks xmlns:a="http://schemas.openxmlformats.org/drawingml/2006/main" noGrp="1"/>
+            <a:spLocks noGrp="1"/>
           </p:cNvSpPr>
           <p:nvPr>
             <p:ph type="body" idx="1"/>
           </p:nvPr>
         </p:nvSpPr>
         <p:spPr>
-          <a:xfrm xmlns:a="http://schemas.openxmlformats.org/drawingml/2006/main">
+          <a:xfrm>
             <a:off x="839787" y="1681163"/>
             <a:ext cx="5157789" cy="823913"/>
           </a:xfrm>
-          <a:prstGeom xmlns:a="http://schemas.openxmlformats.org/drawingml/2006/main" prst="rect">
+          <a:prstGeom prst="rect">
             <a:avLst/>
           </a:prstGeom>
         </p:spPr>
         <p:txBody>
-          <a:bodyPr xmlns:a="http://schemas.openxmlformats.org/drawingml/2006/main" anchor="b"/>
-          <a:lstStyle xmlns:a="http://schemas.openxmlformats.org/drawingml/2006/main">
+          <a:bodyPr anchor="b"/>
+          <a:lstStyle>
             <a:lvl1pPr marL="0" indent="0">
               <a:buSzTx/>
               <a:buFontTx/>
@@ -1821,12 +1744,12 @@
               <a:defRPr sz="2400" b="1"/>
             </a:lvl5pPr>
           </a:lstStyle>
-          <a:p xmlns:a="http://schemas.openxmlformats.org/drawingml/2006/main">
+          <a:p>
             <a:r>
               <a:t>Nivel de texto 1</a:t>
             </a:r>
           </a:p>
-          <a:p xmlns:a="http://schemas.openxmlformats.org/drawingml/2006/main">
+          <a:p>
             <a:pPr lvl="1">
               <a:buNone/>
             </a:pPr>
@@ -1834,7 +1757,7 @@
               <a:t>Nivel de texto 2</a:t>
             </a:r>
           </a:p>
-          <a:p xmlns:a="http://schemas.openxmlformats.org/drawingml/2006/main">
+          <a:p>
             <a:pPr lvl="2">
               <a:buNone/>
             </a:pPr>
@@ -1842,7 +1765,7 @@
               <a:t>Nivel de texto 3</a:t>
             </a:r>
           </a:p>
-          <a:p xmlns:a="http://schemas.openxmlformats.org/drawingml/2006/main">
+          <a:p>
             <a:pPr lvl="3">
               <a:buNone/>
             </a:pPr>
@@ -1850,7 +1773,7 @@
               <a:t>Nivel de texto 4</a:t>
             </a:r>
           </a:p>
-          <a:p xmlns:a="http://schemas.openxmlformats.org/drawingml/2006/main">
+          <a:p>
             <a:pPr lvl="4">
               <a:buNone/>
             </a:pPr>
@@ -1863,32 +1786,32 @@
       <p:sp>
         <p:nvSpPr>
           <p:cNvPr id="49" name="Marcador de texto 4">
-            <a:extLst xmlns:a="http://schemas.openxmlformats.org/drawingml/2006/main">
+            <a:extLst>
               <a:ext uri="{FF2B5EF4-FFF2-40B4-BE49-F238E27FC236}">
                 <a16:creationId xmlns:a16="http://schemas.microsoft.com/office/drawing/2014/main" id="{37F2DF4D-5B7F-4420-ADB4-723C703E1BD6}"/>
               </a:ext>
             </a:extLst>
           </p:cNvPr>
           <p:cNvSpPr>
-            <a:spLocks xmlns:a="http://schemas.openxmlformats.org/drawingml/2006/main" noGrp="1"/>
+            <a:spLocks noGrp="1"/>
           </p:cNvSpPr>
           <p:nvPr>
             <p:ph type="body" idx="21"/>
           </p:nvPr>
         </p:nvSpPr>
         <p:spPr>
-          <a:xfrm xmlns:a="http://schemas.openxmlformats.org/drawingml/2006/main">
+          <a:xfrm>
             <a:off x="6172200" y="1681163"/>
             <a:ext cx="5183188" cy="823913"/>
           </a:xfrm>
-          <a:prstGeom xmlns:a="http://schemas.openxmlformats.org/drawingml/2006/main" prst="rect">
+          <a:prstGeom prst="rect">
             <a:avLst/>
           </a:prstGeom>
         </p:spPr>
         <p:txBody>
-          <a:bodyPr xmlns:a="http://schemas.openxmlformats.org/drawingml/2006/main" anchor="b"/>
-          <a:lstStyle xmlns:a="http://schemas.openxmlformats.org/drawingml/2006/main"/>
-          <a:p xmlns:a="http://schemas.openxmlformats.org/drawingml/2006/main">
+          <a:bodyPr anchor="b"/>
+          <a:lstStyle/>
+          <a:p>
             <a:pPr marL="0" indent="0">
               <a:buSzTx/>
               <a:buFontTx/>
@@ -1902,30 +1825,30 @@
       <p:sp>
         <p:nvSpPr>
           <p:cNvPr id="50" name="Número de diapositiva">
-            <a:extLst xmlns:a="http://schemas.openxmlformats.org/drawingml/2006/main">
+            <a:extLst>
               <a:ext uri="{FF2B5EF4-FFF2-40B4-BE49-F238E27FC236}">
                 <a16:creationId xmlns:a16="http://schemas.microsoft.com/office/drawing/2014/main" id="{D640D0FF-9543-4AA1-9647-02D0E03BE31C}"/>
               </a:ext>
             </a:extLst>
           </p:cNvPr>
           <p:cNvSpPr>
-            <a:spLocks xmlns:a="http://schemas.openxmlformats.org/drawingml/2006/main" noGrp="1"/>
+            <a:spLocks noGrp="1"/>
           </p:cNvSpPr>
           <p:nvPr>
             <p:ph type="sldNum" idx="2"/>
           </p:nvPr>
         </p:nvSpPr>
         <p:spPr>
-          <a:prstGeom xmlns:a="http://schemas.openxmlformats.org/drawingml/2006/main" prst="rect">
+          <a:prstGeom prst="rect">
             <a:avLst/>
           </a:prstGeom>
         </p:spPr>
         <p:txBody>
-          <a:bodyPr xmlns:a="http://schemas.openxmlformats.org/drawingml/2006/main"/>
-          <a:lstStyle xmlns:a="http://schemas.openxmlformats.org/drawingml/2006/main"/>
-          <a:p xmlns:a="http://schemas.openxmlformats.org/drawingml/2006/main">
+          <a:bodyPr/>
+          <a:lstStyle/>
+          <a:p>
             <a:fld id="{86CB4B4D-7CA3-9044-876B-883B54F8677D}" type="slidenum">
-              <a:t>‹Nº›</a:t>
+              <a:t>‹#›</a:t>
             </a:fld>
             <a:endParaRPr/>
           </a:p>
@@ -1933,11 +1856,14 @@
       </p:sp>
     </p:spTree>
   </p:cSld>
+  <p:clrMapOvr>
+    <a:masterClrMapping/>
+  </p:clrMapOvr>
 </p:sldLayout>
 </file>
 
 <file path=ppt/slideLayouts/slideLayout6.xml><?xml version="1.0" encoding="utf-8"?>
-<p:sldLayout xmlns:p="http://schemas.openxmlformats.org/presentationml/2006/main">
+<p:sldLayout xmlns:a="http://schemas.openxmlformats.org/drawingml/2006/main" xmlns:r="http://schemas.openxmlformats.org/officeDocument/2006/relationships" xmlns:p="http://schemas.openxmlformats.org/presentationml/2006/main">
   <p:cSld name="Solo el título">
     <p:spTree>
       <p:nvGrpSpPr>
@@ -1946,33 +1872,38 @@
         <p:nvPr/>
       </p:nvGrpSpPr>
       <p:grpSpPr>
-        <a:xfrm xmlns:a="http://schemas.openxmlformats.org/drawingml/2006/main"/>
+        <a:xfrm>
+          <a:off x="0" y="0"/>
+          <a:ext cx="0" cy="0"/>
+          <a:chOff x="0" y="0"/>
+          <a:chExt cx="0" cy="0"/>
+        </a:xfrm>
       </p:grpSpPr>
       <p:sp>
         <p:nvSpPr>
           <p:cNvPr id="57" name="Texto del título">
-            <a:extLst xmlns:a="http://schemas.openxmlformats.org/drawingml/2006/main">
+            <a:extLst>
               <a:ext uri="{FF2B5EF4-FFF2-40B4-BE49-F238E27FC236}">
                 <a16:creationId xmlns:a16="http://schemas.microsoft.com/office/drawing/2014/main" id="{C66D1B93-2711-498C-AB3A-3A435C66C0F6}"/>
               </a:ext>
             </a:extLst>
           </p:cNvPr>
           <p:cNvSpPr>
-            <a:spLocks xmlns:a="http://schemas.openxmlformats.org/drawingml/2006/main" noGrp="1"/>
+            <a:spLocks noGrp="1"/>
           </p:cNvSpPr>
           <p:nvPr>
-            <p:ph type="title" idx="0"/>
+            <p:ph type="title"/>
           </p:nvPr>
         </p:nvSpPr>
         <p:spPr>
-          <a:prstGeom xmlns:a="http://schemas.openxmlformats.org/drawingml/2006/main" prst="rect">
+          <a:prstGeom prst="rect">
             <a:avLst/>
           </a:prstGeom>
         </p:spPr>
         <p:txBody>
-          <a:bodyPr xmlns:a="http://schemas.openxmlformats.org/drawingml/2006/main"/>
-          <a:lstStyle xmlns:a="http://schemas.openxmlformats.org/drawingml/2006/main"/>
-          <a:p xmlns:a="http://schemas.openxmlformats.org/drawingml/2006/main">
+          <a:bodyPr/>
+          <a:lstStyle/>
+          <a:p>
             <a:r>
               <a:t>Texto del título</a:t>
             </a:r>
@@ -1982,30 +1913,30 @@
       <p:sp>
         <p:nvSpPr>
           <p:cNvPr id="58" name="Número de diapositiva">
-            <a:extLst xmlns:a="http://schemas.openxmlformats.org/drawingml/2006/main">
+            <a:extLst>
               <a:ext uri="{FF2B5EF4-FFF2-40B4-BE49-F238E27FC236}">
                 <a16:creationId xmlns:a16="http://schemas.microsoft.com/office/drawing/2014/main" id="{F0F16161-C580-499B-AE25-E24490A3BAE3}"/>
               </a:ext>
             </a:extLst>
           </p:cNvPr>
           <p:cNvSpPr>
-            <a:spLocks xmlns:a="http://schemas.openxmlformats.org/drawingml/2006/main" noGrp="1"/>
+            <a:spLocks noGrp="1"/>
           </p:cNvSpPr>
           <p:nvPr>
             <p:ph type="sldNum" idx="2"/>
           </p:nvPr>
         </p:nvSpPr>
         <p:spPr>
-          <a:prstGeom xmlns:a="http://schemas.openxmlformats.org/drawingml/2006/main" prst="rect">
+          <a:prstGeom prst="rect">
             <a:avLst/>
           </a:prstGeom>
         </p:spPr>
         <p:txBody>
-          <a:bodyPr xmlns:a="http://schemas.openxmlformats.org/drawingml/2006/main"/>
-          <a:lstStyle xmlns:a="http://schemas.openxmlformats.org/drawingml/2006/main"/>
-          <a:p xmlns:a="http://schemas.openxmlformats.org/drawingml/2006/main">
+          <a:bodyPr/>
+          <a:lstStyle/>
+          <a:p>
             <a:fld id="{86CB4B4D-7CA3-9044-876B-883B54F8677D}" type="slidenum">
-              <a:t>‹Nº›</a:t>
+              <a:t>‹#›</a:t>
             </a:fld>
             <a:endParaRPr/>
           </a:p>
@@ -2013,11 +1944,14 @@
       </p:sp>
     </p:spTree>
   </p:cSld>
+  <p:clrMapOvr>
+    <a:masterClrMapping/>
+  </p:clrMapOvr>
 </p:sldLayout>
 </file>
 
 <file path=ppt/slideLayouts/slideLayout7.xml><?xml version="1.0" encoding="utf-8"?>
-<p:sldLayout xmlns:p="http://schemas.openxmlformats.org/presentationml/2006/main">
+<p:sldLayout xmlns:a="http://schemas.openxmlformats.org/drawingml/2006/main" xmlns:r="http://schemas.openxmlformats.org/officeDocument/2006/relationships" xmlns:p="http://schemas.openxmlformats.org/presentationml/2006/main">
   <p:cSld name="En blanco">
     <p:spTree>
       <p:nvGrpSpPr>
@@ -2026,35 +1960,40 @@
         <p:nvPr/>
       </p:nvGrpSpPr>
       <p:grpSpPr>
-        <a:xfrm xmlns:a="http://schemas.openxmlformats.org/drawingml/2006/main"/>
+        <a:xfrm>
+          <a:off x="0" y="0"/>
+          <a:ext cx="0" cy="0"/>
+          <a:chOff x="0" y="0"/>
+          <a:chExt cx="0" cy="0"/>
+        </a:xfrm>
       </p:grpSpPr>
       <p:sp>
         <p:nvSpPr>
           <p:cNvPr id="65" name="Número de diapositiva">
-            <a:extLst xmlns:a="http://schemas.openxmlformats.org/drawingml/2006/main">
+            <a:extLst>
               <a:ext uri="{FF2B5EF4-FFF2-40B4-BE49-F238E27FC236}">
                 <a16:creationId xmlns:a16="http://schemas.microsoft.com/office/drawing/2014/main" id="{7FEC6DD1-D106-4D10-9F66-534815EF67A7}"/>
               </a:ext>
             </a:extLst>
           </p:cNvPr>
           <p:cNvSpPr>
-            <a:spLocks xmlns:a="http://schemas.openxmlformats.org/drawingml/2006/main" noGrp="1"/>
+            <a:spLocks noGrp="1"/>
           </p:cNvSpPr>
           <p:nvPr>
             <p:ph type="sldNum" idx="2"/>
           </p:nvPr>
         </p:nvSpPr>
         <p:spPr>
-          <a:prstGeom xmlns:a="http://schemas.openxmlformats.org/drawingml/2006/main" prst="rect">
+          <a:prstGeom prst="rect">
             <a:avLst/>
           </a:prstGeom>
         </p:spPr>
         <p:txBody>
-          <a:bodyPr xmlns:a="http://schemas.openxmlformats.org/drawingml/2006/main"/>
-          <a:lstStyle xmlns:a="http://schemas.openxmlformats.org/drawingml/2006/main"/>
-          <a:p xmlns:a="http://schemas.openxmlformats.org/drawingml/2006/main">
+          <a:bodyPr/>
+          <a:lstStyle/>
+          <a:p>
             <a:fld id="{86CB4B4D-7CA3-9044-876B-883B54F8677D}" type="slidenum">
-              <a:t>‹Nº›</a:t>
+              <a:t>‹#›</a:t>
             </a:fld>
             <a:endParaRPr/>
           </a:p>
@@ -2062,11 +2001,14 @@
       </p:sp>
     </p:spTree>
   </p:cSld>
+  <p:clrMapOvr>
+    <a:masterClrMapping/>
+  </p:clrMapOvr>
 </p:sldLayout>
 </file>
 
 <file path=ppt/slideLayouts/slideLayout8.xml><?xml version="1.0" encoding="utf-8"?>
-<p:sldLayout xmlns:p="http://schemas.openxmlformats.org/presentationml/2006/main">
+<p:sldLayout xmlns:a="http://schemas.openxmlformats.org/drawingml/2006/main" xmlns:r="http://schemas.openxmlformats.org/officeDocument/2006/relationships" xmlns:p="http://schemas.openxmlformats.org/presentationml/2006/main">
   <p:cSld name="Contenido con título">
     <p:spTree>
       <p:nvGrpSpPr>
@@ -2075,42 +2017,47 @@
         <p:nvPr/>
       </p:nvGrpSpPr>
       <p:grpSpPr>
-        <a:xfrm xmlns:a="http://schemas.openxmlformats.org/drawingml/2006/main"/>
+        <a:xfrm>
+          <a:off x="0" y="0"/>
+          <a:ext cx="0" cy="0"/>
+          <a:chOff x="0" y="0"/>
+          <a:chExt cx="0" cy="0"/>
+        </a:xfrm>
       </p:grpSpPr>
       <p:sp>
         <p:nvSpPr>
           <p:cNvPr id="72" name="Texto del título">
-            <a:extLst xmlns:a="http://schemas.openxmlformats.org/drawingml/2006/main">
+            <a:extLst>
               <a:ext uri="{FF2B5EF4-FFF2-40B4-BE49-F238E27FC236}">
                 <a16:creationId xmlns:a16="http://schemas.microsoft.com/office/drawing/2014/main" id="{49F33449-7831-4364-9B7C-BDE72A2ECFF9}"/>
               </a:ext>
             </a:extLst>
           </p:cNvPr>
           <p:cNvSpPr>
-            <a:spLocks xmlns:a="http://schemas.openxmlformats.org/drawingml/2006/main" noGrp="1"/>
+            <a:spLocks noGrp="1"/>
           </p:cNvSpPr>
           <p:nvPr>
-            <p:ph type="title" idx="0"/>
+            <p:ph type="title"/>
           </p:nvPr>
         </p:nvSpPr>
         <p:spPr>
-          <a:xfrm xmlns:a="http://schemas.openxmlformats.org/drawingml/2006/main">
+          <a:xfrm>
             <a:off x="839787" y="457200"/>
             <a:ext cx="3932239" cy="1600200"/>
           </a:xfrm>
-          <a:prstGeom xmlns:a="http://schemas.openxmlformats.org/drawingml/2006/main" prst="rect">
+          <a:prstGeom prst="rect">
             <a:avLst/>
           </a:prstGeom>
         </p:spPr>
         <p:txBody>
-          <a:bodyPr xmlns:a="http://schemas.openxmlformats.org/drawingml/2006/main" anchor="b"/>
-          <a:lstStyle xmlns:a="http://schemas.openxmlformats.org/drawingml/2006/main">
+          <a:bodyPr anchor="b"/>
+          <a:lstStyle>
             <a:lvl1pPr>
               <a:buNone/>
               <a:defRPr sz="3200"/>
             </a:lvl1pPr>
           </a:lstStyle>
-          <a:p xmlns:a="http://schemas.openxmlformats.org/drawingml/2006/main">
+          <a:p>
             <a:r>
               <a:t>Texto del título</a:t>
             </a:r>
@@ -2120,31 +2067,31 @@
       <p:sp>
         <p:nvSpPr>
           <p:cNvPr id="73" name="Nivel de texto 1…">
-            <a:extLst xmlns:a="http://schemas.openxmlformats.org/drawingml/2006/main">
+            <a:extLst>
               <a:ext uri="{FF2B5EF4-FFF2-40B4-BE49-F238E27FC236}">
                 <a16:creationId xmlns:a16="http://schemas.microsoft.com/office/drawing/2014/main" id="{E3FF2E67-3A5B-42AA-BABC-D6DA4D37E77B}"/>
               </a:ext>
             </a:extLst>
           </p:cNvPr>
           <p:cNvSpPr>
-            <a:spLocks xmlns:a="http://schemas.openxmlformats.org/drawingml/2006/main" noGrp="1"/>
+            <a:spLocks noGrp="1"/>
           </p:cNvSpPr>
           <p:nvPr>
             <p:ph type="body" idx="1"/>
           </p:nvPr>
         </p:nvSpPr>
         <p:spPr>
-          <a:xfrm xmlns:a="http://schemas.openxmlformats.org/drawingml/2006/main">
+          <a:xfrm>
             <a:off x="5183187" y="987425"/>
             <a:ext cx="6172201" cy="4873625"/>
           </a:xfrm>
-          <a:prstGeom xmlns:a="http://schemas.openxmlformats.org/drawingml/2006/main" prst="rect">
+          <a:prstGeom prst="rect">
             <a:avLst/>
           </a:prstGeom>
         </p:spPr>
         <p:txBody>
-          <a:bodyPr xmlns:a="http://schemas.openxmlformats.org/drawingml/2006/main"/>
-          <a:lstStyle xmlns:a="http://schemas.openxmlformats.org/drawingml/2006/main">
+          <a:bodyPr/>
+          <a:lstStyle>
             <a:lvl1pPr>
               <a:buNone/>
               <a:defRPr sz="3200"/>
@@ -2166,12 +2113,12 @@
               <a:defRPr sz="3200"/>
             </a:lvl5pPr>
           </a:lstStyle>
-          <a:p xmlns:a="http://schemas.openxmlformats.org/drawingml/2006/main">
+          <a:p>
             <a:r>
               <a:t>Nivel de texto 1</a:t>
             </a:r>
           </a:p>
-          <a:p xmlns:a="http://schemas.openxmlformats.org/drawingml/2006/main">
+          <a:p>
             <a:pPr lvl="1">
               <a:buNone/>
             </a:pPr>
@@ -2179,7 +2126,7 @@
               <a:t>Nivel de texto 2</a:t>
             </a:r>
           </a:p>
-          <a:p xmlns:a="http://schemas.openxmlformats.org/drawingml/2006/main">
+          <a:p>
             <a:pPr lvl="2">
               <a:buNone/>
             </a:pPr>
@@ -2187,7 +2134,7 @@
               <a:t>Nivel de texto 3</a:t>
             </a:r>
           </a:p>
-          <a:p xmlns:a="http://schemas.openxmlformats.org/drawingml/2006/main">
+          <a:p>
             <a:pPr lvl="3">
               <a:buNone/>
             </a:pPr>
@@ -2195,7 +2142,7 @@
               <a:t>Nivel de texto 4</a:t>
             </a:r>
           </a:p>
-          <a:p xmlns:a="http://schemas.openxmlformats.org/drawingml/2006/main">
+          <a:p>
             <a:pPr lvl="4">
               <a:buNone/>
             </a:pPr>
@@ -2208,32 +2155,32 @@
       <p:sp>
         <p:nvSpPr>
           <p:cNvPr id="74" name="Marcador de texto 3">
-            <a:extLst xmlns:a="http://schemas.openxmlformats.org/drawingml/2006/main">
+            <a:extLst>
               <a:ext uri="{FF2B5EF4-FFF2-40B4-BE49-F238E27FC236}">
                 <a16:creationId xmlns:a16="http://schemas.microsoft.com/office/drawing/2014/main" id="{E912D11A-488B-4D5B-9629-F21FAF1F0E36}"/>
               </a:ext>
             </a:extLst>
           </p:cNvPr>
           <p:cNvSpPr>
-            <a:spLocks xmlns:a="http://schemas.openxmlformats.org/drawingml/2006/main" noGrp="1"/>
+            <a:spLocks noGrp="1"/>
           </p:cNvSpPr>
           <p:nvPr>
             <p:ph type="body" idx="21"/>
           </p:nvPr>
         </p:nvSpPr>
         <p:spPr>
-          <a:xfrm xmlns:a="http://schemas.openxmlformats.org/drawingml/2006/main">
+          <a:xfrm>
             <a:off x="839787" y="2057400"/>
             <a:ext cx="3932239" cy="3811588"/>
           </a:xfrm>
-          <a:prstGeom xmlns:a="http://schemas.openxmlformats.org/drawingml/2006/main" prst="rect">
+          <a:prstGeom prst="rect">
             <a:avLst/>
           </a:prstGeom>
         </p:spPr>
         <p:txBody>
-          <a:bodyPr xmlns:a="http://schemas.openxmlformats.org/drawingml/2006/main"/>
-          <a:lstStyle xmlns:a="http://schemas.openxmlformats.org/drawingml/2006/main"/>
-          <a:p xmlns:a="http://schemas.openxmlformats.org/drawingml/2006/main">
+          <a:bodyPr/>
+          <a:lstStyle/>
+          <a:p>
             <a:pPr marL="0" indent="0">
               <a:buSzTx/>
               <a:buFontTx/>
@@ -2247,30 +2194,30 @@
       <p:sp>
         <p:nvSpPr>
           <p:cNvPr id="75" name="Número de diapositiva">
-            <a:extLst xmlns:a="http://schemas.openxmlformats.org/drawingml/2006/main">
+            <a:extLst>
               <a:ext uri="{FF2B5EF4-FFF2-40B4-BE49-F238E27FC236}">
                 <a16:creationId xmlns:a16="http://schemas.microsoft.com/office/drawing/2014/main" id="{A0236913-46F7-4749-9D94-7208D12B0B3A}"/>
               </a:ext>
             </a:extLst>
           </p:cNvPr>
           <p:cNvSpPr>
-            <a:spLocks xmlns:a="http://schemas.openxmlformats.org/drawingml/2006/main" noGrp="1"/>
+            <a:spLocks noGrp="1"/>
           </p:cNvSpPr>
           <p:nvPr>
             <p:ph type="sldNum" idx="2"/>
           </p:nvPr>
         </p:nvSpPr>
         <p:spPr>
-          <a:prstGeom xmlns:a="http://schemas.openxmlformats.org/drawingml/2006/main" prst="rect">
+          <a:prstGeom prst="rect">
             <a:avLst/>
           </a:prstGeom>
         </p:spPr>
         <p:txBody>
-          <a:bodyPr xmlns:a="http://schemas.openxmlformats.org/drawingml/2006/main"/>
-          <a:lstStyle xmlns:a="http://schemas.openxmlformats.org/drawingml/2006/main"/>
-          <a:p xmlns:a="http://schemas.openxmlformats.org/drawingml/2006/main">
+          <a:bodyPr/>
+          <a:lstStyle/>
+          <a:p>
             <a:fld id="{86CB4B4D-7CA3-9044-876B-883B54F8677D}" type="slidenum">
-              <a:t>‹Nº›</a:t>
+              <a:t>‹#›</a:t>
             </a:fld>
             <a:endParaRPr/>
           </a:p>
@@ -2278,11 +2225,14 @@
       </p:sp>
     </p:spTree>
   </p:cSld>
+  <p:clrMapOvr>
+    <a:masterClrMapping/>
+  </p:clrMapOvr>
 </p:sldLayout>
 </file>
 
 <file path=ppt/slideLayouts/slideLayout9.xml><?xml version="1.0" encoding="utf-8"?>
-<p:sldLayout xmlns:p="http://schemas.openxmlformats.org/presentationml/2006/main">
+<p:sldLayout xmlns:a="http://schemas.openxmlformats.org/drawingml/2006/main" xmlns:r="http://schemas.openxmlformats.org/officeDocument/2006/relationships" xmlns:p="http://schemas.openxmlformats.org/presentationml/2006/main">
   <p:cSld name="Imagen con título">
     <p:spTree>
       <p:nvGrpSpPr>
@@ -2291,42 +2241,47 @@
         <p:nvPr/>
       </p:nvGrpSpPr>
       <p:grpSpPr>
-        <a:xfrm xmlns:a="http://schemas.openxmlformats.org/drawingml/2006/main"/>
+        <a:xfrm>
+          <a:off x="0" y="0"/>
+          <a:ext cx="0" cy="0"/>
+          <a:chOff x="0" y="0"/>
+          <a:chExt cx="0" cy="0"/>
+        </a:xfrm>
       </p:grpSpPr>
       <p:sp>
         <p:nvSpPr>
           <p:cNvPr id="82" name="Texto del título">
-            <a:extLst xmlns:a="http://schemas.openxmlformats.org/drawingml/2006/main">
+            <a:extLst>
               <a:ext uri="{FF2B5EF4-FFF2-40B4-BE49-F238E27FC236}">
                 <a16:creationId xmlns:a16="http://schemas.microsoft.com/office/drawing/2014/main" id="{C79C84A0-27A0-4F85-A7EC-D21CE1B5D602}"/>
               </a:ext>
             </a:extLst>
           </p:cNvPr>
           <p:cNvSpPr>
-            <a:spLocks xmlns:a="http://schemas.openxmlformats.org/drawingml/2006/main" noGrp="1"/>
+            <a:spLocks noGrp="1"/>
           </p:cNvSpPr>
           <p:nvPr>
-            <p:ph type="title" idx="0"/>
+            <p:ph type="title"/>
           </p:nvPr>
         </p:nvSpPr>
         <p:spPr>
-          <a:xfrm xmlns:a="http://schemas.openxmlformats.org/drawingml/2006/main">
+          <a:xfrm>
             <a:off x="839787" y="457200"/>
             <a:ext cx="3932239" cy="1600200"/>
           </a:xfrm>
-          <a:prstGeom xmlns:a="http://schemas.openxmlformats.org/drawingml/2006/main" prst="rect">
+          <a:prstGeom prst="rect">
             <a:avLst/>
           </a:prstGeom>
         </p:spPr>
         <p:txBody>
-          <a:bodyPr xmlns:a="http://schemas.openxmlformats.org/drawingml/2006/main" anchor="b"/>
-          <a:lstStyle xmlns:a="http://schemas.openxmlformats.org/drawingml/2006/main">
+          <a:bodyPr anchor="b"/>
+          <a:lstStyle>
             <a:lvl1pPr>
               <a:buNone/>
               <a:defRPr sz="3200"/>
             </a:lvl1pPr>
           </a:lstStyle>
-          <a:p xmlns:a="http://schemas.openxmlformats.org/drawingml/2006/main">
+          <a:p>
             <a:r>
               <a:t>Texto del título</a:t>
             </a:r>
@@ -2336,34 +2291,34 @@
       <p:sp>
         <p:nvSpPr>
           <p:cNvPr id="83" name="Marcador de posición de imagen 2">
-            <a:extLst xmlns:a="http://schemas.openxmlformats.org/drawingml/2006/main">
+            <a:extLst>
               <a:ext uri="{FF2B5EF4-FFF2-40B4-BE49-F238E27FC236}">
                 <a16:creationId xmlns:a16="http://schemas.microsoft.com/office/drawing/2014/main" id="{705E5074-FD83-4AB8-86A6-ECA0710048A6}"/>
               </a:ext>
             </a:extLst>
           </p:cNvPr>
           <p:cNvSpPr>
-            <a:spLocks xmlns:a="http://schemas.openxmlformats.org/drawingml/2006/main" noGrp="1"/>
+            <a:spLocks noGrp="1"/>
           </p:cNvSpPr>
           <p:nvPr>
             <p:ph type="pic" idx="21"/>
           </p:nvPr>
         </p:nvSpPr>
         <p:spPr>
-          <a:xfrm xmlns:a="http://schemas.openxmlformats.org/drawingml/2006/main">
+          <a:xfrm>
             <a:off x="5183187" y="987425"/>
             <a:ext cx="6172201" cy="4873625"/>
           </a:xfrm>
-          <a:prstGeom xmlns:a="http://schemas.openxmlformats.org/drawingml/2006/main" prst="rect">
+          <a:prstGeom prst="rect">
             <a:avLst/>
           </a:prstGeom>
         </p:spPr>
         <p:txBody>
-          <a:bodyPr xmlns:a="http://schemas.openxmlformats.org/drawingml/2006/main" lIns="91439" rIns="91439">
+          <a:bodyPr lIns="91439" rIns="91439">
             <a:noAutofit/>
           </a:bodyPr>
-          <a:lstStyle xmlns:a="http://schemas.openxmlformats.org/drawingml/2006/main"/>
-          <a:p xmlns:a="http://schemas.openxmlformats.org/drawingml/2006/main">
+          <a:lstStyle/>
+          <a:p>
             <a:endParaRPr/>
           </a:p>
         </p:txBody>
@@ -2371,31 +2326,31 @@
       <p:sp>
         <p:nvSpPr>
           <p:cNvPr id="84" name="Nivel de texto 1…">
-            <a:extLst xmlns:a="http://schemas.openxmlformats.org/drawingml/2006/main">
+            <a:extLst>
               <a:ext uri="{FF2B5EF4-FFF2-40B4-BE49-F238E27FC236}">
                 <a16:creationId xmlns:a16="http://schemas.microsoft.com/office/drawing/2014/main" id="{E9DE408E-60D0-4278-9FEF-9F610FCDE30A}"/>
               </a:ext>
             </a:extLst>
           </p:cNvPr>
           <p:cNvSpPr>
-            <a:spLocks xmlns:a="http://schemas.openxmlformats.org/drawingml/2006/main" noGrp="1"/>
+            <a:spLocks noGrp="1"/>
           </p:cNvSpPr>
           <p:nvPr>
             <p:ph type="body" idx="1"/>
           </p:nvPr>
         </p:nvSpPr>
         <p:spPr>
-          <a:xfrm xmlns:a="http://schemas.openxmlformats.org/drawingml/2006/main">
+          <a:xfrm>
             <a:off x="839787" y="2057400"/>
             <a:ext cx="3932239" cy="3811588"/>
           </a:xfrm>
-          <a:prstGeom xmlns:a="http://schemas.openxmlformats.org/drawingml/2006/main" prst="rect">
+          <a:prstGeom prst="rect">
             <a:avLst/>
           </a:prstGeom>
         </p:spPr>
         <p:txBody>
-          <a:bodyPr xmlns:a="http://schemas.openxmlformats.org/drawingml/2006/main"/>
-          <a:lstStyle xmlns:a="http://schemas.openxmlformats.org/drawingml/2006/main">
+          <a:bodyPr/>
+          <a:lstStyle>
             <a:lvl1pPr marL="0" indent="0">
               <a:buSzTx/>
               <a:buFontTx/>
@@ -2427,12 +2382,12 @@
               <a:defRPr sz="1600"/>
             </a:lvl5pPr>
           </a:lstStyle>
-          <a:p xmlns:a="http://schemas.openxmlformats.org/drawingml/2006/main">
+          <a:p>
             <a:r>
               <a:t>Nivel de texto 1</a:t>
             </a:r>
           </a:p>
-          <a:p xmlns:a="http://schemas.openxmlformats.org/drawingml/2006/main">
+          <a:p>
             <a:pPr lvl="1">
               <a:buNone/>
             </a:pPr>
@@ -2440,7 +2395,7 @@
               <a:t>Nivel de texto 2</a:t>
             </a:r>
           </a:p>
-          <a:p xmlns:a="http://schemas.openxmlformats.org/drawingml/2006/main">
+          <a:p>
             <a:pPr lvl="2">
               <a:buNone/>
             </a:pPr>
@@ -2448,7 +2403,7 @@
               <a:t>Nivel de texto 3</a:t>
             </a:r>
           </a:p>
-          <a:p xmlns:a="http://schemas.openxmlformats.org/drawingml/2006/main">
+          <a:p>
             <a:pPr lvl="3">
               <a:buNone/>
             </a:pPr>
@@ -2456,7 +2411,7 @@
               <a:t>Nivel de texto 4</a:t>
             </a:r>
           </a:p>
-          <a:p xmlns:a="http://schemas.openxmlformats.org/drawingml/2006/main">
+          <a:p>
             <a:pPr lvl="4">
               <a:buNone/>
             </a:pPr>
@@ -2469,30 +2424,30 @@
       <p:sp>
         <p:nvSpPr>
           <p:cNvPr id="85" name="Número de diapositiva">
-            <a:extLst xmlns:a="http://schemas.openxmlformats.org/drawingml/2006/main">
+            <a:extLst>
               <a:ext uri="{FF2B5EF4-FFF2-40B4-BE49-F238E27FC236}">
                 <a16:creationId xmlns:a16="http://schemas.microsoft.com/office/drawing/2014/main" id="{E8D958C6-42C6-483F-A581-3288930D3E93}"/>
               </a:ext>
             </a:extLst>
           </p:cNvPr>
           <p:cNvSpPr>
-            <a:spLocks xmlns:a="http://schemas.openxmlformats.org/drawingml/2006/main" noGrp="1"/>
+            <a:spLocks noGrp="1"/>
           </p:cNvSpPr>
           <p:nvPr>
             <p:ph type="sldNum" idx="2"/>
           </p:nvPr>
         </p:nvSpPr>
         <p:spPr>
-          <a:prstGeom xmlns:a="http://schemas.openxmlformats.org/drawingml/2006/main" prst="rect">
+          <a:prstGeom prst="rect">
             <a:avLst/>
           </a:prstGeom>
         </p:spPr>
         <p:txBody>
-          <a:bodyPr xmlns:a="http://schemas.openxmlformats.org/drawingml/2006/main"/>
-          <a:lstStyle xmlns:a="http://schemas.openxmlformats.org/drawingml/2006/main"/>
-          <a:p xmlns:a="http://schemas.openxmlformats.org/drawingml/2006/main">
+          <a:bodyPr/>
+          <a:lstStyle/>
+          <a:p>
             <a:fld id="{86CB4B4D-7CA3-9044-876B-883B54F8677D}" type="slidenum">
-              <a:t>‹Nº›</a:t>
+              <a:t>‹#›</a:t>
             </a:fld>
             <a:endParaRPr/>
           </a:p>
@@ -2500,17 +2455,21 @@
       </p:sp>
     </p:spTree>
   </p:cSld>
+  <p:clrMapOvr>
+    <a:masterClrMapping/>
+  </p:clrMapOvr>
 </p:sldLayout>
 </file>
 
 <file path=ppt/slideMasters/slideMaster1.xml><?xml version="1.0" encoding="utf-8"?>
-<p:sldMaster xmlns:p="http://schemas.openxmlformats.org/presentationml/2006/main">
+<p:sldMaster xmlns:a="http://schemas.openxmlformats.org/drawingml/2006/main" xmlns:r="http://schemas.openxmlformats.org/officeDocument/2006/relationships" xmlns:p="http://schemas.openxmlformats.org/presentationml/2006/main">
   <p:cSld>
     <p:bg>
       <p:bgPr>
-        <a:solidFill xmlns:a="http://schemas.openxmlformats.org/drawingml/2006/main">
+        <a:solidFill>
           <a:srgbClr val="FFFFFF"/>
         </a:solidFill>
+        <a:effectLst/>
       </p:bgPr>
     </p:bg>
     <p:spTree>
@@ -2520,42 +2479,47 @@
         <p:nvPr/>
       </p:nvGrpSpPr>
       <p:grpSpPr>
-        <a:xfrm xmlns:a="http://schemas.openxmlformats.org/drawingml/2006/main"/>
+        <a:xfrm>
+          <a:off x="0" y="0"/>
+          <a:ext cx="0" cy="0"/>
+          <a:chOff x="0" y="0"/>
+          <a:chExt cx="0" cy="0"/>
+        </a:xfrm>
       </p:grpSpPr>
       <p:sp>
         <p:nvSpPr>
           <p:cNvPr id="2" name="Texto del título">
-            <a:extLst xmlns:a="http://schemas.openxmlformats.org/drawingml/2006/main">
+            <a:extLst>
               <a:ext uri="{FF2B5EF4-FFF2-40B4-BE49-F238E27FC236}">
                 <a16:creationId xmlns:a16="http://schemas.microsoft.com/office/drawing/2014/main" id="{AE7B5B30-4C1B-4DDC-AF5C-D50824AAC602}"/>
               </a:ext>
             </a:extLst>
           </p:cNvPr>
           <p:cNvSpPr>
-            <a:spLocks xmlns:a="http://schemas.openxmlformats.org/drawingml/2006/main" noGrp="1"/>
+            <a:spLocks noGrp="1"/>
           </p:cNvSpPr>
           <p:nvPr>
-            <p:ph type="title" idx="0"/>
+            <p:ph type="title"/>
           </p:nvPr>
         </p:nvSpPr>
         <p:spPr>
-          <a:xfrm xmlns:a="http://schemas.openxmlformats.org/drawingml/2006/main">
+          <a:xfrm>
             <a:off x="838200" y="365125"/>
             <a:ext cx="10515600" cy="1325563"/>
           </a:xfrm>
-          <a:prstGeom xmlns:a="http://schemas.openxmlformats.org/drawingml/2006/main" prst="rect">
+          <a:prstGeom prst="rect">
             <a:avLst/>
           </a:prstGeom>
-          <a:ln xmlns:a="http://schemas.openxmlformats.org/drawingml/2006/main" w="12700">
+          <a:ln w="12700">
             <a:miter/>
           </a:ln>
         </p:spPr>
         <p:txBody>
-          <a:bodyPr xmlns:a="http://schemas.openxmlformats.org/drawingml/2006/main" lIns="45719" rIns="45719" anchor="ctr">
+          <a:bodyPr lIns="45719" rIns="45719" anchor="ctr">
             <a:normAutofit/>
           </a:bodyPr>
-          <a:lstStyle xmlns:a="http://schemas.openxmlformats.org/drawingml/2006/main"/>
-          <a:p xmlns:a="http://schemas.openxmlformats.org/drawingml/2006/main">
+          <a:lstStyle/>
+          <a:p>
             <a:r>
               <a:t>Texto del título</a:t>
             </a:r>
@@ -2565,42 +2529,42 @@
       <p:sp>
         <p:nvSpPr>
           <p:cNvPr id="3" name="Nivel de texto 1…">
-            <a:extLst xmlns:a="http://schemas.openxmlformats.org/drawingml/2006/main">
+            <a:extLst>
               <a:ext uri="{FF2B5EF4-FFF2-40B4-BE49-F238E27FC236}">
                 <a16:creationId xmlns:a16="http://schemas.microsoft.com/office/drawing/2014/main" id="{76F168F2-B51E-4A02-A371-06C38CFF7F8D}"/>
               </a:ext>
             </a:extLst>
           </p:cNvPr>
           <p:cNvSpPr>
-            <a:spLocks xmlns:a="http://schemas.openxmlformats.org/drawingml/2006/main" noGrp="1"/>
+            <a:spLocks noGrp="1"/>
           </p:cNvSpPr>
           <p:nvPr>
             <p:ph type="body" idx="1"/>
           </p:nvPr>
         </p:nvSpPr>
         <p:spPr>
-          <a:xfrm xmlns:a="http://schemas.openxmlformats.org/drawingml/2006/main">
+          <a:xfrm>
             <a:off x="838200" y="1825625"/>
             <a:ext cx="10515600" cy="4351338"/>
           </a:xfrm>
-          <a:prstGeom xmlns:a="http://schemas.openxmlformats.org/drawingml/2006/main" prst="rect">
+          <a:prstGeom prst="rect">
             <a:avLst/>
           </a:prstGeom>
-          <a:ln xmlns:a="http://schemas.openxmlformats.org/drawingml/2006/main" w="12700">
+          <a:ln w="12700">
             <a:miter/>
           </a:ln>
         </p:spPr>
         <p:txBody>
-          <a:bodyPr xmlns:a="http://schemas.openxmlformats.org/drawingml/2006/main" lIns="45719" rIns="45719">
+          <a:bodyPr lIns="45719" rIns="45719">
             <a:normAutofit/>
           </a:bodyPr>
-          <a:lstStyle xmlns:a="http://schemas.openxmlformats.org/drawingml/2006/main"/>
-          <a:p xmlns:a="http://schemas.openxmlformats.org/drawingml/2006/main">
+          <a:lstStyle/>
+          <a:p>
             <a:r>
               <a:t>Nivel de texto 1</a:t>
             </a:r>
           </a:p>
-          <a:p xmlns:a="http://schemas.openxmlformats.org/drawingml/2006/main">
+          <a:p>
             <a:pPr lvl="1">
               <a:buNone/>
             </a:pPr>
@@ -2608,7 +2572,7 @@
               <a:t>Nivel de texto 2</a:t>
             </a:r>
           </a:p>
-          <a:p xmlns:a="http://schemas.openxmlformats.org/drawingml/2006/main">
+          <a:p>
             <a:pPr lvl="2">
               <a:buNone/>
             </a:pPr>
@@ -2616,7 +2580,7 @@
               <a:t>Nivel de texto 3</a:t>
             </a:r>
           </a:p>
-          <a:p xmlns:a="http://schemas.openxmlformats.org/drawingml/2006/main">
+          <a:p>
             <a:pPr lvl="3">
               <a:buNone/>
             </a:pPr>
@@ -2624,7 +2588,7 @@
               <a:t>Nivel de texto 4</a:t>
             </a:r>
           </a:p>
-          <a:p xmlns:a="http://schemas.openxmlformats.org/drawingml/2006/main">
+          <a:p>
             <a:pPr lvl="4">
               <a:buNone/>
             </a:pPr>
@@ -2637,36 +2601,36 @@
       <p:sp>
         <p:nvSpPr>
           <p:cNvPr id="4" name="Número de diapositiva">
-            <a:extLst xmlns:a="http://schemas.openxmlformats.org/drawingml/2006/main">
+            <a:extLst>
               <a:ext uri="{FF2B5EF4-FFF2-40B4-BE49-F238E27FC236}">
                 <a16:creationId xmlns:a16="http://schemas.microsoft.com/office/drawing/2014/main" id="{2AAD94B8-DEBC-4DF5-BAB0-EA2EE324EEA2}"/>
               </a:ext>
             </a:extLst>
           </p:cNvPr>
           <p:cNvSpPr>
-            <a:spLocks xmlns:a="http://schemas.openxmlformats.org/drawingml/2006/main" noGrp="1"/>
+            <a:spLocks noGrp="1"/>
           </p:cNvSpPr>
           <p:nvPr>
             <p:ph type="sldNum" idx="2"/>
           </p:nvPr>
         </p:nvSpPr>
         <p:spPr>
-          <a:xfrm xmlns:a="http://schemas.openxmlformats.org/drawingml/2006/main">
+          <a:xfrm>
             <a:off x="11095176" y="6414760"/>
             <a:ext cx="258624" cy="248305"/>
           </a:xfrm>
-          <a:prstGeom xmlns:a="http://schemas.openxmlformats.org/drawingml/2006/main" prst="rect">
+          <a:prstGeom prst="rect">
             <a:avLst/>
           </a:prstGeom>
-          <a:ln xmlns:a="http://schemas.openxmlformats.org/drawingml/2006/main" w="12700">
+          <a:ln w="12700">
             <a:miter/>
           </a:ln>
         </p:spPr>
         <p:txBody>
-          <a:bodyPr xmlns:a="http://schemas.openxmlformats.org/drawingml/2006/main" wrap="none" lIns="45719" rIns="45719" anchor="ctr">
+          <a:bodyPr wrap="none" lIns="45719" rIns="45719" anchor="ctr">
             <a:spAutoFit/>
           </a:bodyPr>
-          <a:lstStyle xmlns:a="http://schemas.openxmlformats.org/drawingml/2006/main">
+          <a:lstStyle>
             <a:lvl1pPr algn="r">
               <a:buNone/>
               <a:defRPr sz="1200">
@@ -2676,9 +2640,9 @@
               </a:defRPr>
             </a:lvl1pPr>
           </a:lstStyle>
-          <a:p xmlns:a="http://schemas.openxmlformats.org/drawingml/2006/main">
+          <a:p>
             <a:fld id="{86CB4B4D-7CA3-9044-876B-883B54F8677D}" type="slidenum">
-              <a:t>‹Nº›</a:t>
+              <a:t>‹#›</a:t>
             </a:fld>
             <a:endParaRPr/>
           </a:p>
@@ -2688,19 +2652,19 @@
   </p:cSld>
   <p:clrMap bg1="lt1" tx1="dk1" bg2="lt2" tx2="dk2" accent1="accent1" accent2="accent2" accent3="accent3" accent4="accent4" accent5="accent5" accent6="accent6" hlink="hlink" folHlink="folHlink"/>
   <p:sldLayoutIdLst>
-    <p:sldLayoutId xmlns:r="http://schemas.openxmlformats.org/officeDocument/2006/relationships" id="2147483649" r:id="R6dcf8fb8f88641b8"/>
-    <p:sldLayoutId xmlns:r="http://schemas.openxmlformats.org/officeDocument/2006/relationships" id="2147483650" r:id="R1fd04a3b926242b6"/>
-    <p:sldLayoutId xmlns:r="http://schemas.openxmlformats.org/officeDocument/2006/relationships" id="2147483651" r:id="R7cc4feed9b394d90"/>
-    <p:sldLayoutId xmlns:r="http://schemas.openxmlformats.org/officeDocument/2006/relationships" id="2147483652" r:id="R2113c9490af04a24"/>
-    <p:sldLayoutId xmlns:r="http://schemas.openxmlformats.org/officeDocument/2006/relationships" id="2147483653" r:id="Re9e35e65ee9a4399"/>
-    <p:sldLayoutId xmlns:r="http://schemas.openxmlformats.org/officeDocument/2006/relationships" id="2147483654" r:id="R8a5f5642601a4030"/>
-    <p:sldLayoutId xmlns:r="http://schemas.openxmlformats.org/officeDocument/2006/relationships" id="2147483655" r:id="Ra2496ab0e51e4ee4"/>
-    <p:sldLayoutId xmlns:r="http://schemas.openxmlformats.org/officeDocument/2006/relationships" id="2147483656" r:id="R286de53f89a0460b"/>
-    <p:sldLayoutId xmlns:r="http://schemas.openxmlformats.org/officeDocument/2006/relationships" id="2147483657" r:id="R763951c2a9ca4b42"/>
+    <p:sldLayoutId id="2147483649" r:id="rId1"/>
+    <p:sldLayoutId id="2147483650" r:id="rId2"/>
+    <p:sldLayoutId id="2147483651" r:id="rId3"/>
+    <p:sldLayoutId id="2147483652" r:id="rId4"/>
+    <p:sldLayoutId id="2147483653" r:id="rId5"/>
+    <p:sldLayoutId id="2147483654" r:id="rId6"/>
+    <p:sldLayoutId id="2147483655" r:id="rId7"/>
+    <p:sldLayoutId id="2147483656" r:id="rId8"/>
+    <p:sldLayoutId id="2147483657" r:id="rId9"/>
   </p:sldLayoutIdLst>
   <p:txStyles>
     <p:titleStyle>
-      <a:lvl1pPr xmlns:a="http://schemas.openxmlformats.org/drawingml/2006/main" marL="0" marR="0" indent="0" algn="l" defTabSz="914400">
+      <a:lvl1pPr marL="0" marR="0" indent="0" algn="l" defTabSz="914400">
         <a:lnSpc>
           <a:spcPct val="90000"/>
         </a:lnSpc>
@@ -2723,7 +2687,7 @@
           <a:cs typeface="Calibri Light"/>
         </a:defRPr>
       </a:lvl1pPr>
-      <a:lvl2pPr xmlns:a="http://schemas.openxmlformats.org/drawingml/2006/main" marL="0" marR="0" indent="0" algn="l" defTabSz="914400">
+      <a:lvl2pPr marL="0" marR="0" indent="0" algn="l" defTabSz="914400">
         <a:lnSpc>
           <a:spcPct val="90000"/>
         </a:lnSpc>
@@ -2746,7 +2710,7 @@
           <a:cs typeface="Calibri Light"/>
         </a:defRPr>
       </a:lvl2pPr>
-      <a:lvl3pPr xmlns:a="http://schemas.openxmlformats.org/drawingml/2006/main" marL="0" marR="0" indent="0" algn="l" defTabSz="914400">
+      <a:lvl3pPr marL="0" marR="0" indent="0" algn="l" defTabSz="914400">
         <a:lnSpc>
           <a:spcPct val="90000"/>
         </a:lnSpc>
@@ -2769,7 +2733,7 @@
           <a:cs typeface="Calibri Light"/>
         </a:defRPr>
       </a:lvl3pPr>
-      <a:lvl4pPr xmlns:a="http://schemas.openxmlformats.org/drawingml/2006/main" marL="0" marR="0" indent="0" algn="l" defTabSz="914400">
+      <a:lvl4pPr marL="0" marR="0" indent="0" algn="l" defTabSz="914400">
         <a:lnSpc>
           <a:spcPct val="90000"/>
         </a:lnSpc>
@@ -2792,7 +2756,7 @@
           <a:cs typeface="Calibri Light"/>
         </a:defRPr>
       </a:lvl4pPr>
-      <a:lvl5pPr xmlns:a="http://schemas.openxmlformats.org/drawingml/2006/main" marL="0" marR="0" indent="0" algn="l" defTabSz="914400">
+      <a:lvl5pPr marL="0" marR="0" indent="0" algn="l" defTabSz="914400">
         <a:lnSpc>
           <a:spcPct val="90000"/>
         </a:lnSpc>
@@ -2815,7 +2779,7 @@
           <a:cs typeface="Calibri Light"/>
         </a:defRPr>
       </a:lvl5pPr>
-      <a:lvl6pPr xmlns:a="http://schemas.openxmlformats.org/drawingml/2006/main" marL="0" marR="0" indent="0" algn="l" defTabSz="914400">
+      <a:lvl6pPr marL="0" marR="0" indent="0" algn="l" defTabSz="914400">
         <a:lnSpc>
           <a:spcPct val="90000"/>
         </a:lnSpc>
@@ -2838,7 +2802,7 @@
           <a:cs typeface="Calibri Light"/>
         </a:defRPr>
       </a:lvl6pPr>
-      <a:lvl7pPr xmlns:a="http://schemas.openxmlformats.org/drawingml/2006/main" marL="0" marR="0" indent="0" algn="l" defTabSz="914400">
+      <a:lvl7pPr marL="0" marR="0" indent="0" algn="l" defTabSz="914400">
         <a:lnSpc>
           <a:spcPct val="90000"/>
         </a:lnSpc>
@@ -2861,7 +2825,7 @@
           <a:cs typeface="Calibri Light"/>
         </a:defRPr>
       </a:lvl7pPr>
-      <a:lvl8pPr xmlns:a="http://schemas.openxmlformats.org/drawingml/2006/main" marL="0" marR="0" indent="0" algn="l" defTabSz="914400">
+      <a:lvl8pPr marL="0" marR="0" indent="0" algn="l" defTabSz="914400">
         <a:lnSpc>
           <a:spcPct val="90000"/>
         </a:lnSpc>
@@ -2884,7 +2848,7 @@
           <a:cs typeface="Calibri Light"/>
         </a:defRPr>
       </a:lvl8pPr>
-      <a:lvl9pPr xmlns:a="http://schemas.openxmlformats.org/drawingml/2006/main" marL="0" marR="0" indent="0" algn="l" defTabSz="914400">
+      <a:lvl9pPr marL="0" marR="0" indent="0" algn="l" defTabSz="914400">
         <a:lnSpc>
           <a:spcPct val="90000"/>
         </a:lnSpc>
@@ -2909,7 +2873,7 @@
       </a:lvl9pPr>
     </p:titleStyle>
     <p:bodyStyle>
-      <a:lvl1pPr xmlns:a="http://schemas.openxmlformats.org/drawingml/2006/main" marL="228600" marR="0" indent="-228600" algn="l" defTabSz="914400">
+      <a:lvl1pPr marL="228600" marR="0" indent="-228600" algn="l" defTabSz="914400">
         <a:lnSpc>
           <a:spcPct val="90000"/>
         </a:lnSpc>
@@ -2932,7 +2896,7 @@
           <a:cs typeface="+mn-lt"/>
         </a:defRPr>
       </a:lvl1pPr>
-      <a:lvl2pPr xmlns:a="http://schemas.openxmlformats.org/drawingml/2006/main" marL="723900" marR="0" indent="-266700" algn="l" defTabSz="914400">
+      <a:lvl2pPr marL="723900" marR="0" indent="-266700" algn="l" defTabSz="914400">
         <a:lnSpc>
           <a:spcPct val="90000"/>
         </a:lnSpc>
@@ -2955,7 +2919,7 @@
           <a:cs typeface="+mn-lt"/>
         </a:defRPr>
       </a:lvl2pPr>
-      <a:lvl3pPr xmlns:a="http://schemas.openxmlformats.org/drawingml/2006/main" marL="1234439" marR="0" indent="-320039" algn="l" defTabSz="914400">
+      <a:lvl3pPr marL="1234439" marR="0" indent="-320039" algn="l" defTabSz="914400">
         <a:lnSpc>
           <a:spcPct val="90000"/>
         </a:lnSpc>
@@ -2978,7 +2942,7 @@
           <a:cs typeface="+mn-lt"/>
         </a:defRPr>
       </a:lvl3pPr>
-      <a:lvl4pPr xmlns:a="http://schemas.openxmlformats.org/drawingml/2006/main" marL="1727200" marR="0" indent="-355600" algn="l" defTabSz="914400">
+      <a:lvl4pPr marL="1727200" marR="0" indent="-355600" algn="l" defTabSz="914400">
         <a:lnSpc>
           <a:spcPct val="90000"/>
         </a:lnSpc>
@@ -3001,7 +2965,7 @@
           <a:cs typeface="+mn-lt"/>
         </a:defRPr>
       </a:lvl4pPr>
-      <a:lvl5pPr xmlns:a="http://schemas.openxmlformats.org/drawingml/2006/main" marL="2184400" marR="0" indent="-355600" algn="l" defTabSz="914400">
+      <a:lvl5pPr marL="2184400" marR="0" indent="-355600" algn="l" defTabSz="914400">
         <a:lnSpc>
           <a:spcPct val="90000"/>
         </a:lnSpc>
@@ -3024,7 +2988,7 @@
           <a:cs typeface="+mn-lt"/>
         </a:defRPr>
       </a:lvl5pPr>
-      <a:lvl6pPr xmlns:a="http://schemas.openxmlformats.org/drawingml/2006/main" marL="2641600" marR="0" indent="-355600" algn="l" defTabSz="914400">
+      <a:lvl6pPr marL="2641600" marR="0" indent="-355600" algn="l" defTabSz="914400">
         <a:lnSpc>
           <a:spcPct val="90000"/>
         </a:lnSpc>
@@ -3047,7 +3011,7 @@
           <a:cs typeface="+mn-lt"/>
         </a:defRPr>
       </a:lvl6pPr>
-      <a:lvl7pPr xmlns:a="http://schemas.openxmlformats.org/drawingml/2006/main" marL="3098800" marR="0" indent="-355600" algn="l" defTabSz="914400">
+      <a:lvl7pPr marL="3098800" marR="0" indent="-355600" algn="l" defTabSz="914400">
         <a:lnSpc>
           <a:spcPct val="90000"/>
         </a:lnSpc>
@@ -3070,7 +3034,7 @@
           <a:cs typeface="+mn-lt"/>
         </a:defRPr>
       </a:lvl7pPr>
-      <a:lvl8pPr xmlns:a="http://schemas.openxmlformats.org/drawingml/2006/main" marL="3556000" marR="0" indent="-355600" algn="l" defTabSz="914400">
+      <a:lvl8pPr marL="3556000" marR="0" indent="-355600" algn="l" defTabSz="914400">
         <a:lnSpc>
           <a:spcPct val="90000"/>
         </a:lnSpc>
@@ -3093,7 +3057,7 @@
           <a:cs typeface="+mn-lt"/>
         </a:defRPr>
       </a:lvl8pPr>
-      <a:lvl9pPr xmlns:a="http://schemas.openxmlformats.org/drawingml/2006/main" marL="4013200" marR="0" indent="-355600" algn="l" defTabSz="914400">
+      <a:lvl9pPr marL="4013200" marR="0" indent="-355600" algn="l" defTabSz="914400">
         <a:lnSpc>
           <a:spcPct val="90000"/>
         </a:lnSpc>
@@ -3118,7 +3082,7 @@
       </a:lvl9pPr>
     </p:bodyStyle>
     <p:otherStyle>
-      <a:lvl1pPr xmlns:a="http://schemas.openxmlformats.org/drawingml/2006/main" marL="0" marR="0" indent="0" algn="r" defTabSz="914400">
+      <a:lvl1pPr marL="0" marR="0" indent="0" algn="r" defTabSz="914400">
         <a:lnSpc>
           <a:spcPct val="100000"/>
         </a:lnSpc>
@@ -3141,7 +3105,7 @@
           <a:cs typeface="+mn-lt"/>
         </a:defRPr>
       </a:lvl1pPr>
-      <a:lvl2pPr xmlns:a="http://schemas.openxmlformats.org/drawingml/2006/main" marL="0" marR="0" indent="457200" algn="r" defTabSz="914400">
+      <a:lvl2pPr marL="0" marR="0" indent="457200" algn="r" defTabSz="914400">
         <a:lnSpc>
           <a:spcPct val="100000"/>
         </a:lnSpc>
@@ -3164,7 +3128,7 @@
           <a:cs typeface="+mn-lt"/>
         </a:defRPr>
       </a:lvl2pPr>
-      <a:lvl3pPr xmlns:a="http://schemas.openxmlformats.org/drawingml/2006/main" marL="0" marR="0" indent="914400" algn="r" defTabSz="914400">
+      <a:lvl3pPr marL="0" marR="0" indent="914400" algn="r" defTabSz="914400">
         <a:lnSpc>
           <a:spcPct val="100000"/>
         </a:lnSpc>
@@ -3187,7 +3151,7 @@
           <a:cs typeface="+mn-lt"/>
         </a:defRPr>
       </a:lvl3pPr>
-      <a:lvl4pPr xmlns:a="http://schemas.openxmlformats.org/drawingml/2006/main" marL="0" marR="0" indent="1371600" algn="r" defTabSz="914400">
+      <a:lvl4pPr marL="0" marR="0" indent="1371600" algn="r" defTabSz="914400">
         <a:lnSpc>
           <a:spcPct val="100000"/>
         </a:lnSpc>
@@ -3210,7 +3174,7 @@
           <a:cs typeface="+mn-lt"/>
         </a:defRPr>
       </a:lvl4pPr>
-      <a:lvl5pPr xmlns:a="http://schemas.openxmlformats.org/drawingml/2006/main" marL="0" marR="0" indent="1828800" algn="r" defTabSz="914400">
+      <a:lvl5pPr marL="0" marR="0" indent="1828800" algn="r" defTabSz="914400">
         <a:lnSpc>
           <a:spcPct val="100000"/>
         </a:lnSpc>
@@ -3233,7 +3197,7 @@
           <a:cs typeface="+mn-lt"/>
         </a:defRPr>
       </a:lvl5pPr>
-      <a:lvl6pPr xmlns:a="http://schemas.openxmlformats.org/drawingml/2006/main" marL="0" marR="0" indent="2286000" algn="r" defTabSz="914400">
+      <a:lvl6pPr marL="0" marR="0" indent="2286000" algn="r" defTabSz="914400">
         <a:lnSpc>
           <a:spcPct val="100000"/>
         </a:lnSpc>
@@ -3256,7 +3220,7 @@
           <a:cs typeface="+mn-lt"/>
         </a:defRPr>
       </a:lvl6pPr>
-      <a:lvl7pPr xmlns:a="http://schemas.openxmlformats.org/drawingml/2006/main" marL="0" marR="0" indent="2743200" algn="r" defTabSz="914400">
+      <a:lvl7pPr marL="0" marR="0" indent="2743200" algn="r" defTabSz="914400">
         <a:lnSpc>
           <a:spcPct val="100000"/>
         </a:lnSpc>
@@ -3279,7 +3243,7 @@
           <a:cs typeface="+mn-lt"/>
         </a:defRPr>
       </a:lvl7pPr>
-      <a:lvl8pPr xmlns:a="http://schemas.openxmlformats.org/drawingml/2006/main" marL="0" marR="0" indent="3200400" algn="r" defTabSz="914400">
+      <a:lvl8pPr marL="0" marR="0" indent="3200400" algn="r" defTabSz="914400">
         <a:lnSpc>
           <a:spcPct val="100000"/>
         </a:lnSpc>
@@ -3302,7 +3266,7 @@
           <a:cs typeface="+mn-lt"/>
         </a:defRPr>
       </a:lvl8pPr>
-      <a:lvl9pPr xmlns:a="http://schemas.openxmlformats.org/drawingml/2006/main" marL="0" marR="0" indent="3657600" algn="r" defTabSz="914400">
+      <a:lvl9pPr marL="0" marR="0" indent="3657600" algn="r" defTabSz="914400">
         <a:lnSpc>
           <a:spcPct val="100000"/>
         </a:lnSpc>
@@ -3330,206 +3294,19 @@
 </p:sldMaster>
 </file>
 
-<file path=ppt/slideMasters/theme/theme2.xml><?xml version="1.0" encoding="utf-8"?>
-<a:theme xmlns:a="http://schemas.openxmlformats.org/drawingml/2006/main" name="Tema de Office">
-  <a:themeElements>
-    <a:clrScheme name="Tema de Office">
-      <a:dk1>
-        <a:srgbClr val="000000"/>
-      </a:dk1>
-      <a:lt1>
-        <a:srgbClr val="FFFFFF"/>
-      </a:lt1>
-      <a:dk2>
-        <a:srgbClr val="A7A7A7"/>
-      </a:dk2>
-      <a:lt2>
-        <a:srgbClr val="535353"/>
-      </a:lt2>
-      <a:accent1>
-        <a:srgbClr val="4472C4"/>
-      </a:accent1>
-      <a:accent2>
-        <a:srgbClr val="ED7D31"/>
-      </a:accent2>
-      <a:accent3>
-        <a:srgbClr val="A5A5A5"/>
-      </a:accent3>
-      <a:accent4>
-        <a:srgbClr val="FFC000"/>
-      </a:accent4>
-      <a:accent5>
-        <a:srgbClr val="5B9BD5"/>
-      </a:accent5>
-      <a:accent6>
-        <a:srgbClr val="70AD47"/>
-      </a:accent6>
-      <a:hlink>
-        <a:srgbClr val="0000FF"/>
-      </a:hlink>
-      <a:folHlink>
-        <a:srgbClr val="FF00FF"/>
-      </a:folHlink>
-    </a:clrScheme>
-    <a:fontScheme name="Tema de Office">
-      <a:majorFont>
-        <a:latin typeface="Helvetica"/>
-        <a:ea typeface="Helvetica"/>
-        <a:cs typeface="Helvetica"/>
-      </a:majorFont>
-      <a:minorFont>
-        <a:latin typeface="Calibri"/>
-        <a:ea typeface="Calibri"/>
-        <a:cs typeface="Calibri"/>
-      </a:minorFont>
-    </a:fontScheme>
-    <a:fmtScheme name="Tema de Office">
-      <a:fillStyleLst>
-        <a:solidFill>
-          <a:schemeClr val="phClr"/>
-        </a:solidFill>
-        <a:gradFill rotWithShape="1">
-          <a:gsLst>
-            <a:gs pos="0">
-              <a:schemeClr val="phClr">
-                <a:tint val="50000"/>
-                <a:satMod val="300000"/>
-              </a:schemeClr>
-            </a:gs>
-            <a:gs pos="35000">
-              <a:schemeClr val="phClr">
-                <a:tint val="37000"/>
-                <a:satMod val="300000"/>
-              </a:schemeClr>
-            </a:gs>
-            <a:gs pos="100000">
-              <a:schemeClr val="phClr">
-                <a:tint val="15000"/>
-                <a:satMod val="350000"/>
-              </a:schemeClr>
-            </a:gs>
-          </a:gsLst>
-          <a:lin ang="16200000" scaled="1"/>
-        </a:gradFill>
-        <a:gradFill rotWithShape="1">
-          <a:gsLst>
-            <a:gs pos="0">
-              <a:schemeClr val="phClr">
-                <a:tint val="100000"/>
-                <a:shade val="100000"/>
-                <a:satMod val="129999"/>
-              </a:schemeClr>
-            </a:gs>
-            <a:gs pos="100000">
-              <a:schemeClr val="phClr">
-                <a:tint val="50000"/>
-                <a:shade val="100000"/>
-                <a:satMod val="350000"/>
-              </a:schemeClr>
-            </a:gs>
-          </a:gsLst>
-          <a:lin ang="16200000" scaled="0"/>
-        </a:gradFill>
-      </a:fillStyleLst>
-      <a:lnStyleLst>
-        <a:ln w="9525">
-          <a:solidFill>
-            <a:schemeClr val="phClr">
-              <a:shade val="95000"/>
-              <a:satMod val="104999"/>
-            </a:schemeClr>
-          </a:solidFill>
-          <a:prstDash val="solid"/>
-        </a:ln>
-        <a:ln w="25400">
-          <a:solidFill>
-            <a:schemeClr val="phClr"/>
-          </a:solidFill>
-          <a:prstDash val="solid"/>
-        </a:ln>
-        <a:ln w="38100">
-          <a:solidFill>
-            <a:schemeClr val="phClr"/>
-          </a:solidFill>
-          <a:prstDash val="solid"/>
-        </a:ln>
-      </a:lnStyleLst>
-      <a:effectStyleLst>
-        <a:effectStyle>
-          <a:effectLst/>
-        </a:effectStyle>
-        <a:effectStyle>
-          <a:effectLst/>
-        </a:effectStyle>
-        <a:effectStyle>
-          <a:effectLst/>
-        </a:effectStyle>
-      </a:effectStyleLst>
-      <a:bgFillStyleLst>
-        <a:solidFill>
-          <a:schemeClr val="phClr"/>
-        </a:solidFill>
-        <a:gradFill rotWithShape="1">
-          <a:gsLst>
-            <a:gs pos="0">
-              <a:schemeClr val="phClr">
-                <a:tint val="40000"/>
-                <a:satMod val="350000"/>
-              </a:schemeClr>
-            </a:gs>
-            <a:gs pos="40000">
-              <a:schemeClr val="phClr">
-                <a:tint val="45000"/>
-                <a:shade val="99000"/>
-                <a:satMod val="350000"/>
-              </a:schemeClr>
-            </a:gs>
-            <a:gs pos="100000">
-              <a:schemeClr val="phClr">
-                <a:shade val="20000"/>
-                <a:satMod val="255000"/>
-              </a:schemeClr>
-            </a:gs>
-          </a:gsLst>
-          <a:path path="circle">
-            <a:fillToRect l="50000" t="-80000" r="50000" b="180000"/>
-          </a:path>
-        </a:gradFill>
-        <a:gradFill rotWithShape="1">
-          <a:gsLst>
-            <a:gs pos="0">
-              <a:schemeClr val="phClr">
-                <a:tint val="80000"/>
-                <a:satMod val="300000"/>
-              </a:schemeClr>
-            </a:gs>
-            <a:gs pos="100000">
-              <a:schemeClr val="phClr">
-                <a:shade val="30000"/>
-                <a:satMod val="200000"/>
-              </a:schemeClr>
-            </a:gs>
-          </a:gsLst>
-          <a:path path="circle">
-            <a:fillToRect l="50000" t="50000" r="50000" b="50000"/>
-          </a:path>
-        </a:gradFill>
-      </a:bgFillStyleLst>
-    </a:fmtScheme>
-  </a:themeElements>
-</a:theme>
-</file>
-
 <file path=ppt/slides/charts/chart1.xml><?xml version="1.0" encoding="utf-8"?>
-<c:chartSpace xmlns:c="http://schemas.openxmlformats.org/drawingml/2006/chart" xmlns:r="http://schemas.openxmlformats.org/officeDocument/2006/relationships">
+<c:chartSpace xmlns:c="http://schemas.openxmlformats.org/drawingml/2006/chart" xmlns:a="http://schemas.openxmlformats.org/drawingml/2006/main" xmlns:r="http://schemas.openxmlformats.org/officeDocument/2006/relationships" xmlns:c16r2="http://schemas.microsoft.com/office/drawing/2015/06/chart">
+  <c:date1904 val="1"/>
   <c:lang val="en-US"/>
+  <c:roundedCorners val="1"/>
+  <c:style val="2"/>
   <c:chart>
     <c:title>
       <c:tx>
         <c:rich>
-          <a:bodyPr xmlns:a="http://schemas.openxmlformats.org/drawingml/2006/main"/>
-          <a:lstStyle xmlns:a="http://schemas.openxmlformats.org/drawingml/2006/main"/>
-          <a:p xmlns:a="http://schemas.openxmlformats.org/drawingml/2006/main">
+          <a:bodyPr/>
+          <a:lstStyle/>
+          <a:p>
             <a:r>
               <a:rPr sz="1800" b="1">
                 <a:latin typeface="Calibri"/>
@@ -3542,21 +3319,10 @@
         </c:rich>
       </c:tx>
       <c:overlay val="0"/>
-      <c:txPr>
-        <a:bodyPr xmlns:a="http://schemas.openxmlformats.org/drawingml/2006/main" anchorCtr="1"/>
-        <a:lstStyle xmlns:a="http://schemas.openxmlformats.org/drawingml/2006/main"/>
-        <a:p xmlns:a="http://schemas.openxmlformats.org/drawingml/2006/main">
-          <a:pPr>
-            <a:defRPr sz="1800" b="1">
-              <a:latin typeface="Calibri"/>
-              <a:ea typeface="Calibri"/>
-              <a:cs typeface="Calibri"/>
-            </a:defRPr>
-          </a:pPr>
-        </a:p>
-      </c:txPr>
     </c:title>
+    <c:autoTitleDeleted val="0"/>
     <c:plotArea>
+      <c:layout/>
       <c:lineChart>
         <c:grouping val="standard"/>
         <c:varyColors val="0"/>
@@ -3567,10 +3333,7 @@
             <c:v>Tarjetas emitidas</c:v>
           </c:tx>
           <c:spPr>
-            <a:solidFill xmlns:a="http://schemas.openxmlformats.org/drawingml/2006/main">
-              <a:srgbClr val="960E53"/>
-            </a:solidFill>
-            <a:ln xmlns:a="http://schemas.openxmlformats.org/drawingml/2006/main" w="23813">
+            <a:ln w="23813">
               <a:solidFill>
                 <a:srgbClr val="960E53"/>
               </a:solidFill>
@@ -3580,7 +3343,7 @@
             <c:symbol val="circle"/>
             <c:size val="3"/>
             <c:spPr>
-              <a:solidFill xmlns:a="http://schemas.openxmlformats.org/drawingml/2006/main">
+              <a:solidFill>
                 <a:srgbClr val="960E53"/>
               </a:solidFill>
             </c:spPr>
@@ -3589,10 +3352,7 @@
             <c:strRef>
               <c:f>'Chart Data'!$A$2:$A$2</c:f>
               <c:strCache>
-                <c:ptCount val="1"/>
-                <c:pt idx="0">
-                  <c:v>S01</c:v>
-                </c:pt>
+                <c:ptCount val="0"/>
               </c:strCache>
             </c:strRef>
           </c:cat>
@@ -3601,13 +3361,16 @@
               <c:f>'Chart Data'!$B$2:$B$2</c:f>
               <c:numCache>
                 <c:formatCode>#,##0</c:formatCode>
-                <c:ptCount val="1"/>
-                <c:pt idx="0">
-                  <c:v>0</c:v>
-                </c:pt>
+                <c:ptCount val="0"/>
               </c:numCache>
             </c:numRef>
           </c:val>
+          <c:smooth val="1"/>
+          <c:extLst>
+            <c:ext xmlns:c16="http://schemas.microsoft.com/office/drawing/2014/chart" uri="{C3380CC4-5D6E-409C-BE32-E72D297353CC}">
+              <c16:uniqueId val="{00000000-3FCA-204E-9B17-DABDAE1F595A}"/>
+            </c:ext>
+          </c:extLst>
         </c:ser>
         <c:ser>
           <c:idx val="1"/>
@@ -3616,10 +3379,7 @@
             <c:v>Meta general</c:v>
           </c:tx>
           <c:spPr>
-            <a:solidFill xmlns:a="http://schemas.openxmlformats.org/drawingml/2006/main">
-              <a:srgbClr val="DC7F37"/>
-            </a:solidFill>
-            <a:ln xmlns:a="http://schemas.openxmlformats.org/drawingml/2006/main" w="23813">
+            <a:ln w="23813">
               <a:solidFill>
                 <a:srgbClr val="DC7F37"/>
               </a:solidFill>
@@ -3629,7 +3389,7 @@
             <c:symbol val="circle"/>
             <c:size val="3"/>
             <c:spPr>
-              <a:solidFill xmlns:a="http://schemas.openxmlformats.org/drawingml/2006/main">
+              <a:solidFill>
                 <a:srgbClr val="DC7F37"/>
               </a:solidFill>
             </c:spPr>
@@ -3638,10 +3398,7 @@
             <c:strRef>
               <c:f>'Chart Data'!$C$2:$C$2</c:f>
               <c:strCache>
-                <c:ptCount val="1"/>
-                <c:pt idx="0">
-                  <c:v>S01</c:v>
-                </c:pt>
+                <c:ptCount val="0"/>
               </c:strCache>
             </c:strRef>
           </c:cat>
@@ -3650,36 +3407,27 @@
               <c:f>'Chart Data'!$D$2:$D$2</c:f>
               <c:numCache>
                 <c:formatCode>#,##0</c:formatCode>
-                <c:ptCount val="1"/>
-                <c:pt idx="0">
-                  <c:v>0</c:v>
-                </c:pt>
+                <c:ptCount val="0"/>
               </c:numCache>
             </c:numRef>
           </c:val>
+          <c:smooth val="1"/>
+          <c:extLst>
+            <c:ext xmlns:c16="http://schemas.microsoft.com/office/drawing/2014/chart" uri="{C3380CC4-5D6E-409C-BE32-E72D297353CC}">
+              <c16:uniqueId val="{00000001-3FCA-204E-9B17-DABDAE1F595A}"/>
+            </c:ext>
+          </c:extLst>
         </c:ser>
         <c:dLbls>
-          <c:txPr>
-            <a:bodyPr xmlns:a="http://schemas.openxmlformats.org/drawingml/2006/main" anchorCtr="1"/>
-            <a:lstStyle xmlns:a="http://schemas.openxmlformats.org/drawingml/2006/main"/>
-            <a:p xmlns:a="http://schemas.openxmlformats.org/drawingml/2006/main">
-              <a:pPr>
-                <a:defRPr>
-                  <a:latin typeface="Calibri"/>
-                  <a:ea typeface="Calibri"/>
-                  <a:cs typeface="Calibri"/>
-                </a:defRPr>
-              </a:pPr>
-            </a:p>
-          </c:txPr>
           <c:showLegendKey val="0"/>
           <c:showVal val="0"/>
           <c:showCatName val="0"/>
           <c:showSerName val="0"/>
           <c:showPercent val="0"/>
           <c:showBubbleSize val="0"/>
-          <c:showLeaderLines val="0"/>
         </c:dLbls>
+        <c:marker val="1"/>
+        <c:smooth val="0"/>
         <c:axId val="48650112"/>
         <c:axId val="48672768"/>
       </c:lineChart>
@@ -3693,9 +3441,9 @@
         <c:title>
           <c:tx>
             <c:rich>
-              <a:bodyPr xmlns:a="http://schemas.openxmlformats.org/drawingml/2006/main"/>
-              <a:lstStyle xmlns:a="http://schemas.openxmlformats.org/drawingml/2006/main"/>
-              <a:p xmlns:a="http://schemas.openxmlformats.org/drawingml/2006/main">
+              <a:bodyPr/>
+              <a:lstStyle/>
+              <a:p>
                 <a:r>
                   <a:rPr>
                     <a:latin typeface="Calibri"/>
@@ -3708,25 +3456,13 @@
             </c:rich>
           </c:tx>
           <c:overlay val="0"/>
-          <c:txPr>
-            <a:bodyPr xmlns:a="http://schemas.openxmlformats.org/drawingml/2006/main" anchorCtr="1"/>
-            <a:lstStyle xmlns:a="http://schemas.openxmlformats.org/drawingml/2006/main"/>
-            <a:p xmlns:a="http://schemas.openxmlformats.org/drawingml/2006/main">
-              <a:pPr>
-                <a:defRPr>
-                  <a:latin typeface="Calibri"/>
-                  <a:ea typeface="Calibri"/>
-                  <a:cs typeface="Calibri"/>
-                </a:defRPr>
-              </a:pPr>
-            </a:p>
-          </c:txPr>
         </c:title>
-        <c:numFmt formatCode="General"/>
+        <c:numFmt formatCode="General" sourceLinked="1"/>
         <c:majorTickMark val="none"/>
         <c:minorTickMark val="none"/>
+        <c:tickLblPos val="nextTo"/>
         <c:spPr>
-          <a:ln xmlns:a="http://schemas.openxmlformats.org/drawingml/2006/main" w="9525">
+          <a:ln w="9525">
             <a:solidFill>
               <a:srgbClr val="D4D4D4"/>
             </a:solidFill>
@@ -3734,9 +3470,9 @@
           </a:ln>
         </c:spPr>
         <c:txPr>
-          <a:bodyPr xmlns:a="http://schemas.openxmlformats.org/drawingml/2006/main" anchorCtr="1"/>
-          <a:lstStyle xmlns:a="http://schemas.openxmlformats.org/drawingml/2006/main"/>
-          <a:p xmlns:a="http://schemas.openxmlformats.org/drawingml/2006/main">
+          <a:bodyPr anchorCtr="1"/>
+          <a:lstStyle/>
+          <a:p>
             <a:pPr>
               <a:defRPr sz="1125">
                 <a:solidFill>
@@ -3747,9 +3483,15 @@
                 <a:cs typeface="Calibri"/>
               </a:defRPr>
             </a:pPr>
+            <a:endParaRPr lang="en-MX"/>
           </a:p>
         </c:txPr>
         <c:crossAx val="48672768"/>
+        <c:crosses val="autoZero"/>
+        <c:auto val="1"/>
+        <c:lblAlgn val="ctr"/>
+        <c:lblOffset val="100"/>
+        <c:noMultiLvlLbl val="1"/>
       </c:catAx>
       <c:valAx>
         <c:axId val="48672768"/>
@@ -3760,18 +3502,19 @@
         <c:axPos val="l"/>
         <c:majorGridlines>
           <c:spPr>
-            <a:ln xmlns:a="http://schemas.openxmlformats.org/drawingml/2006/main" w="9525">
+            <a:ln w="9525">
               <a:solidFill>
                 <a:srgbClr val="DDDDDD"/>
               </a:solidFill>
             </a:ln>
           </c:spPr>
         </c:majorGridlines>
-        <c:numFmt formatCode="#,##0"/>
+        <c:numFmt formatCode="#,##0" sourceLinked="1"/>
         <c:majorTickMark val="none"/>
         <c:minorTickMark val="none"/>
+        <c:tickLblPos val="nextTo"/>
         <c:spPr>
-          <a:ln xmlns:a="http://schemas.openxmlformats.org/drawingml/2006/main" w="9525">
+          <a:ln w="9525">
             <a:solidFill>
               <a:srgbClr val="D4D4D4"/>
             </a:solidFill>
@@ -3779,9 +3522,9 @@
           </a:ln>
         </c:spPr>
         <c:txPr>
-          <a:bodyPr xmlns:a="http://schemas.openxmlformats.org/drawingml/2006/main" anchorCtr="1"/>
-          <a:lstStyle xmlns:a="http://schemas.openxmlformats.org/drawingml/2006/main"/>
-          <a:p xmlns:a="http://schemas.openxmlformats.org/drawingml/2006/main">
+          <a:bodyPr anchorCtr="1"/>
+          <a:lstStyle/>
+          <a:p>
             <a:pPr>
               <a:defRPr sz="1200">
                 <a:solidFill>
@@ -3792,13 +3535,15 @@
                 <a:cs typeface="Calibri"/>
               </a:defRPr>
             </a:pPr>
+            <a:endParaRPr lang="en-MX"/>
           </a:p>
         </c:txPr>
         <c:crossAx val="48650112"/>
+        <c:crosses val="autoZero"/>
         <c:crossBetween val="between"/>
       </c:valAx>
       <c:spPr>
-        <a:solidFill xmlns:a="http://schemas.openxmlformats.org/drawingml/2006/main">
+        <a:solidFill>
           <a:srgbClr val="FFFFFF"/>
         </a:solidFill>
       </c:spPr>
@@ -3807,9 +3552,9 @@
       <c:legendPos val="b"/>
       <c:overlay val="0"/>
       <c:txPr>
-        <a:bodyPr xmlns:a="http://schemas.openxmlformats.org/drawingml/2006/main" anchorCtr="1"/>
-        <a:lstStyle xmlns:a="http://schemas.openxmlformats.org/drawingml/2006/main"/>
-        <a:p xmlns:a="http://schemas.openxmlformats.org/drawingml/2006/main">
+        <a:bodyPr anchorCtr="1"/>
+        <a:lstStyle/>
+        <a:p>
           <a:pPr>
             <a:defRPr sz="1350">
               <a:latin typeface="Calibri"/>
@@ -3817,33 +3562,38 @@
               <a:cs typeface="Calibri"/>
             </a:defRPr>
           </a:pPr>
+          <a:endParaRPr lang="en-MX"/>
         </a:p>
       </c:txPr>
     </c:legend>
     <c:plotVisOnly val="1"/>
     <c:dispBlanksAs val="gap"/>
+    <c:showDLblsOverMax val="1"/>
   </c:chart>
   <c:spPr>
-    <a:solidFill xmlns:a="http://schemas.openxmlformats.org/drawingml/2006/main">
+    <a:solidFill>
       <a:srgbClr val="FFFFFF"/>
     </a:solidFill>
   </c:spPr>
-  <c:externalData r:id="rIdChartSnapshot1">
+  <c:externalData r:id="rId1">
     <c:autoUpdate val="0"/>
   </c:externalData>
 </c:chartSpace>
 </file>
 
 <file path=ppt/slides/charts/chart2.xml><?xml version="1.0" encoding="utf-8"?>
-<c:chartSpace xmlns:c="http://schemas.openxmlformats.org/drawingml/2006/chart" xmlns:r="http://schemas.openxmlformats.org/officeDocument/2006/relationships">
+<c:chartSpace xmlns:c="http://schemas.openxmlformats.org/drawingml/2006/chart" xmlns:a="http://schemas.openxmlformats.org/drawingml/2006/main" xmlns:r="http://schemas.openxmlformats.org/officeDocument/2006/relationships" xmlns:c16r2="http://schemas.microsoft.com/office/drawing/2015/06/chart">
+  <c:date1904 val="1"/>
   <c:lang val="en-US"/>
+  <c:roundedCorners val="1"/>
+  <c:style val="2"/>
   <c:chart>
     <c:title>
       <c:tx>
         <c:rich>
-          <a:bodyPr xmlns:a="http://schemas.openxmlformats.org/drawingml/2006/main"/>
-          <a:lstStyle xmlns:a="http://schemas.openxmlformats.org/drawingml/2006/main"/>
-          <a:p xmlns:a="http://schemas.openxmlformats.org/drawingml/2006/main">
+          <a:bodyPr/>
+          <a:lstStyle/>
+          <a:p>
             <a:r>
               <a:rPr sz="1800" b="1">
                 <a:latin typeface="Calibri"/>
@@ -3856,21 +3606,10 @@
         </c:rich>
       </c:tx>
       <c:overlay val="0"/>
-      <c:txPr>
-        <a:bodyPr xmlns:a="http://schemas.openxmlformats.org/drawingml/2006/main" anchorCtr="1"/>
-        <a:lstStyle xmlns:a="http://schemas.openxmlformats.org/drawingml/2006/main"/>
-        <a:p xmlns:a="http://schemas.openxmlformats.org/drawingml/2006/main">
-          <a:pPr>
-            <a:defRPr sz="1800" b="1">
-              <a:latin typeface="Calibri"/>
-              <a:ea typeface="Calibri"/>
-              <a:cs typeface="Calibri"/>
-            </a:defRPr>
-          </a:pPr>
-        </a:p>
-      </c:txPr>
     </c:title>
+    <c:autoTitleDeleted val="0"/>
     <c:plotArea>
+      <c:layout/>
       <c:barChart>
         <c:barDir val="bar"/>
         <c:grouping val="clustered"/>
@@ -3882,27 +3621,52 @@
             <c:v>Tarjetas emitidas</c:v>
           </c:tx>
           <c:spPr>
-            <a:solidFill xmlns:a="http://schemas.openxmlformats.org/drawingml/2006/main">
+            <a:solidFill>
               <a:srgbClr val="960E53"/>
             </a:solidFill>
           </c:spPr>
+          <c:invertIfNegative val="1"/>
+          <c:dLbls>
+            <c:spPr>
+              <a:noFill/>
+              <a:ln>
+                <a:noFill/>
+              </a:ln>
+              <a:effectLst/>
+            </c:spPr>
+            <c:txPr>
+              <a:bodyPr anchorCtr="1"/>
+              <a:lstStyle/>
+              <a:p>
+                <a:pPr>
+                  <a:defRPr sz="1275">
+                    <a:latin typeface="Calibri"/>
+                    <a:ea typeface="Calibri"/>
+                    <a:cs typeface="Calibri"/>
+                  </a:defRPr>
+                </a:pPr>
+                <a:endParaRPr lang="en-MX"/>
+              </a:p>
+            </c:txPr>
+            <c:dLblPos val="outEnd"/>
+            <c:showLegendKey val="0"/>
+            <c:showVal val="1"/>
+            <c:showCatName val="0"/>
+            <c:showSerName val="0"/>
+            <c:showPercent val="0"/>
+            <c:showBubbleSize val="0"/>
+            <c:showLeaderLines val="0"/>
+            <c:extLst>
+              <c:ext xmlns:c15="http://schemas.microsoft.com/office/drawing/2012/chart" uri="{CE6537A1-D6FC-4f65-9D91-7224C49458BB}">
+                <c15:showLeaderLines val="0"/>
+              </c:ext>
+            </c:extLst>
+          </c:dLbls>
           <c:cat>
             <c:strRef>
               <c:f>'Chart Data'!$A$2:$A$5</c:f>
               <c:strCache>
-                <c:ptCount val="4"/>
-                <c:pt idx="0">
-                  <c:v>PREPAGO</c:v>
-                </c:pt>
-                <c:pt idx="1">
-                  <c:v>ESTUDIANTE</c:v>
-                </c:pt>
-                <c:pt idx="2">
-                  <c:v>TERCERA EDAD</c:v>
-                </c:pt>
-                <c:pt idx="3">
-                  <c:v>DISCAPACIDAD</c:v>
-                </c:pt>
+                <c:ptCount val="0"/>
               </c:strCache>
             </c:strRef>
           </c:cat>
@@ -3910,23 +3674,25 @@
             <c:numRef>
               <c:f>'Chart Data'!$B$2:$B$5</c:f>
               <c:numCache>
-                <c:formatCode>General</c:formatCode>
-                <c:ptCount val="4"/>
-                <c:pt idx="0">
-                  <c:v>0</c:v>
-                </c:pt>
-                <c:pt idx="1">
-                  <c:v>0</c:v>
-                </c:pt>
-                <c:pt idx="2">
-                  <c:v>0</c:v>
-                </c:pt>
-                <c:pt idx="3">
-                  <c:v>0</c:v>
-                </c:pt>
+                <c:formatCode>#,##0</c:formatCode>
+                <c:ptCount val="0"/>
               </c:numCache>
             </c:numRef>
           </c:val>
+          <c:extLst>
+            <c:ext xmlns:c14="http://schemas.microsoft.com/office/drawing/2007/8/2/chart" uri="{6F2FDCE9-48DA-4B69-8628-5D25D57E5C99}">
+              <c14:invertSolidFillFmt>
+                <c14:spPr xmlns:c14="http://schemas.microsoft.com/office/drawing/2007/8/2/chart">
+                  <a:solidFill>
+                    <a:srgbClr val="FFFFFF"/>
+                  </a:solidFill>
+                </c14:spPr>
+              </c14:invertSolidFillFmt>
+            </c:ext>
+            <c:ext xmlns:c16="http://schemas.microsoft.com/office/drawing/2014/chart" uri="{C3380CC4-5D6E-409C-BE32-E72D297353CC}">
+              <c16:uniqueId val="{00000000-9476-6A4E-B170-5251E55FFB6D}"/>
+            </c:ext>
+          </c:extLst>
         </c:ser>
         <c:ser>
           <c:idx val="1"/>
@@ -3935,27 +3701,52 @@
             <c:v>Meta</c:v>
           </c:tx>
           <c:spPr>
-            <a:solidFill xmlns:a="http://schemas.openxmlformats.org/drawingml/2006/main">
+            <a:solidFill>
               <a:srgbClr val="DC7F37"/>
             </a:solidFill>
           </c:spPr>
+          <c:invertIfNegative val="1"/>
+          <c:dLbls>
+            <c:spPr>
+              <a:noFill/>
+              <a:ln>
+                <a:noFill/>
+              </a:ln>
+              <a:effectLst/>
+            </c:spPr>
+            <c:txPr>
+              <a:bodyPr anchorCtr="1"/>
+              <a:lstStyle/>
+              <a:p>
+                <a:pPr>
+                  <a:defRPr sz="1275">
+                    <a:latin typeface="Calibri"/>
+                    <a:ea typeface="Calibri"/>
+                    <a:cs typeface="Calibri"/>
+                  </a:defRPr>
+                </a:pPr>
+                <a:endParaRPr lang="en-MX"/>
+              </a:p>
+            </c:txPr>
+            <c:dLblPos val="outEnd"/>
+            <c:showLegendKey val="0"/>
+            <c:showVal val="1"/>
+            <c:showCatName val="0"/>
+            <c:showSerName val="0"/>
+            <c:showPercent val="0"/>
+            <c:showBubbleSize val="0"/>
+            <c:showLeaderLines val="0"/>
+            <c:extLst>
+              <c:ext xmlns:c15="http://schemas.microsoft.com/office/drawing/2012/chart" uri="{CE6537A1-D6FC-4f65-9D91-7224C49458BB}">
+                <c15:showLeaderLines val="0"/>
+              </c:ext>
+            </c:extLst>
+          </c:dLbls>
           <c:cat>
             <c:strRef>
               <c:f>'Chart Data'!$C$2:$C$5</c:f>
               <c:strCache>
-                <c:ptCount val="4"/>
-                <c:pt idx="0">
-                  <c:v>PREPAGO</c:v>
-                </c:pt>
-                <c:pt idx="1">
-                  <c:v>ESTUDIANTE</c:v>
-                </c:pt>
-                <c:pt idx="2">
-                  <c:v>TERCERA EDAD</c:v>
-                </c:pt>
-                <c:pt idx="3">
-                  <c:v>DISCAPACIDAD</c:v>
-                </c:pt>
+                <c:ptCount val="0"/>
               </c:strCache>
             </c:strRef>
           </c:cat>
@@ -3963,38 +3754,27 @@
             <c:numRef>
               <c:f>'Chart Data'!$D$2:$D$5</c:f>
               <c:numCache>
-                <c:formatCode>General</c:formatCode>
-                <c:ptCount val="4"/>
-                <c:pt idx="0">
-                  <c:v>0</c:v>
-                </c:pt>
-                <c:pt idx="1">
-                  <c:v>0</c:v>
-                </c:pt>
-                <c:pt idx="2">
-                  <c:v>0</c:v>
-                </c:pt>
-                <c:pt idx="3">
-                  <c:v>0</c:v>
-                </c:pt>
+                <c:formatCode>#,##0</c:formatCode>
+                <c:ptCount val="0"/>
               </c:numCache>
             </c:numRef>
           </c:val>
+          <c:extLst>
+            <c:ext xmlns:c14="http://schemas.microsoft.com/office/drawing/2007/8/2/chart" uri="{6F2FDCE9-48DA-4B69-8628-5D25D57E5C99}">
+              <c14:invertSolidFillFmt>
+                <c14:spPr xmlns:c14="http://schemas.microsoft.com/office/drawing/2007/8/2/chart">
+                  <a:solidFill>
+                    <a:srgbClr val="FFFFFF"/>
+                  </a:solidFill>
+                </c14:spPr>
+              </c14:invertSolidFillFmt>
+            </c:ext>
+            <c:ext xmlns:c16="http://schemas.microsoft.com/office/drawing/2014/chart" uri="{C3380CC4-5D6E-409C-BE32-E72D297353CC}">
+              <c16:uniqueId val="{00000001-9476-6A4E-B170-5251E55FFB6D}"/>
+            </c:ext>
+          </c:extLst>
         </c:ser>
         <c:dLbls>
-          <c:txPr>
-            <a:bodyPr xmlns:a="http://schemas.openxmlformats.org/drawingml/2006/main" anchorCtr="1"/>
-            <a:lstStyle xmlns:a="http://schemas.openxmlformats.org/drawingml/2006/main"/>
-            <a:p xmlns:a="http://schemas.openxmlformats.org/drawingml/2006/main">
-              <a:pPr>
-                <a:defRPr sz="1275">
-                  <a:latin typeface="Calibri"/>
-                  <a:ea typeface="Calibri"/>
-                  <a:cs typeface="Calibri"/>
-                </a:defRPr>
-              </a:pPr>
-            </a:p>
-          </c:txPr>
           <c:dLblPos val="outEnd"/>
           <c:showLegendKey val="0"/>
           <c:showVal val="1"/>
@@ -4002,7 +3782,6 @@
           <c:showSerName val="0"/>
           <c:showPercent val="0"/>
           <c:showBubbleSize val="0"/>
-          <c:showLeaderLines val="0"/>
         </c:dLbls>
         <c:gapWidth val="55"/>
         <c:axId val="48650112"/>
@@ -4015,11 +3794,12 @@
         </c:scaling>
         <c:delete val="0"/>
         <c:axPos val="l"/>
-        <c:numFmt formatCode="#,##0"/>
+        <c:numFmt formatCode="General" sourceLinked="1"/>
         <c:majorTickMark val="none"/>
         <c:minorTickMark val="none"/>
+        <c:tickLblPos val="nextTo"/>
         <c:spPr>
-          <a:ln xmlns:a="http://schemas.openxmlformats.org/drawingml/2006/main" w="9525">
+          <a:ln w="9525">
             <a:solidFill>
               <a:srgbClr val="D4D4D4"/>
             </a:solidFill>
@@ -4027,9 +3807,9 @@
           </a:ln>
         </c:spPr>
         <c:txPr>
-          <a:bodyPr xmlns:a="http://schemas.openxmlformats.org/drawingml/2006/main" anchorCtr="1"/>
-          <a:lstStyle xmlns:a="http://schemas.openxmlformats.org/drawingml/2006/main"/>
-          <a:p xmlns:a="http://schemas.openxmlformats.org/drawingml/2006/main">
+          <a:bodyPr anchorCtr="1"/>
+          <a:lstStyle/>
+          <a:p>
             <a:pPr>
               <a:defRPr sz="1125">
                 <a:solidFill>
@@ -4040,9 +3820,15 @@
                 <a:cs typeface="Calibri"/>
               </a:defRPr>
             </a:pPr>
+            <a:endParaRPr lang="en-MX"/>
           </a:p>
         </c:txPr>
         <c:crossAx val="48672768"/>
+        <c:crosses val="autoZero"/>
+        <c:auto val="1"/>
+        <c:lblAlgn val="ctr"/>
+        <c:lblOffset val="100"/>
+        <c:noMultiLvlLbl val="1"/>
       </c:catAx>
       <c:valAx>
         <c:axId val="48672768"/>
@@ -4051,11 +3837,12 @@
         </c:scaling>
         <c:delete val="0"/>
         <c:axPos val="b"/>
-        <c:numFmt formatCode="General"/>
+        <c:numFmt formatCode="General" sourceLinked="1"/>
         <c:majorTickMark val="none"/>
         <c:minorTickMark val="none"/>
+        <c:tickLblPos val="nextTo"/>
         <c:spPr>
-          <a:ln xmlns:a="http://schemas.openxmlformats.org/drawingml/2006/main" w="9525">
+          <a:ln w="9525">
             <a:solidFill>
               <a:srgbClr val="D4D4D4"/>
             </a:solidFill>
@@ -4063,9 +3850,9 @@
           </a:ln>
         </c:spPr>
         <c:txPr>
-          <a:bodyPr xmlns:a="http://schemas.openxmlformats.org/drawingml/2006/main" anchorCtr="1"/>
-          <a:lstStyle xmlns:a="http://schemas.openxmlformats.org/drawingml/2006/main"/>
-          <a:p xmlns:a="http://schemas.openxmlformats.org/drawingml/2006/main">
+          <a:bodyPr anchorCtr="1"/>
+          <a:lstStyle/>
+          <a:p>
             <a:pPr>
               <a:defRPr sz="1275">
                 <a:solidFill>
@@ -4076,13 +3863,15 @@
                 <a:cs typeface="Calibri"/>
               </a:defRPr>
             </a:pPr>
+            <a:endParaRPr lang="en-MX"/>
           </a:p>
         </c:txPr>
         <c:crossAx val="48650112"/>
+        <c:crosses val="autoZero"/>
         <c:crossBetween val="between"/>
       </c:valAx>
       <c:spPr>
-        <a:solidFill xmlns:a="http://schemas.openxmlformats.org/drawingml/2006/main">
+        <a:solidFill>
           <a:srgbClr val="FFFFFF"/>
         </a:solidFill>
       </c:spPr>
@@ -4091,9 +3880,9 @@
       <c:legendPos val="b"/>
       <c:overlay val="0"/>
       <c:txPr>
-        <a:bodyPr xmlns:a="http://schemas.openxmlformats.org/drawingml/2006/main" anchorCtr="1"/>
-        <a:lstStyle xmlns:a="http://schemas.openxmlformats.org/drawingml/2006/main"/>
-        <a:p xmlns:a="http://schemas.openxmlformats.org/drawingml/2006/main">
+        <a:bodyPr anchorCtr="1"/>
+        <a:lstStyle/>
+        <a:p>
           <a:pPr>
             <a:defRPr sz="1350">
               <a:latin typeface="Calibri"/>
@@ -4101,33 +3890,38 @@
               <a:cs typeface="Calibri"/>
             </a:defRPr>
           </a:pPr>
+          <a:endParaRPr lang="en-MX"/>
         </a:p>
       </c:txPr>
     </c:legend>
     <c:plotVisOnly val="1"/>
     <c:dispBlanksAs val="gap"/>
+    <c:showDLblsOverMax val="1"/>
   </c:chart>
   <c:spPr>
-    <a:solidFill xmlns:a="http://schemas.openxmlformats.org/drawingml/2006/main">
+    <a:solidFill>
       <a:srgbClr val="FFFFFF"/>
     </a:solidFill>
   </c:spPr>
-  <c:externalData r:id="rIdChartSnapshot1">
+  <c:externalData r:id="rId1">
     <c:autoUpdate val="0"/>
   </c:externalData>
 </c:chartSpace>
 </file>
 
 <file path=ppt/slides/charts/chart3.xml><?xml version="1.0" encoding="utf-8"?>
-<c:chartSpace xmlns:c="http://schemas.openxmlformats.org/drawingml/2006/chart" xmlns:r="http://schemas.openxmlformats.org/officeDocument/2006/relationships">
+<c:chartSpace xmlns:c="http://schemas.openxmlformats.org/drawingml/2006/chart" xmlns:a="http://schemas.openxmlformats.org/drawingml/2006/main" xmlns:r="http://schemas.openxmlformats.org/officeDocument/2006/relationships" xmlns:c16r2="http://schemas.microsoft.com/office/drawing/2015/06/chart">
+  <c:date1904 val="1"/>
   <c:lang val="en-US"/>
+  <c:roundedCorners val="1"/>
+  <c:style val="2"/>
   <c:chart>
     <c:title>
       <c:tx>
         <c:rich>
-          <a:bodyPr xmlns:a="http://schemas.openxmlformats.org/drawingml/2006/main"/>
-          <a:lstStyle xmlns:a="http://schemas.openxmlformats.org/drawingml/2006/main"/>
-          <a:p xmlns:a="http://schemas.openxmlformats.org/drawingml/2006/main">
+          <a:bodyPr/>
+          <a:lstStyle/>
+          <a:p>
             <a:r>
               <a:rPr sz="1800" b="1">
                 <a:latin typeface="Calibri"/>
@@ -4140,21 +3934,10 @@
         </c:rich>
       </c:tx>
       <c:overlay val="0"/>
-      <c:txPr>
-        <a:bodyPr xmlns:a="http://schemas.openxmlformats.org/drawingml/2006/main" anchorCtr="1"/>
-        <a:lstStyle xmlns:a="http://schemas.openxmlformats.org/drawingml/2006/main"/>
-        <a:p xmlns:a="http://schemas.openxmlformats.org/drawingml/2006/main">
-          <a:pPr>
-            <a:defRPr sz="1800" b="1">
-              <a:latin typeface="Calibri"/>
-              <a:ea typeface="Calibri"/>
-              <a:cs typeface="Calibri"/>
-            </a:defRPr>
-          </a:pPr>
-        </a:p>
-      </c:txPr>
     </c:title>
+    <c:autoTitleDeleted val="0"/>
     <c:plotArea>
+      <c:layout/>
       <c:lineChart>
         <c:grouping val="standard"/>
         <c:varyColors val="0"/>
@@ -4165,10 +3948,7 @@
             <c:v>OXXO</c:v>
           </c:tx>
           <c:spPr>
-            <a:solidFill xmlns:a="http://schemas.openxmlformats.org/drawingml/2006/main">
-              <a:srgbClr val="960E53"/>
-            </a:solidFill>
-            <a:ln xmlns:a="http://schemas.openxmlformats.org/drawingml/2006/main" w="23813">
+            <a:ln w="23813">
               <a:solidFill>
                 <a:srgbClr val="960E53"/>
               </a:solidFill>
@@ -4178,7 +3958,7 @@
             <c:symbol val="circle"/>
             <c:size val="3"/>
             <c:spPr>
-              <a:solidFill xmlns:a="http://schemas.openxmlformats.org/drawingml/2006/main">
+              <a:solidFill>
                 <a:srgbClr val="960E53"/>
               </a:solidFill>
             </c:spPr>
@@ -4187,10 +3967,7 @@
             <c:strRef>
               <c:f>'Chart Data'!$A$2:$A$2</c:f>
               <c:strCache>
-                <c:ptCount val="1"/>
-                <c:pt idx="0">
-                  <c:v>S01</c:v>
-                </c:pt>
+                <c:ptCount val="0"/>
               </c:strCache>
             </c:strRef>
           </c:cat>
@@ -4198,14 +3975,17 @@
             <c:numRef>
               <c:f>'Chart Data'!$B$2:$B$2</c:f>
               <c:numCache>
-                <c:formatCode>$#,##0</c:formatCode>
-                <c:ptCount val="1"/>
-                <c:pt idx="0">
-                  <c:v>0</c:v>
-                </c:pt>
+                <c:formatCode>#,##0</c:formatCode>
+                <c:ptCount val="0"/>
               </c:numCache>
             </c:numRef>
           </c:val>
+          <c:smooth val="1"/>
+          <c:extLst>
+            <c:ext xmlns:c16="http://schemas.microsoft.com/office/drawing/2014/chart" uri="{C3380CC4-5D6E-409C-BE32-E72D297353CC}">
+              <c16:uniqueId val="{00000000-4752-CB43-8AF8-89F5BB97653F}"/>
+            </c:ext>
+          </c:extLst>
         </c:ser>
         <c:ser>
           <c:idx val="1"/>
@@ -4214,10 +3994,7 @@
             <c:v>CAUS</c:v>
           </c:tx>
           <c:spPr>
-            <a:solidFill xmlns:a="http://schemas.openxmlformats.org/drawingml/2006/main">
-              <a:srgbClr val="DC7F37"/>
-            </a:solidFill>
-            <a:ln xmlns:a="http://schemas.openxmlformats.org/drawingml/2006/main" w="23813">
+            <a:ln w="23813">
               <a:solidFill>
                 <a:srgbClr val="DC7F37"/>
               </a:solidFill>
@@ -4227,7 +4004,7 @@
             <c:symbol val="circle"/>
             <c:size val="3"/>
             <c:spPr>
-              <a:solidFill xmlns:a="http://schemas.openxmlformats.org/drawingml/2006/main">
+              <a:solidFill>
                 <a:srgbClr val="DC7F37"/>
               </a:solidFill>
             </c:spPr>
@@ -4236,10 +4013,7 @@
             <c:strRef>
               <c:f>'Chart Data'!$C$2:$C$2</c:f>
               <c:strCache>
-                <c:ptCount val="1"/>
-                <c:pt idx="0">
-                  <c:v>S01</c:v>
-                </c:pt>
+                <c:ptCount val="0"/>
               </c:strCache>
             </c:strRef>
           </c:cat>
@@ -4247,37 +4021,28 @@
             <c:numRef>
               <c:f>'Chart Data'!$D$2:$D$2</c:f>
               <c:numCache>
-                <c:formatCode>$#,##0</c:formatCode>
-                <c:ptCount val="1"/>
-                <c:pt idx="0">
-                  <c:v>0</c:v>
-                </c:pt>
+                <c:formatCode>#,##0</c:formatCode>
+                <c:ptCount val="0"/>
               </c:numCache>
             </c:numRef>
           </c:val>
+          <c:smooth val="1"/>
+          <c:extLst>
+            <c:ext xmlns:c16="http://schemas.microsoft.com/office/drawing/2014/chart" uri="{C3380CC4-5D6E-409C-BE32-E72D297353CC}">
+              <c16:uniqueId val="{00000001-4752-CB43-8AF8-89F5BB97653F}"/>
+            </c:ext>
+          </c:extLst>
         </c:ser>
         <c:dLbls>
-          <c:txPr>
-            <a:bodyPr xmlns:a="http://schemas.openxmlformats.org/drawingml/2006/main" anchorCtr="1"/>
-            <a:lstStyle xmlns:a="http://schemas.openxmlformats.org/drawingml/2006/main"/>
-            <a:p xmlns:a="http://schemas.openxmlformats.org/drawingml/2006/main">
-              <a:pPr>
-                <a:defRPr>
-                  <a:latin typeface="Calibri"/>
-                  <a:ea typeface="Calibri"/>
-                  <a:cs typeface="Calibri"/>
-                </a:defRPr>
-              </a:pPr>
-            </a:p>
-          </c:txPr>
           <c:showLegendKey val="0"/>
           <c:showVal val="0"/>
           <c:showCatName val="0"/>
           <c:showSerName val="0"/>
           <c:showPercent val="0"/>
           <c:showBubbleSize val="0"/>
-          <c:showLeaderLines val="0"/>
         </c:dLbls>
+        <c:marker val="1"/>
+        <c:smooth val="0"/>
         <c:axId val="48650112"/>
         <c:axId val="48672768"/>
       </c:lineChart>
@@ -4291,9 +4056,9 @@
         <c:title>
           <c:tx>
             <c:rich>
-              <a:bodyPr xmlns:a="http://schemas.openxmlformats.org/drawingml/2006/main"/>
-              <a:lstStyle xmlns:a="http://schemas.openxmlformats.org/drawingml/2006/main"/>
-              <a:p xmlns:a="http://schemas.openxmlformats.org/drawingml/2006/main">
+              <a:bodyPr/>
+              <a:lstStyle/>
+              <a:p>
                 <a:r>
                   <a:rPr>
                     <a:latin typeface="Calibri"/>
@@ -4306,25 +4071,13 @@
             </c:rich>
           </c:tx>
           <c:overlay val="0"/>
-          <c:txPr>
-            <a:bodyPr xmlns:a="http://schemas.openxmlformats.org/drawingml/2006/main" anchorCtr="1"/>
-            <a:lstStyle xmlns:a="http://schemas.openxmlformats.org/drawingml/2006/main"/>
-            <a:p xmlns:a="http://schemas.openxmlformats.org/drawingml/2006/main">
-              <a:pPr>
-                <a:defRPr>
-                  <a:latin typeface="Calibri"/>
-                  <a:ea typeface="Calibri"/>
-                  <a:cs typeface="Calibri"/>
-                </a:defRPr>
-              </a:pPr>
-            </a:p>
-          </c:txPr>
         </c:title>
-        <c:numFmt formatCode="General"/>
+        <c:numFmt formatCode="General" sourceLinked="1"/>
         <c:majorTickMark val="none"/>
         <c:minorTickMark val="none"/>
+        <c:tickLblPos val="nextTo"/>
         <c:spPr>
-          <a:ln xmlns:a="http://schemas.openxmlformats.org/drawingml/2006/main" w="9525">
+          <a:ln w="9525">
             <a:solidFill>
               <a:srgbClr val="D4D4D4"/>
             </a:solidFill>
@@ -4332,9 +4085,9 @@
           </a:ln>
         </c:spPr>
         <c:txPr>
-          <a:bodyPr xmlns:a="http://schemas.openxmlformats.org/drawingml/2006/main" anchorCtr="1"/>
-          <a:lstStyle xmlns:a="http://schemas.openxmlformats.org/drawingml/2006/main"/>
-          <a:p xmlns:a="http://schemas.openxmlformats.org/drawingml/2006/main">
+          <a:bodyPr anchorCtr="1"/>
+          <a:lstStyle/>
+          <a:p>
             <a:pPr>
               <a:defRPr sz="1125">
                 <a:solidFill>
@@ -4345,9 +4098,15 @@
                 <a:cs typeface="Calibri"/>
               </a:defRPr>
             </a:pPr>
+            <a:endParaRPr lang="en-MX"/>
           </a:p>
         </c:txPr>
         <c:crossAx val="48672768"/>
+        <c:crosses val="autoZero"/>
+        <c:auto val="1"/>
+        <c:lblAlgn val="ctr"/>
+        <c:lblOffset val="100"/>
+        <c:noMultiLvlLbl val="1"/>
       </c:catAx>
       <c:valAx>
         <c:axId val="48672768"/>
@@ -4358,18 +4117,19 @@
         <c:axPos val="l"/>
         <c:majorGridlines>
           <c:spPr>
-            <a:ln xmlns:a="http://schemas.openxmlformats.org/drawingml/2006/main" w="9525">
+            <a:ln w="9525">
               <a:solidFill>
                 <a:srgbClr val="DDDDDD"/>
               </a:solidFill>
             </a:ln>
           </c:spPr>
         </c:majorGridlines>
-        <c:numFmt formatCode="$#,##0"/>
+        <c:numFmt formatCode="\$#,##0" sourceLinked="1"/>
         <c:majorTickMark val="none"/>
         <c:minorTickMark val="none"/>
+        <c:tickLblPos val="nextTo"/>
         <c:spPr>
-          <a:ln xmlns:a="http://schemas.openxmlformats.org/drawingml/2006/main" w="9525">
+          <a:ln w="9525">
             <a:solidFill>
               <a:srgbClr val="D4D4D4"/>
             </a:solidFill>
@@ -4377,9 +4137,9 @@
           </a:ln>
         </c:spPr>
         <c:txPr>
-          <a:bodyPr xmlns:a="http://schemas.openxmlformats.org/drawingml/2006/main" anchorCtr="1"/>
-          <a:lstStyle xmlns:a="http://schemas.openxmlformats.org/drawingml/2006/main"/>
-          <a:p xmlns:a="http://schemas.openxmlformats.org/drawingml/2006/main">
+          <a:bodyPr anchorCtr="1"/>
+          <a:lstStyle/>
+          <a:p>
             <a:pPr>
               <a:defRPr sz="1200">
                 <a:solidFill>
@@ -4390,13 +4150,15 @@
                 <a:cs typeface="Calibri"/>
               </a:defRPr>
             </a:pPr>
+            <a:endParaRPr lang="en-MX"/>
           </a:p>
         </c:txPr>
         <c:crossAx val="48650112"/>
+        <c:crosses val="autoZero"/>
         <c:crossBetween val="between"/>
       </c:valAx>
       <c:spPr>
-        <a:solidFill xmlns:a="http://schemas.openxmlformats.org/drawingml/2006/main">
+        <a:solidFill>
           <a:srgbClr val="FFFFFF"/>
         </a:solidFill>
       </c:spPr>
@@ -4405,9 +4167,9 @@
       <c:legendPos val="b"/>
       <c:overlay val="0"/>
       <c:txPr>
-        <a:bodyPr xmlns:a="http://schemas.openxmlformats.org/drawingml/2006/main" anchorCtr="1"/>
-        <a:lstStyle xmlns:a="http://schemas.openxmlformats.org/drawingml/2006/main"/>
-        <a:p xmlns:a="http://schemas.openxmlformats.org/drawingml/2006/main">
+        <a:bodyPr anchorCtr="1"/>
+        <a:lstStyle/>
+        <a:p>
           <a:pPr>
             <a:defRPr sz="1350">
               <a:latin typeface="Calibri"/>
@@ -4415,33 +4177,38 @@
               <a:cs typeface="Calibri"/>
             </a:defRPr>
           </a:pPr>
+          <a:endParaRPr lang="en-MX"/>
         </a:p>
       </c:txPr>
     </c:legend>
     <c:plotVisOnly val="1"/>
     <c:dispBlanksAs val="gap"/>
+    <c:showDLblsOverMax val="1"/>
   </c:chart>
   <c:spPr>
-    <a:solidFill xmlns:a="http://schemas.openxmlformats.org/drawingml/2006/main">
+    <a:solidFill>
       <a:srgbClr val="FFFFFF"/>
     </a:solidFill>
   </c:spPr>
-  <c:externalData r:id="rIdChartSnapshot1">
+  <c:externalData r:id="rId1">
     <c:autoUpdate val="0"/>
   </c:externalData>
 </c:chartSpace>
 </file>
 
 <file path=ppt/slides/charts/chart4.xml><?xml version="1.0" encoding="utf-8"?>
-<c:chartSpace xmlns:c="http://schemas.openxmlformats.org/drawingml/2006/chart" xmlns:r="http://schemas.openxmlformats.org/officeDocument/2006/relationships">
+<c:chartSpace xmlns:c="http://schemas.openxmlformats.org/drawingml/2006/chart" xmlns:a="http://schemas.openxmlformats.org/drawingml/2006/main" xmlns:r="http://schemas.openxmlformats.org/officeDocument/2006/relationships" xmlns:c16r2="http://schemas.microsoft.com/office/drawing/2015/06/chart">
+  <c:date1904 val="1"/>
   <c:lang val="en-US"/>
+  <c:roundedCorners val="1"/>
+  <c:style val="2"/>
   <c:chart>
     <c:title>
       <c:tx>
         <c:rich>
-          <a:bodyPr xmlns:a="http://schemas.openxmlformats.org/drawingml/2006/main"/>
-          <a:lstStyle xmlns:a="http://schemas.openxmlformats.org/drawingml/2006/main"/>
-          <a:p xmlns:a="http://schemas.openxmlformats.org/drawingml/2006/main">
+          <a:bodyPr/>
+          <a:lstStyle/>
+          <a:p>
             <a:r>
               <a:rPr sz="1800" b="1">
                 <a:latin typeface="Calibri"/>
@@ -4454,21 +4221,10 @@
         </c:rich>
       </c:tx>
       <c:overlay val="0"/>
-      <c:txPr>
-        <a:bodyPr xmlns:a="http://schemas.openxmlformats.org/drawingml/2006/main" anchorCtr="1"/>
-        <a:lstStyle xmlns:a="http://schemas.openxmlformats.org/drawingml/2006/main"/>
-        <a:p xmlns:a="http://schemas.openxmlformats.org/drawingml/2006/main">
-          <a:pPr>
-            <a:defRPr sz="1800" b="1">
-              <a:latin typeface="Calibri"/>
-              <a:ea typeface="Calibri"/>
-              <a:cs typeface="Calibri"/>
-            </a:defRPr>
-          </a:pPr>
-        </a:p>
-      </c:txPr>
     </c:title>
+    <c:autoTitleDeleted val="0"/>
     <c:plotArea>
+      <c:layout/>
       <c:lineChart>
         <c:grouping val="standard"/>
         <c:varyColors val="0"/>
@@ -4479,10 +4235,7 @@
             <c:v>Año anterior</c:v>
           </c:tx>
           <c:spPr>
-            <a:solidFill xmlns:a="http://schemas.openxmlformats.org/drawingml/2006/main">
-              <a:srgbClr val="888888"/>
-            </a:solidFill>
-            <a:ln xmlns:a="http://schemas.openxmlformats.org/drawingml/2006/main" w="23813">
+            <a:ln w="23813">
               <a:solidFill>
                 <a:srgbClr val="888888"/>
               </a:solidFill>
@@ -4492,7 +4245,7 @@
             <c:symbol val="circle"/>
             <c:size val="3"/>
             <c:spPr>
-              <a:solidFill xmlns:a="http://schemas.openxmlformats.org/drawingml/2006/main">
+              <a:solidFill>
                 <a:srgbClr val="888888"/>
               </a:solidFill>
             </c:spPr>
@@ -4501,10 +4254,7 @@
             <c:strRef>
               <c:f>'Chart Data'!$A$2:$A$2</c:f>
               <c:strCache>
-                <c:ptCount val="1"/>
-                <c:pt idx="0">
-                  <c:v>S01</c:v>
-                </c:pt>
+                <c:ptCount val="0"/>
               </c:strCache>
             </c:strRef>
           </c:cat>
@@ -4513,13 +4263,16 @@
               <c:f>'Chart Data'!$B$2:$B$2</c:f>
               <c:numCache>
                 <c:formatCode>#,##0</c:formatCode>
-                <c:ptCount val="1"/>
-                <c:pt idx="0">
-                  <c:v>0</c:v>
-                </c:pt>
+                <c:ptCount val="0"/>
               </c:numCache>
             </c:numRef>
           </c:val>
+          <c:smooth val="1"/>
+          <c:extLst>
+            <c:ext xmlns:c16="http://schemas.microsoft.com/office/drawing/2014/chart" uri="{C3380CC4-5D6E-409C-BE32-E72D297353CC}">
+              <c16:uniqueId val="{00000000-05F5-1D46-9290-B0D7E3C7ED27}"/>
+            </c:ext>
+          </c:extLst>
         </c:ser>
         <c:ser>
           <c:idx val="1"/>
@@ -4528,10 +4281,7 @@
             <c:v>Año seleccionado</c:v>
           </c:tx>
           <c:spPr>
-            <a:solidFill xmlns:a="http://schemas.openxmlformats.org/drawingml/2006/main">
-              <a:srgbClr val="960E53"/>
-            </a:solidFill>
-            <a:ln xmlns:a="http://schemas.openxmlformats.org/drawingml/2006/main" w="23813">
+            <a:ln w="23813">
               <a:solidFill>
                 <a:srgbClr val="960E53"/>
               </a:solidFill>
@@ -4541,7 +4291,7 @@
             <c:symbol val="circle"/>
             <c:size val="3"/>
             <c:spPr>
-              <a:solidFill xmlns:a="http://schemas.openxmlformats.org/drawingml/2006/main">
+              <a:solidFill>
                 <a:srgbClr val="960E53"/>
               </a:solidFill>
             </c:spPr>
@@ -4550,10 +4300,7 @@
             <c:strRef>
               <c:f>'Chart Data'!$C$2:$C$2</c:f>
               <c:strCache>
-                <c:ptCount val="1"/>
-                <c:pt idx="0">
-                  <c:v>S01</c:v>
-                </c:pt>
+                <c:ptCount val="0"/>
               </c:strCache>
             </c:strRef>
           </c:cat>
@@ -4562,36 +4309,27 @@
               <c:f>'Chart Data'!$D$2:$D$2</c:f>
               <c:numCache>
                 <c:formatCode>#,##0</c:formatCode>
-                <c:ptCount val="1"/>
-                <c:pt idx="0">
-                  <c:v>0</c:v>
-                </c:pt>
+                <c:ptCount val="0"/>
               </c:numCache>
             </c:numRef>
           </c:val>
+          <c:smooth val="1"/>
+          <c:extLst>
+            <c:ext xmlns:c16="http://schemas.microsoft.com/office/drawing/2014/chart" uri="{C3380CC4-5D6E-409C-BE32-E72D297353CC}">
+              <c16:uniqueId val="{00000001-05F5-1D46-9290-B0D7E3C7ED27}"/>
+            </c:ext>
+          </c:extLst>
         </c:ser>
         <c:dLbls>
-          <c:txPr>
-            <a:bodyPr xmlns:a="http://schemas.openxmlformats.org/drawingml/2006/main" anchorCtr="1"/>
-            <a:lstStyle xmlns:a="http://schemas.openxmlformats.org/drawingml/2006/main"/>
-            <a:p xmlns:a="http://schemas.openxmlformats.org/drawingml/2006/main">
-              <a:pPr>
-                <a:defRPr>
-                  <a:latin typeface="Calibri"/>
-                  <a:ea typeface="Calibri"/>
-                  <a:cs typeface="Calibri"/>
-                </a:defRPr>
-              </a:pPr>
-            </a:p>
-          </c:txPr>
           <c:showLegendKey val="0"/>
           <c:showVal val="0"/>
           <c:showCatName val="0"/>
           <c:showSerName val="0"/>
           <c:showPercent val="0"/>
           <c:showBubbleSize val="0"/>
-          <c:showLeaderLines val="0"/>
         </c:dLbls>
+        <c:marker val="1"/>
+        <c:smooth val="0"/>
         <c:axId val="48650112"/>
         <c:axId val="48672768"/>
       </c:lineChart>
@@ -4605,9 +4343,9 @@
         <c:title>
           <c:tx>
             <c:rich>
-              <a:bodyPr xmlns:a="http://schemas.openxmlformats.org/drawingml/2006/main"/>
-              <a:lstStyle xmlns:a="http://schemas.openxmlformats.org/drawingml/2006/main"/>
-              <a:p xmlns:a="http://schemas.openxmlformats.org/drawingml/2006/main">
+              <a:bodyPr/>
+              <a:lstStyle/>
+              <a:p>
                 <a:r>
                   <a:rPr>
                     <a:latin typeface="Calibri"/>
@@ -4620,25 +4358,13 @@
             </c:rich>
           </c:tx>
           <c:overlay val="0"/>
-          <c:txPr>
-            <a:bodyPr xmlns:a="http://schemas.openxmlformats.org/drawingml/2006/main" anchorCtr="1"/>
-            <a:lstStyle xmlns:a="http://schemas.openxmlformats.org/drawingml/2006/main"/>
-            <a:p xmlns:a="http://schemas.openxmlformats.org/drawingml/2006/main">
-              <a:pPr>
-                <a:defRPr>
-                  <a:latin typeface="Calibri"/>
-                  <a:ea typeface="Calibri"/>
-                  <a:cs typeface="Calibri"/>
-                </a:defRPr>
-              </a:pPr>
-            </a:p>
-          </c:txPr>
         </c:title>
-        <c:numFmt formatCode="General"/>
+        <c:numFmt formatCode="General" sourceLinked="1"/>
         <c:majorTickMark val="none"/>
         <c:minorTickMark val="none"/>
+        <c:tickLblPos val="nextTo"/>
         <c:spPr>
-          <a:ln xmlns:a="http://schemas.openxmlformats.org/drawingml/2006/main" w="9525">
+          <a:ln w="9525">
             <a:solidFill>
               <a:srgbClr val="D4D4D4"/>
             </a:solidFill>
@@ -4646,9 +4372,9 @@
           </a:ln>
         </c:spPr>
         <c:txPr>
-          <a:bodyPr xmlns:a="http://schemas.openxmlformats.org/drawingml/2006/main" anchorCtr="1"/>
-          <a:lstStyle xmlns:a="http://schemas.openxmlformats.org/drawingml/2006/main"/>
-          <a:p xmlns:a="http://schemas.openxmlformats.org/drawingml/2006/main">
+          <a:bodyPr anchorCtr="1"/>
+          <a:lstStyle/>
+          <a:p>
             <a:pPr>
               <a:defRPr sz="1125">
                 <a:solidFill>
@@ -4659,9 +4385,15 @@
                 <a:cs typeface="Calibri"/>
               </a:defRPr>
             </a:pPr>
+            <a:endParaRPr lang="en-MX"/>
           </a:p>
         </c:txPr>
         <c:crossAx val="48672768"/>
+        <c:crosses val="autoZero"/>
+        <c:auto val="1"/>
+        <c:lblAlgn val="ctr"/>
+        <c:lblOffset val="100"/>
+        <c:noMultiLvlLbl val="1"/>
       </c:catAx>
       <c:valAx>
         <c:axId val="48672768"/>
@@ -4672,18 +4404,19 @@
         <c:axPos val="l"/>
         <c:majorGridlines>
           <c:spPr>
-            <a:ln xmlns:a="http://schemas.openxmlformats.org/drawingml/2006/main" w="9525">
+            <a:ln w="9525">
               <a:solidFill>
                 <a:srgbClr val="DDDDDD"/>
               </a:solidFill>
             </a:ln>
           </c:spPr>
         </c:majorGridlines>
-        <c:numFmt formatCode="#,##0"/>
+        <c:numFmt formatCode="#,##0" sourceLinked="1"/>
         <c:majorTickMark val="none"/>
         <c:minorTickMark val="none"/>
+        <c:tickLblPos val="nextTo"/>
         <c:spPr>
-          <a:ln xmlns:a="http://schemas.openxmlformats.org/drawingml/2006/main" w="9525">
+          <a:ln w="9525">
             <a:solidFill>
               <a:srgbClr val="D4D4D4"/>
             </a:solidFill>
@@ -4691,9 +4424,9 @@
           </a:ln>
         </c:spPr>
         <c:txPr>
-          <a:bodyPr xmlns:a="http://schemas.openxmlformats.org/drawingml/2006/main" anchorCtr="1"/>
-          <a:lstStyle xmlns:a="http://schemas.openxmlformats.org/drawingml/2006/main"/>
-          <a:p xmlns:a="http://schemas.openxmlformats.org/drawingml/2006/main">
+          <a:bodyPr anchorCtr="1"/>
+          <a:lstStyle/>
+          <a:p>
             <a:pPr>
               <a:defRPr sz="1200">
                 <a:solidFill>
@@ -4704,13 +4437,15 @@
                 <a:cs typeface="Calibri"/>
               </a:defRPr>
             </a:pPr>
+            <a:endParaRPr lang="en-MX"/>
           </a:p>
         </c:txPr>
         <c:crossAx val="48650112"/>
+        <c:crosses val="autoZero"/>
         <c:crossBetween val="between"/>
       </c:valAx>
       <c:spPr>
-        <a:solidFill xmlns:a="http://schemas.openxmlformats.org/drawingml/2006/main">
+        <a:solidFill>
           <a:srgbClr val="FFFFFF"/>
         </a:solidFill>
       </c:spPr>
@@ -4719,9 +4454,9 @@
       <c:legendPos val="b"/>
       <c:overlay val="0"/>
       <c:txPr>
-        <a:bodyPr xmlns:a="http://schemas.openxmlformats.org/drawingml/2006/main" anchorCtr="1"/>
-        <a:lstStyle xmlns:a="http://schemas.openxmlformats.org/drawingml/2006/main"/>
-        <a:p xmlns:a="http://schemas.openxmlformats.org/drawingml/2006/main">
+        <a:bodyPr anchorCtr="1"/>
+        <a:lstStyle/>
+        <a:p>
           <a:pPr>
             <a:defRPr sz="1350">
               <a:latin typeface="Calibri"/>
@@ -4729,25 +4464,27 @@
               <a:cs typeface="Calibri"/>
             </a:defRPr>
           </a:pPr>
+          <a:endParaRPr lang="en-MX"/>
         </a:p>
       </c:txPr>
     </c:legend>
     <c:plotVisOnly val="1"/>
     <c:dispBlanksAs val="gap"/>
+    <c:showDLblsOverMax val="1"/>
   </c:chart>
   <c:spPr>
-    <a:solidFill xmlns:a="http://schemas.openxmlformats.org/drawingml/2006/main">
+    <a:solidFill>
       <a:srgbClr val="FFFFFF"/>
     </a:solidFill>
   </c:spPr>
-  <c:externalData r:id="rIdChartSnapshot1">
+  <c:externalData r:id="rId1">
     <c:autoUpdate val="0"/>
   </c:externalData>
 </c:chartSpace>
 </file>
 
 <file path=ppt/slides/slide1.xml><?xml version="1.0" encoding="utf-8"?>
-<p:sld xmlns:p="http://schemas.openxmlformats.org/presentationml/2006/main">
+<p:sld xmlns:a="http://schemas.openxmlformats.org/drawingml/2006/main" xmlns:r="http://schemas.openxmlformats.org/officeDocument/2006/relationships" xmlns:p="http://schemas.openxmlformats.org/presentationml/2006/main">
   <p:cSld>
     <p:spTree>
       <p:nvGrpSpPr>
@@ -4756,41 +4493,46 @@
         <p:nvPr/>
       </p:nvGrpSpPr>
       <p:grpSpPr>
-        <a:xfrm xmlns:a="http://schemas.openxmlformats.org/drawingml/2006/main"/>
+        <a:xfrm>
+          <a:off x="0" y="0"/>
+          <a:ext cx="0" cy="0"/>
+          <a:chOff x="0" y="0"/>
+          <a:chExt cx="0" cy="0"/>
+        </a:xfrm>
       </p:grpSpPr>
       <p:sp>
         <p:nvSpPr>
           <p:cNvPr id="94" name="Rectángulo 3">
-            <a:extLst xmlns:a="http://schemas.openxmlformats.org/drawingml/2006/main">
+            <a:extLst>
               <a:ext uri="{FF2B5EF4-FFF2-40B4-BE49-F238E27FC236}">
                 <a16:creationId xmlns:a16="http://schemas.microsoft.com/office/drawing/2014/main" id="{1B4F9254-05B7-4D35-AB23-39EA54E7D188}"/>
               </a:ext>
             </a:extLst>
           </p:cNvPr>
           <p:cNvSpPr>
-            <a:spLocks xmlns:a="http://schemas.openxmlformats.org/drawingml/2006/main" noGrp="1"/>
+            <a:spLocks noGrp="1"/>
           </p:cNvSpPr>
           <p:nvPr/>
         </p:nvSpPr>
         <p:spPr>
-          <a:xfrm xmlns:a="http://schemas.openxmlformats.org/drawingml/2006/main">
+          <a:xfrm>
             <a:off x="0" y="0"/>
             <a:ext cx="3079102" cy="6858000"/>
           </a:xfrm>
-          <a:prstGeom xmlns:a="http://schemas.openxmlformats.org/drawingml/2006/main" prst="rect">
+          <a:prstGeom prst="rect">
             <a:avLst/>
           </a:prstGeom>
-          <a:solidFill xmlns:a="http://schemas.openxmlformats.org/drawingml/2006/main">
+          <a:solidFill>
             <a:srgbClr val="960E53"/>
           </a:solidFill>
-          <a:ln xmlns:a="http://schemas.openxmlformats.org/drawingml/2006/main" w="12700">
+          <a:ln w="12700">
             <a:miter/>
           </a:ln>
         </p:spPr>
         <p:txBody>
-          <a:bodyPr xmlns:a="http://schemas.openxmlformats.org/drawingml/2006/main" lIns="45719" rIns="45719" anchor="ctr"/>
-          <a:lstStyle xmlns:a="http://schemas.openxmlformats.org/drawingml/2006/main"/>
-          <a:p xmlns:a="http://schemas.openxmlformats.org/drawingml/2006/main">
+          <a:bodyPr lIns="45719" rIns="45719" anchor="ctr"/>
+          <a:lstStyle/>
+          <a:p>
             <a:pPr algn="ctr">
               <a:buNone/>
               <a:defRPr>
@@ -4806,32 +4548,32 @@
       <p:pic>
         <p:nvPicPr>
           <p:cNvPr id="95" name="Imagen 5">
-            <a:extLst xmlns:a="http://schemas.openxmlformats.org/drawingml/2006/main">
+            <a:extLst>
               <a:ext uri="{FF2B5EF4-FFF2-40B4-BE49-F238E27FC236}">
                 <a16:creationId xmlns:a16="http://schemas.microsoft.com/office/drawing/2014/main" id="{26D21E0A-E646-4DE7-B907-E8FC36E5EE91}"/>
               </a:ext>
             </a:extLst>
           </p:cNvPr>
           <p:cNvPicPr>
-            <a:picLocks xmlns:a="http://schemas.openxmlformats.org/drawingml/2006/main" noChangeAspect="1"/>
+            <a:picLocks noChangeAspect="1"/>
           </p:cNvPicPr>
           <p:nvPr/>
         </p:nvPicPr>
         <p:blipFill>
-          <a:blip xmlns:r="http://schemas.openxmlformats.org/officeDocument/2006/relationships" xmlns:a="http://schemas.openxmlformats.org/drawingml/2006/main" r:embed="Refd609ce78ae41ca"/>
-          <a:stretch xmlns:a="http://schemas.openxmlformats.org/drawingml/2006/main">
-            <a:fillRect l="0" t="0" r="0" b="0"/>
+          <a:blip r:embed="rId3"/>
+          <a:stretch>
+            <a:fillRect/>
           </a:stretch>
         </p:blipFill>
         <p:spPr>
-          <a:xfrm xmlns:a="http://schemas.openxmlformats.org/drawingml/2006/main">
+          <a:xfrm>
             <a:off x="216392" y="357066"/>
             <a:ext cx="2675010" cy="1070519"/>
           </a:xfrm>
-          <a:prstGeom xmlns:a="http://schemas.openxmlformats.org/drawingml/2006/main" prst="rect">
+          <a:prstGeom prst="rect">
             <a:avLst/>
           </a:prstGeom>
-          <a:ln xmlns:a="http://schemas.openxmlformats.org/drawingml/2006/main" w="12700">
+          <a:ln w="12700">
             <a:miter/>
           </a:ln>
         </p:spPr>
@@ -4839,36 +4581,36 @@
       <p:sp>
         <p:nvSpPr>
           <p:cNvPr id="96" name="Rectángulo 6">
-            <a:extLst xmlns:a="http://schemas.openxmlformats.org/drawingml/2006/main">
+            <a:extLst>
               <a:ext uri="{FF2B5EF4-FFF2-40B4-BE49-F238E27FC236}">
                 <a16:creationId xmlns:a16="http://schemas.microsoft.com/office/drawing/2014/main" id="{89D18CD8-5B89-443B-AAA2-A6DCFD17151B}"/>
               </a:ext>
             </a:extLst>
           </p:cNvPr>
           <p:cNvSpPr>
-            <a:spLocks xmlns:a="http://schemas.openxmlformats.org/drawingml/2006/main" noGrp="1"/>
+            <a:spLocks noGrp="1"/>
           </p:cNvSpPr>
           <p:nvPr/>
         </p:nvSpPr>
         <p:spPr>
-          <a:xfrm xmlns:a="http://schemas.openxmlformats.org/drawingml/2006/main">
+          <a:xfrm>
             <a:off x="3034019" y="0"/>
             <a:ext cx="138396" cy="6858000"/>
           </a:xfrm>
-          <a:prstGeom xmlns:a="http://schemas.openxmlformats.org/drawingml/2006/main" prst="rect">
+          <a:prstGeom prst="rect">
             <a:avLst/>
           </a:prstGeom>
-          <a:solidFill xmlns:a="http://schemas.openxmlformats.org/drawingml/2006/main">
+          <a:solidFill>
             <a:srgbClr val="DC7F37"/>
           </a:solidFill>
-          <a:ln xmlns:a="http://schemas.openxmlformats.org/drawingml/2006/main" w="12700">
+          <a:ln w="12700">
             <a:miter/>
           </a:ln>
         </p:spPr>
         <p:txBody>
-          <a:bodyPr xmlns:a="http://schemas.openxmlformats.org/drawingml/2006/main" lIns="45719" rIns="45719" anchor="ctr"/>
-          <a:lstStyle xmlns:a="http://schemas.openxmlformats.org/drawingml/2006/main"/>
-          <a:p xmlns:a="http://schemas.openxmlformats.org/drawingml/2006/main">
+          <a:bodyPr lIns="45719" rIns="45719" anchor="ctr"/>
+          <a:lstStyle/>
+          <a:p>
             <a:pPr algn="ctr">
               <a:buNone/>
               <a:defRPr>
@@ -4884,32 +4626,32 @@
       <p:pic>
         <p:nvPicPr>
           <p:cNvPr id="97" name="Imagen 8">
-            <a:extLst xmlns:a="http://schemas.openxmlformats.org/drawingml/2006/main">
+            <a:extLst>
               <a:ext uri="{FF2B5EF4-FFF2-40B4-BE49-F238E27FC236}">
                 <a16:creationId xmlns:a16="http://schemas.microsoft.com/office/drawing/2014/main" id="{60769C1C-06EE-47D2-8675-69E651738341}"/>
               </a:ext>
             </a:extLst>
           </p:cNvPr>
           <p:cNvPicPr>
-            <a:picLocks xmlns:a="http://schemas.openxmlformats.org/drawingml/2006/main" noChangeAspect="1"/>
+            <a:picLocks noChangeAspect="1"/>
           </p:cNvPicPr>
           <p:nvPr/>
         </p:nvPicPr>
         <p:blipFill>
-          <a:blip xmlns:r="http://schemas.openxmlformats.org/officeDocument/2006/relationships" xmlns:a="http://schemas.openxmlformats.org/drawingml/2006/main" r:embed="R155045276cc94131"/>
-          <a:stretch xmlns:a="http://schemas.openxmlformats.org/drawingml/2006/main">
-            <a:fillRect l="0" t="0" r="0" b="0"/>
+          <a:blip r:embed="rId4"/>
+          <a:stretch>
+            <a:fillRect/>
           </a:stretch>
         </p:blipFill>
         <p:spPr>
-          <a:xfrm xmlns:a="http://schemas.openxmlformats.org/drawingml/2006/main" rot="16200000">
+          <a:xfrm rot="16200000">
             <a:off x="8495324" y="2639986"/>
             <a:ext cx="6510030" cy="1578025"/>
           </a:xfrm>
-          <a:prstGeom xmlns:a="http://schemas.openxmlformats.org/drawingml/2006/main" prst="rect">
+          <a:prstGeom prst="rect">
             <a:avLst/>
           </a:prstGeom>
-          <a:ln xmlns:a="http://schemas.openxmlformats.org/drawingml/2006/main" w="12700">
+          <a:ln w="12700">
             <a:miter/>
           </a:ln>
         </p:spPr>
@@ -4917,34 +4659,34 @@
       <p:sp>
         <p:nvSpPr>
           <p:cNvPr id="98" name="CuadroTexto 9">
-            <a:extLst xmlns:a="http://schemas.openxmlformats.org/drawingml/2006/main">
+            <a:extLst>
               <a:ext uri="{FF2B5EF4-FFF2-40B4-BE49-F238E27FC236}">
                 <a16:creationId xmlns:a16="http://schemas.microsoft.com/office/drawing/2014/main" id="{72822168-0327-427A-AB8F-A2D29852B68C}"/>
               </a:ext>
             </a:extLst>
           </p:cNvPr>
           <p:cNvSpPr>
-            <a:spLocks xmlns:a="http://schemas.openxmlformats.org/drawingml/2006/main" noGrp="1"/>
+            <a:spLocks noGrp="1"/>
           </p:cNvSpPr>
           <p:nvPr/>
         </p:nvSpPr>
         <p:spPr>
-          <a:xfrm xmlns:a="http://schemas.openxmlformats.org/drawingml/2006/main">
+          <a:xfrm>
             <a:off x="3221719" y="2144102"/>
             <a:ext cx="8549867" cy="707886"/>
           </a:xfrm>
-          <a:prstGeom xmlns:a="http://schemas.openxmlformats.org/drawingml/2006/main" prst="rect">
+          <a:prstGeom prst="rect">
             <a:avLst/>
           </a:prstGeom>
-          <a:ln xmlns:a="http://schemas.openxmlformats.org/drawingml/2006/main" w="12700">
+          <a:ln w="12700">
             <a:miter/>
           </a:ln>
         </p:spPr>
         <p:txBody>
-          <a:bodyPr xmlns:a="http://schemas.openxmlformats.org/drawingml/2006/main" wrap="square" lIns="45719" rIns="45719">
+          <a:bodyPr wrap="square" lIns="45719" rIns="45719">
             <a:spAutoFit/>
           </a:bodyPr>
-          <a:lstStyle xmlns:a="http://schemas.openxmlformats.org/drawingml/2006/main">
+          <a:lstStyle>
             <a:lvl1pPr algn="ctr">
               <a:buNone/>
               <a:defRPr sz="4000">
@@ -4957,45 +4699,44 @@
               </a:defRPr>
             </a:lvl1pPr>
           </a:lstStyle>
-          <a:p xmlns:a="http://schemas.openxmlformats.org/drawingml/2006/main">
+          <a:p>
             <a:r>
               <a:t>Reporte de Credencialización</a:t>
             </a:r>
-            <a:endParaRPr/>
           </a:p>
         </p:txBody>
       </p:sp>
       <p:sp>
         <p:nvSpPr>
           <p:cNvPr id="99" name="CuadroTexto 10">
-            <a:extLst xmlns:a="http://schemas.openxmlformats.org/drawingml/2006/main">
+            <a:extLst>
               <a:ext uri="{FF2B5EF4-FFF2-40B4-BE49-F238E27FC236}">
                 <a16:creationId xmlns:a16="http://schemas.microsoft.com/office/drawing/2014/main" id="{70F98EF6-82A6-4888-B6BF-B0C044FF26DF}"/>
               </a:ext>
             </a:extLst>
           </p:cNvPr>
           <p:cNvSpPr>
-            <a:spLocks xmlns:a="http://schemas.openxmlformats.org/drawingml/2006/main" noGrp="1"/>
+            <a:spLocks noGrp="1"/>
           </p:cNvSpPr>
           <p:nvPr/>
         </p:nvSpPr>
         <p:spPr>
-          <a:xfrm xmlns:a="http://schemas.openxmlformats.org/drawingml/2006/main">
+          <a:xfrm>
             <a:off x="4631767" y="4198877"/>
             <a:ext cx="5980647" cy="548640"/>
           </a:xfrm>
-          <a:prstGeom xmlns:a="http://schemas.openxmlformats.org/drawingml/2006/main" prst="rect">
+          <a:prstGeom prst="rect">
             <a:avLst/>
           </a:prstGeom>
-          <a:ln xmlns:a="http://schemas.openxmlformats.org/drawingml/2006/main" w="12700">
+          <a:ln w="12700">
             <a:miter/>
           </a:ln>
         </p:spPr>
         <p:txBody>
-          <a:bodyPr xmlns:a="http://schemas.openxmlformats.org/drawingml/2006/main" lIns="45719" rIns="45719">
+          <a:bodyPr lIns="45719" rIns="45719">
             <a:spAutoFit/>
           </a:bodyPr>
-          <a:lstStyle xmlns:a="http://schemas.openxmlformats.org/drawingml/2006/main">
+          <a:lstStyle>
             <a:lvl1pPr algn="ctr">
               <a:buNone/>
               <a:defRPr sz="3000">
@@ -5008,7 +4749,7 @@
               </a:defRPr>
             </a:lvl1pPr>
           </a:lstStyle>
-          <a:p xmlns:a="http://schemas.openxmlformats.org/drawingml/2006/main">
+          <a:p>
             <a:r>
               <a:t>{{PERIOD}}</a:t>
             </a:r>
@@ -5018,34 +4759,34 @@
       <p:sp>
         <p:nvSpPr>
           <p:cNvPr id="100" name="CuadroTexto 11">
-            <a:extLst xmlns:a="http://schemas.openxmlformats.org/drawingml/2006/main">
+            <a:extLst>
               <a:ext uri="{FF2B5EF4-FFF2-40B4-BE49-F238E27FC236}">
                 <a16:creationId xmlns:a16="http://schemas.microsoft.com/office/drawing/2014/main" id="{58AB9590-6BAA-4BEE-8A58-2DEAEB705397}"/>
               </a:ext>
             </a:extLst>
           </p:cNvPr>
           <p:cNvSpPr>
-            <a:spLocks xmlns:a="http://schemas.openxmlformats.org/drawingml/2006/main" noGrp="1"/>
+            <a:spLocks noGrp="1"/>
           </p:cNvSpPr>
           <p:nvPr/>
         </p:nvSpPr>
         <p:spPr>
-          <a:xfrm xmlns:a="http://schemas.openxmlformats.org/drawingml/2006/main">
+          <a:xfrm>
             <a:off x="5634756" y="6335288"/>
             <a:ext cx="5252858" cy="320040"/>
           </a:xfrm>
-          <a:prstGeom xmlns:a="http://schemas.openxmlformats.org/drawingml/2006/main" prst="rect">
+          <a:prstGeom prst="rect">
             <a:avLst/>
           </a:prstGeom>
-          <a:ln xmlns:a="http://schemas.openxmlformats.org/drawingml/2006/main" w="12700">
+          <a:ln w="12700">
             <a:miter/>
           </a:ln>
         </p:spPr>
         <p:txBody>
-          <a:bodyPr xmlns:a="http://schemas.openxmlformats.org/drawingml/2006/main" lIns="45719" rIns="45719">
+          <a:bodyPr lIns="45719" rIns="45719">
             <a:spAutoFit/>
           </a:bodyPr>
-          <a:lstStyle xmlns:a="http://schemas.openxmlformats.org/drawingml/2006/main">
+          <a:lstStyle>
             <a:lvl1pPr algn="r">
               <a:buNone/>
               <a:defRPr sz="1500">
@@ -5058,7 +4799,7 @@
               </a:defRPr>
             </a:lvl1pPr>
           </a:lstStyle>
-          <a:p xmlns:a="http://schemas.openxmlformats.org/drawingml/2006/main">
+          <a:p>
             <a:r>
               <a:t>{{CUTOFF}}</a:t>
             </a:r>
@@ -5068,32 +4809,32 @@
       <p:pic>
         <p:nvPicPr>
           <p:cNvPr id="101" name="Imagen 13">
-            <a:extLst xmlns:a="http://schemas.openxmlformats.org/drawingml/2006/main">
+            <a:extLst>
               <a:ext uri="{FF2B5EF4-FFF2-40B4-BE49-F238E27FC236}">
                 <a16:creationId xmlns:a16="http://schemas.microsoft.com/office/drawing/2014/main" id="{7A3A8508-9B79-4ABD-A2A8-DDD8CA10E392}"/>
               </a:ext>
             </a:extLst>
           </p:cNvPr>
           <p:cNvPicPr>
-            <a:picLocks xmlns:a="http://schemas.openxmlformats.org/drawingml/2006/main" noChangeAspect="1"/>
+            <a:picLocks noChangeAspect="1"/>
           </p:cNvPicPr>
           <p:nvPr/>
         </p:nvPicPr>
         <p:blipFill>
-          <a:blip xmlns:r="http://schemas.openxmlformats.org/officeDocument/2006/relationships" xmlns:a="http://schemas.openxmlformats.org/drawingml/2006/main" r:embed="R634e8b621c5d49b0"/>
-          <a:stretch xmlns:a="http://schemas.openxmlformats.org/drawingml/2006/main">
-            <a:fillRect l="0" t="0" r="0" b="0"/>
+          <a:blip r:embed="rId5"/>
+          <a:stretch>
+            <a:fillRect/>
           </a:stretch>
         </p:blipFill>
         <p:spPr>
-          <a:xfrm xmlns:a="http://schemas.openxmlformats.org/drawingml/2006/main">
+          <a:xfrm>
             <a:off x="793993" y="5971599"/>
             <a:ext cx="1446035" cy="727379"/>
           </a:xfrm>
-          <a:prstGeom xmlns:a="http://schemas.openxmlformats.org/drawingml/2006/main" prst="rect">
+          <a:prstGeom prst="rect">
             <a:avLst/>
           </a:prstGeom>
-          <a:ln xmlns:a="http://schemas.openxmlformats.org/drawingml/2006/main" w="12700">
+          <a:ln w="12700">
             <a:miter/>
           </a:ln>
         </p:spPr>
@@ -5105,17 +4846,21 @@
       </p:ext>
     </p:extLst>
   </p:cSld>
+  <p:clrMapOvr>
+    <a:masterClrMapping/>
+  </p:clrMapOvr>
 </p:sld>
 </file>
 
 <file path=ppt/slides/slide2.xml><?xml version="1.0" encoding="utf-8"?>
-<p:sld xmlns:p="http://schemas.openxmlformats.org/presentationml/2006/main">
+<p:sld xmlns:a="http://schemas.openxmlformats.org/drawingml/2006/main" xmlns:r="http://schemas.openxmlformats.org/officeDocument/2006/relationships" xmlns:p="http://schemas.openxmlformats.org/presentationml/2006/main">
   <p:cSld>
     <p:bg>
       <p:bgPr>
-        <a:solidFill xmlns:a="http://schemas.openxmlformats.org/drawingml/2006/main">
+        <a:solidFill>
           <a:srgbClr val="D9D9D9"/>
         </a:solidFill>
+        <a:effectLst/>
       </p:bgPr>
     </p:bg>
     <p:spTree>
@@ -5125,41 +4870,46 @@
         <p:nvPr/>
       </p:nvGrpSpPr>
       <p:grpSpPr>
-        <a:xfrm xmlns:a="http://schemas.openxmlformats.org/drawingml/2006/main"/>
+        <a:xfrm>
+          <a:off x="0" y="0"/>
+          <a:ext cx="0" cy="0"/>
+          <a:chOff x="0" y="0"/>
+          <a:chExt cx="0" cy="0"/>
+        </a:xfrm>
       </p:grpSpPr>
       <p:sp>
         <p:nvSpPr>
           <p:cNvPr id="103" name="Rectángulo 6">
-            <a:extLst xmlns:a="http://schemas.openxmlformats.org/drawingml/2006/main">
+            <a:extLst>
               <a:ext uri="{FF2B5EF4-FFF2-40B4-BE49-F238E27FC236}">
                 <a16:creationId xmlns:a16="http://schemas.microsoft.com/office/drawing/2014/main" id="{75499319-7AD1-61AF-66DD-ACE59674D47E}"/>
               </a:ext>
             </a:extLst>
           </p:cNvPr>
           <p:cNvSpPr>
-            <a:spLocks xmlns:a="http://schemas.openxmlformats.org/drawingml/2006/main" noGrp="1"/>
+            <a:spLocks noGrp="1"/>
           </p:cNvSpPr>
           <p:nvPr/>
         </p:nvSpPr>
         <p:spPr>
-          <a:xfrm xmlns:a="http://schemas.openxmlformats.org/drawingml/2006/main" rot="16201099">
+          <a:xfrm rot="16201099">
             <a:off x="5627744" y="-4787258"/>
             <a:ext cx="128582" cy="11460279"/>
           </a:xfrm>
-          <a:prstGeom xmlns:a="http://schemas.openxmlformats.org/drawingml/2006/main" prst="rect">
+          <a:prstGeom prst="rect">
             <a:avLst/>
           </a:prstGeom>
-          <a:solidFill xmlns:a="http://schemas.openxmlformats.org/drawingml/2006/main">
+          <a:solidFill>
             <a:srgbClr val="DC7F37"/>
           </a:solidFill>
-          <a:ln xmlns:a="http://schemas.openxmlformats.org/drawingml/2006/main" w="12700">
+          <a:ln w="12700">
             <a:miter/>
           </a:ln>
         </p:spPr>
         <p:txBody>
-          <a:bodyPr xmlns:a="http://schemas.openxmlformats.org/drawingml/2006/main" lIns="45719" rIns="45719" anchor="ctr"/>
-          <a:lstStyle xmlns:a="http://schemas.openxmlformats.org/drawingml/2006/main"/>
-          <a:p xmlns:a="http://schemas.openxmlformats.org/drawingml/2006/main">
+          <a:bodyPr lIns="45719" rIns="45719" anchor="ctr"/>
+          <a:lstStyle/>
+          <a:p>
             <a:pPr algn="ctr">
               <a:buNone/>
               <a:defRPr>
@@ -5175,36 +4925,36 @@
       <p:sp>
         <p:nvSpPr>
           <p:cNvPr id="104" name="Rectángulo 3">
-            <a:extLst xmlns:a="http://schemas.openxmlformats.org/drawingml/2006/main">
+            <a:extLst>
               <a:ext uri="{FF2B5EF4-FFF2-40B4-BE49-F238E27FC236}">
                 <a16:creationId xmlns:a16="http://schemas.microsoft.com/office/drawing/2014/main" id="{A36C94B2-3AE2-AC32-A990-F29DDA70C8FB}"/>
               </a:ext>
             </a:extLst>
           </p:cNvPr>
           <p:cNvSpPr>
-            <a:spLocks xmlns:a="http://schemas.openxmlformats.org/drawingml/2006/main" noGrp="1"/>
+            <a:spLocks noGrp="1"/>
           </p:cNvSpPr>
           <p:nvPr/>
         </p:nvSpPr>
         <p:spPr>
-          <a:xfrm xmlns:a="http://schemas.openxmlformats.org/drawingml/2006/main">
+          <a:xfrm>
             <a:off x="0" y="0"/>
             <a:ext cx="2428853" cy="883564"/>
           </a:xfrm>
-          <a:prstGeom xmlns:a="http://schemas.openxmlformats.org/drawingml/2006/main" prst="rect">
+          <a:prstGeom prst="rect">
             <a:avLst/>
           </a:prstGeom>
-          <a:solidFill xmlns:a="http://schemas.openxmlformats.org/drawingml/2006/main">
+          <a:solidFill>
             <a:srgbClr val="960E53"/>
           </a:solidFill>
-          <a:ln xmlns:a="http://schemas.openxmlformats.org/drawingml/2006/main" w="12700">
+          <a:ln w="12700">
             <a:miter/>
           </a:ln>
         </p:spPr>
         <p:txBody>
-          <a:bodyPr xmlns:a="http://schemas.openxmlformats.org/drawingml/2006/main" lIns="45719" rIns="45719" anchor="ctr"/>
-          <a:lstStyle xmlns:a="http://schemas.openxmlformats.org/drawingml/2006/main"/>
-          <a:p xmlns:a="http://schemas.openxmlformats.org/drawingml/2006/main">
+          <a:bodyPr lIns="45719" rIns="45719" anchor="ctr"/>
+          <a:lstStyle/>
+          <a:p>
             <a:pPr algn="ctr">
               <a:buNone/>
               <a:defRPr>
@@ -5220,32 +4970,32 @@
       <p:pic>
         <p:nvPicPr>
           <p:cNvPr id="105" name="Imagen 5">
-            <a:extLst xmlns:a="http://schemas.openxmlformats.org/drawingml/2006/main">
+            <a:extLst>
               <a:ext uri="{FF2B5EF4-FFF2-40B4-BE49-F238E27FC236}">
                 <a16:creationId xmlns:a16="http://schemas.microsoft.com/office/drawing/2014/main" id="{505E44B9-379A-4135-BAA0-E1911B6CF64B}"/>
               </a:ext>
             </a:extLst>
           </p:cNvPr>
           <p:cNvPicPr>
-            <a:picLocks xmlns:a="http://schemas.openxmlformats.org/drawingml/2006/main" noChangeAspect="1"/>
+            <a:picLocks noChangeAspect="1"/>
           </p:cNvPicPr>
           <p:nvPr/>
         </p:nvPicPr>
         <p:blipFill>
-          <a:blip xmlns:r="http://schemas.openxmlformats.org/officeDocument/2006/relationships" xmlns:a="http://schemas.openxmlformats.org/drawingml/2006/main" r:embed="Rdc7452e21da4452d"/>
-          <a:stretch xmlns:a="http://schemas.openxmlformats.org/drawingml/2006/main">
-            <a:fillRect l="0" t="0" r="0" b="0"/>
+          <a:blip r:embed="rId3"/>
+          <a:stretch>
+            <a:fillRect/>
           </a:stretch>
         </p:blipFill>
         <p:spPr>
-          <a:xfrm xmlns:a="http://schemas.openxmlformats.org/drawingml/2006/main">
+          <a:xfrm>
             <a:off x="232696" y="48901"/>
             <a:ext cx="1963460" cy="785761"/>
           </a:xfrm>
-          <a:prstGeom xmlns:a="http://schemas.openxmlformats.org/drawingml/2006/main" prst="rect">
+          <a:prstGeom prst="rect">
             <a:avLst/>
           </a:prstGeom>
-          <a:ln xmlns:a="http://schemas.openxmlformats.org/drawingml/2006/main" w="12700">
+          <a:ln w="12700">
             <a:miter/>
           </a:ln>
         </p:spPr>
@@ -5253,34 +5003,34 @@
       <p:sp>
         <p:nvSpPr>
           <p:cNvPr id="2" name="CuadroTexto 10">
-            <a:extLst xmlns:a="http://schemas.openxmlformats.org/drawingml/2006/main">
+            <a:extLst>
               <a:ext uri="{FF2B5EF4-FFF2-40B4-BE49-F238E27FC236}">
                 <a16:creationId xmlns:a16="http://schemas.microsoft.com/office/drawing/2014/main" id="{95C63249-A803-806B-904B-E14A25513F23}"/>
               </a:ext>
             </a:extLst>
           </p:cNvPr>
           <p:cNvSpPr>
-            <a:spLocks xmlns:a="http://schemas.openxmlformats.org/drawingml/2006/main" noGrp="1"/>
+            <a:spLocks noGrp="1"/>
           </p:cNvSpPr>
           <p:nvPr/>
         </p:nvSpPr>
         <p:spPr>
-          <a:xfrm xmlns:a="http://schemas.openxmlformats.org/drawingml/2006/main">
+          <a:xfrm>
             <a:off x="2634906" y="164719"/>
             <a:ext cx="8993342" cy="492443"/>
           </a:xfrm>
-          <a:prstGeom xmlns:a="http://schemas.openxmlformats.org/drawingml/2006/main" prst="rect">
+          <a:prstGeom prst="rect">
             <a:avLst/>
           </a:prstGeom>
-          <a:ln xmlns:a="http://schemas.openxmlformats.org/drawingml/2006/main" w="12700">
+          <a:ln w="12700">
             <a:miter/>
           </a:ln>
         </p:spPr>
         <p:txBody>
-          <a:bodyPr xmlns:a="http://schemas.openxmlformats.org/drawingml/2006/main" wrap="square" lIns="45719" rIns="45719">
+          <a:bodyPr wrap="square" lIns="45719" rIns="45719">
             <a:spAutoFit/>
           </a:bodyPr>
-          <a:lstStyle xmlns:a="http://schemas.openxmlformats.org/drawingml/2006/main">
+          <a:lstStyle>
             <a:lvl1pPr algn="ctr">
               <a:buNone/>
               <a:defRPr sz="3000">
@@ -5293,7 +5043,7 @@
               </a:defRPr>
             </a:lvl1pPr>
           </a:lstStyle>
-          <a:p xmlns:a="http://schemas.openxmlformats.org/drawingml/2006/main">
+          <a:p>
             <a:pPr algn="l">
               <a:buNone/>
             </a:pPr>
@@ -5314,46 +5064,52 @@
       <p:sp>
         <p:nvSpPr>
           <p:cNvPr id="4" name="Rectángulo redondeado 72">
-            <a:extLst xmlns:a="http://schemas.openxmlformats.org/drawingml/2006/main">
+            <a:extLst>
               <a:ext uri="{FF2B5EF4-FFF2-40B4-BE49-F238E27FC236}">
                 <a16:creationId xmlns:a16="http://schemas.microsoft.com/office/drawing/2014/main" id="{88A39611-C458-B727-24FA-4FE808FF89A5}"/>
               </a:ext>
             </a:extLst>
           </p:cNvPr>
           <p:cNvSpPr>
-            <a:spLocks xmlns:a="http://schemas.openxmlformats.org/drawingml/2006/main" noGrp="1"/>
+            <a:spLocks noGrp="1"/>
           </p:cNvSpPr>
           <p:nvPr/>
         </p:nvSpPr>
         <p:spPr>
-          <a:xfrm xmlns:a="http://schemas.openxmlformats.org/drawingml/2006/main" rot="0" flipH="0" flipV="0">
+          <a:xfrm>
             <a:off x="261072" y="1137185"/>
             <a:ext cx="356313" cy="360000"/>
           </a:xfrm>
-          <a:prstGeom xmlns:a="http://schemas.openxmlformats.org/drawingml/2006/main" prst="roundRect">
+          <a:prstGeom prst="roundRect">
             <a:avLst/>
           </a:prstGeom>
-          <a:solidFill xmlns:a="http://schemas.openxmlformats.org/drawingml/2006/main">
+          <a:solidFill>
             <a:srgbClr val="960E53"/>
           </a:solidFill>
-          <a:ln xmlns:a="http://schemas.openxmlformats.org/drawingml/2006/main" w="12700" cap="flat">
+          <a:ln w="12700" cap="flat">
             <a:noFill/>
             <a:prstDash val="solid"/>
             <a:miter/>
           </a:ln>
         </p:spPr>
         <p:style>
-          <a:lnRef xmlns:a="http://schemas.openxmlformats.org/drawingml/2006/main" idx="0"/>
-          <a:fillRef xmlns:a="http://schemas.openxmlformats.org/drawingml/2006/main" idx="0"/>
-          <a:effectRef xmlns:a="http://schemas.openxmlformats.org/drawingml/2006/main" idx="0"/>
-          <a:fontRef xmlns:a="http://schemas.openxmlformats.org/drawingml/2006/main"/>
+          <a:lnRef idx="0">
+            <a:scrgbClr r="0" g="0" b="0"/>
+          </a:lnRef>
+          <a:fillRef idx="0">
+            <a:scrgbClr r="0" g="0" b="0"/>
+          </a:fillRef>
+          <a:effectRef idx="0">
+            <a:scrgbClr r="0" g="0" b="0"/>
+          </a:effectRef>
+          <a:fontRef idx="major"/>
         </p:style>
         <p:txBody>
-          <a:bodyPr xmlns:a="http://schemas.openxmlformats.org/drawingml/2006/main" rot="0" spcFirstLastPara="1" vert="horz" wrap="square" lIns="45719" tIns="45719" rIns="45719" bIns="45719" anchor="ctr">
+          <a:bodyPr rot="0" spcFirstLastPara="1" vert="horz" wrap="square" lIns="45719" tIns="45719" rIns="45719" bIns="45719" anchor="ctr">
             <a:spAutoFit/>
           </a:bodyPr>
-          <a:lstStyle xmlns:a="http://schemas.openxmlformats.org/drawingml/2006/main"/>
-          <a:p xmlns:a="http://schemas.openxmlformats.org/drawingml/2006/main">
+          <a:lstStyle/>
+          <a:p>
             <a:pPr marL="0" marR="0" indent="0" algn="l" defTabSz="914400">
               <a:lnSpc>
                 <a:spcPct val="100000"/>
@@ -5386,23 +5142,24 @@
       <p:sp>
         <p:nvSpPr>
           <p:cNvPr id="5" name="Forma libre 73">
-            <a:extLst xmlns:a="http://schemas.openxmlformats.org/drawingml/2006/main">
+            <a:extLst>
               <a:ext uri="{FF2B5EF4-FFF2-40B4-BE49-F238E27FC236}">
                 <a16:creationId xmlns:a16="http://schemas.microsoft.com/office/drawing/2014/main" id="{CBF958A2-03A1-5D3D-B54F-A44F149089F1}"/>
               </a:ext>
             </a:extLst>
           </p:cNvPr>
           <p:cNvSpPr>
-            <a:spLocks xmlns:a="http://schemas.openxmlformats.org/drawingml/2006/main" noGrp="1"/>
+            <a:spLocks noGrp="1"/>
           </p:cNvSpPr>
           <p:nvPr/>
         </p:nvSpPr>
         <p:spPr>
-          <a:xfrm xmlns:a="http://schemas.openxmlformats.org/drawingml/2006/main" rot="18900000" flipH="0" flipV="0">
+          <a:xfrm rot="18900000">
             <a:off x="315004" y="1203199"/>
             <a:ext cx="248448" cy="155237"/>
           </a:xfrm>
-          <a:custGeom xmlns:a="http://schemas.openxmlformats.org/drawingml/2006/main">
+          <a:custGeom>
+            <a:avLst/>
             <a:gdLst>
               <a:gd name="connsiteX0" fmla="*/ 242019 w 251019"/>
               <a:gd name="connsiteY0" fmla="*/ 101237 h 155237"/>
@@ -5431,6 +5188,8 @@
               <a:gd name="connsiteX12" fmla="*/ 54000 w 251019"/>
               <a:gd name="connsiteY12" fmla="*/ 101237 h 155237"/>
             </a:gdLst>
+            <a:ahLst/>
+            <a:cxnLst/>
             <a:rect l="l" t="t" r="r" b="b"/>
             <a:pathLst>
               <a:path w="251019" h="155237">
@@ -5487,10 +5246,10 @@
               </a:path>
             </a:pathLst>
           </a:custGeom>
-          <a:solidFill xmlns:a="http://schemas.openxmlformats.org/drawingml/2006/main">
+          <a:solidFill>
             <a:schemeClr val="bg1"/>
           </a:solidFill>
-          <a:ln xmlns:a="http://schemas.openxmlformats.org/drawingml/2006/main" w="12700" cap="flat">
+          <a:ln w="12700" cap="flat">
             <a:solidFill>
               <a:schemeClr val="bg1"/>
             </a:solidFill>
@@ -5499,17 +5258,23 @@
           </a:ln>
         </p:spPr>
         <p:style>
-          <a:lnRef xmlns:a="http://schemas.openxmlformats.org/drawingml/2006/main" idx="0"/>
-          <a:fillRef xmlns:a="http://schemas.openxmlformats.org/drawingml/2006/main" idx="0"/>
-          <a:effectRef xmlns:a="http://schemas.openxmlformats.org/drawingml/2006/main" idx="0"/>
-          <a:fontRef xmlns:a="http://schemas.openxmlformats.org/drawingml/2006/main"/>
+          <a:lnRef idx="0">
+            <a:scrgbClr r="0" g="0" b="0"/>
+          </a:lnRef>
+          <a:fillRef idx="0">
+            <a:scrgbClr r="0" g="0" b="0"/>
+          </a:fillRef>
+          <a:effectRef idx="0">
+            <a:scrgbClr r="0" g="0" b="0"/>
+          </a:effectRef>
+          <a:fontRef idx="major"/>
         </p:style>
         <p:txBody>
-          <a:bodyPr xmlns:a="http://schemas.openxmlformats.org/drawingml/2006/main" rot="0" spcFirstLastPara="1" vert="horz" wrap="square" lIns="45719" tIns="45719" rIns="45719" bIns="45719" anchor="ctr">
+          <a:bodyPr rot="0" spcFirstLastPara="1" vert="horz" wrap="square" lIns="45719" tIns="45719" rIns="45719" bIns="45719" anchor="ctr">
             <a:noAutofit/>
           </a:bodyPr>
-          <a:lstStyle xmlns:a="http://schemas.openxmlformats.org/drawingml/2006/main"/>
-          <a:p xmlns:a="http://schemas.openxmlformats.org/drawingml/2006/main">
+          <a:lstStyle/>
+          <a:p>
             <a:pPr marL="0" marR="0" indent="0" algn="l" defTabSz="914400">
               <a:lnSpc>
                 <a:spcPct val="100000"/>
@@ -5542,34 +5307,34 @@
       <p:sp>
         <p:nvSpPr>
           <p:cNvPr id="7" name="CuadroTexto 10">
-            <a:extLst xmlns:a="http://schemas.openxmlformats.org/drawingml/2006/main">
+            <a:extLst>
               <a:ext uri="{FF2B5EF4-FFF2-40B4-BE49-F238E27FC236}">
                 <a16:creationId xmlns:a16="http://schemas.microsoft.com/office/drawing/2014/main" id="{F3CA5129-68BD-1BE0-FFF5-70C7F1E6B500}"/>
               </a:ext>
             </a:extLst>
           </p:cNvPr>
           <p:cNvSpPr>
-            <a:spLocks xmlns:a="http://schemas.openxmlformats.org/drawingml/2006/main" noGrp="1"/>
+            <a:spLocks noGrp="1"/>
           </p:cNvSpPr>
           <p:nvPr/>
         </p:nvSpPr>
         <p:spPr>
-          <a:xfrm xmlns:a="http://schemas.openxmlformats.org/drawingml/2006/main">
+          <a:xfrm>
             <a:off x="617384" y="1116322"/>
             <a:ext cx="10766113" cy="426720"/>
           </a:xfrm>
-          <a:prstGeom xmlns:a="http://schemas.openxmlformats.org/drawingml/2006/main" prst="rect">
+          <a:prstGeom prst="rect">
             <a:avLst/>
           </a:prstGeom>
-          <a:ln xmlns:a="http://schemas.openxmlformats.org/drawingml/2006/main" w="12700">
+          <a:ln w="12700">
             <a:miter/>
           </a:ln>
         </p:spPr>
         <p:txBody>
-          <a:bodyPr xmlns:a="http://schemas.openxmlformats.org/drawingml/2006/main" wrap="square" lIns="45719" rIns="45719">
+          <a:bodyPr wrap="square" lIns="45719" rIns="45719">
             <a:spAutoFit/>
           </a:bodyPr>
-          <a:lstStyle xmlns:a="http://schemas.openxmlformats.org/drawingml/2006/main">
+          <a:lstStyle>
             <a:lvl1pPr algn="ctr">
               <a:buNone/>
               <a:defRPr sz="3000">
@@ -5582,7 +5347,7 @@
               </a:defRPr>
             </a:lvl1pPr>
           </a:lstStyle>
-          <a:p xmlns:a="http://schemas.openxmlformats.org/drawingml/2006/main">
+          <a:p>
             <a:pPr lvl="0" algn="just">
               <a:buNone/>
             </a:pPr>
@@ -5603,7 +5368,7 @@
       <p:graphicFrame>
         <p:nvGraphicFramePr>
           <p:cNvPr id="106" name="Chart">
-            <a:extLst xmlns:a="http://schemas.openxmlformats.org/drawingml/2006/main">
+            <a:extLst>
               <a:ext uri="{FF2B5EF4-FFF2-40B4-BE49-F238E27FC236}">
                 <a16:creationId xmlns:a16="http://schemas.microsoft.com/office/drawing/2014/main" id="{9E1B53AC-9ABB-4EB4-88AF-423BCA930422}"/>
               </a:ext>
@@ -5613,12 +5378,12 @@
           <p:nvPr/>
         </p:nvGraphicFramePr>
         <p:xfrm>
-          <a:off xmlns:a="http://schemas.openxmlformats.org/drawingml/2006/main" x="1666875" y="2209800"/>
-          <a:ext xmlns:a="http://schemas.openxmlformats.org/drawingml/2006/main" cx="8858250" cy="4381500"/>
+          <a:off x="1666875" y="2209800"/>
+          <a:ext cx="8858250" cy="4381500"/>
         </p:xfrm>
-        <a:graphic xmlns:a="http://schemas.openxmlformats.org/drawingml/2006/main">
+        <a:graphic>
           <a:graphicData uri="http://schemas.openxmlformats.org/drawingml/2006/chart">
-            <c:chart xmlns:r="http://schemas.openxmlformats.org/officeDocument/2006/relationships" xmlns:c="http://schemas.openxmlformats.org/drawingml/2006/chart" r:id="R437e1e1c111444f9"/>
+            <c:chart xmlns:c="http://schemas.openxmlformats.org/drawingml/2006/chart" xmlns:r="http://schemas.openxmlformats.org/officeDocument/2006/relationships" r:id="rId4"/>
           </a:graphicData>
         </a:graphic>
       </p:graphicFrame>
@@ -5629,17 +5394,21 @@
       </p:ext>
     </p:extLst>
   </p:cSld>
+  <p:clrMapOvr>
+    <a:masterClrMapping/>
+  </p:clrMapOvr>
 </p:sld>
 </file>
 
 <file path=ppt/slides/slide3.xml><?xml version="1.0" encoding="utf-8"?>
-<p:sld xmlns:p="http://schemas.openxmlformats.org/presentationml/2006/main">
+<p:sld xmlns:a="http://schemas.openxmlformats.org/drawingml/2006/main" xmlns:r="http://schemas.openxmlformats.org/officeDocument/2006/relationships" xmlns:p="http://schemas.openxmlformats.org/presentationml/2006/main">
   <p:cSld>
     <p:bg>
       <p:bgPr>
-        <a:solidFill xmlns:a="http://schemas.openxmlformats.org/drawingml/2006/main">
+        <a:solidFill>
           <a:srgbClr val="D9D9D9"/>
         </a:solidFill>
+        <a:effectLst/>
       </p:bgPr>
     </p:bg>
     <p:spTree>
@@ -5649,41 +5418,46 @@
         <p:nvPr/>
       </p:nvGrpSpPr>
       <p:grpSpPr>
-        <a:xfrm xmlns:a="http://schemas.openxmlformats.org/drawingml/2006/main"/>
+        <a:xfrm>
+          <a:off x="0" y="0"/>
+          <a:ext cx="0" cy="0"/>
+          <a:chOff x="0" y="0"/>
+          <a:chExt cx="0" cy="0"/>
+        </a:xfrm>
       </p:grpSpPr>
       <p:sp>
         <p:nvSpPr>
           <p:cNvPr id="103" name="Rectángulo 6">
-            <a:extLst xmlns:a="http://schemas.openxmlformats.org/drawingml/2006/main">
+            <a:extLst>
               <a:ext uri="{FF2B5EF4-FFF2-40B4-BE49-F238E27FC236}">
                 <a16:creationId xmlns:a16="http://schemas.microsoft.com/office/drawing/2014/main" id="{7F871D6A-DFE9-EB17-7B01-AD61DDB13647}"/>
               </a:ext>
             </a:extLst>
           </p:cNvPr>
           <p:cNvSpPr>
-            <a:spLocks xmlns:a="http://schemas.openxmlformats.org/drawingml/2006/main" noGrp="1"/>
+            <a:spLocks noGrp="1"/>
           </p:cNvSpPr>
           <p:nvPr/>
         </p:nvSpPr>
         <p:spPr>
-          <a:xfrm xmlns:a="http://schemas.openxmlformats.org/drawingml/2006/main" rot="16201099">
+          <a:xfrm rot="16201099">
             <a:off x="5627744" y="-4787258"/>
             <a:ext cx="128582" cy="11460279"/>
           </a:xfrm>
-          <a:prstGeom xmlns:a="http://schemas.openxmlformats.org/drawingml/2006/main" prst="rect">
+          <a:prstGeom prst="rect">
             <a:avLst/>
           </a:prstGeom>
-          <a:solidFill xmlns:a="http://schemas.openxmlformats.org/drawingml/2006/main">
+          <a:solidFill>
             <a:srgbClr val="DC7F37"/>
           </a:solidFill>
-          <a:ln xmlns:a="http://schemas.openxmlformats.org/drawingml/2006/main" w="12700">
+          <a:ln w="12700">
             <a:miter/>
           </a:ln>
         </p:spPr>
         <p:txBody>
-          <a:bodyPr xmlns:a="http://schemas.openxmlformats.org/drawingml/2006/main" lIns="45719" rIns="45719" anchor="ctr"/>
-          <a:lstStyle xmlns:a="http://schemas.openxmlformats.org/drawingml/2006/main"/>
-          <a:p xmlns:a="http://schemas.openxmlformats.org/drawingml/2006/main">
+          <a:bodyPr lIns="45719" rIns="45719" anchor="ctr"/>
+          <a:lstStyle/>
+          <a:p>
             <a:pPr algn="ctr">
               <a:buNone/>
               <a:defRPr>
@@ -5699,36 +5473,36 @@
       <p:sp>
         <p:nvSpPr>
           <p:cNvPr id="104" name="Rectángulo 3">
-            <a:extLst xmlns:a="http://schemas.openxmlformats.org/drawingml/2006/main">
+            <a:extLst>
               <a:ext uri="{FF2B5EF4-FFF2-40B4-BE49-F238E27FC236}">
                 <a16:creationId xmlns:a16="http://schemas.microsoft.com/office/drawing/2014/main" id="{23E49D1D-E29C-F007-B4F4-455F8704B6E0}"/>
               </a:ext>
             </a:extLst>
           </p:cNvPr>
           <p:cNvSpPr>
-            <a:spLocks xmlns:a="http://schemas.openxmlformats.org/drawingml/2006/main" noGrp="1"/>
+            <a:spLocks noGrp="1"/>
           </p:cNvSpPr>
           <p:nvPr/>
         </p:nvSpPr>
         <p:spPr>
-          <a:xfrm xmlns:a="http://schemas.openxmlformats.org/drawingml/2006/main">
+          <a:xfrm>
             <a:off x="0" y="0"/>
             <a:ext cx="2428853" cy="883564"/>
           </a:xfrm>
-          <a:prstGeom xmlns:a="http://schemas.openxmlformats.org/drawingml/2006/main" prst="rect">
+          <a:prstGeom prst="rect">
             <a:avLst/>
           </a:prstGeom>
-          <a:solidFill xmlns:a="http://schemas.openxmlformats.org/drawingml/2006/main">
+          <a:solidFill>
             <a:srgbClr val="960E53"/>
           </a:solidFill>
-          <a:ln xmlns:a="http://schemas.openxmlformats.org/drawingml/2006/main" w="12700">
+          <a:ln w="12700">
             <a:miter/>
           </a:ln>
         </p:spPr>
         <p:txBody>
-          <a:bodyPr xmlns:a="http://schemas.openxmlformats.org/drawingml/2006/main" lIns="45719" rIns="45719" anchor="ctr"/>
-          <a:lstStyle xmlns:a="http://schemas.openxmlformats.org/drawingml/2006/main"/>
-          <a:p xmlns:a="http://schemas.openxmlformats.org/drawingml/2006/main">
+          <a:bodyPr lIns="45719" rIns="45719" anchor="ctr"/>
+          <a:lstStyle/>
+          <a:p>
             <a:pPr algn="ctr">
               <a:buNone/>
               <a:defRPr>
@@ -5744,32 +5518,32 @@
       <p:pic>
         <p:nvPicPr>
           <p:cNvPr id="105" name="Imagen 5">
-            <a:extLst xmlns:a="http://schemas.openxmlformats.org/drawingml/2006/main">
+            <a:extLst>
               <a:ext uri="{FF2B5EF4-FFF2-40B4-BE49-F238E27FC236}">
                 <a16:creationId xmlns:a16="http://schemas.microsoft.com/office/drawing/2014/main" id="{21D5C51E-4BA7-4DDF-A548-81CBA659883B}"/>
               </a:ext>
             </a:extLst>
           </p:cNvPr>
           <p:cNvPicPr>
-            <a:picLocks xmlns:a="http://schemas.openxmlformats.org/drawingml/2006/main" noChangeAspect="1"/>
+            <a:picLocks noChangeAspect="1"/>
           </p:cNvPicPr>
           <p:nvPr/>
         </p:nvPicPr>
         <p:blipFill>
-          <a:blip xmlns:r="http://schemas.openxmlformats.org/officeDocument/2006/relationships" xmlns:a="http://schemas.openxmlformats.org/drawingml/2006/main" r:embed="R19127c638ef84041"/>
-          <a:stretch xmlns:a="http://schemas.openxmlformats.org/drawingml/2006/main">
-            <a:fillRect l="0" t="0" r="0" b="0"/>
+          <a:blip r:embed="rId3"/>
+          <a:stretch>
+            <a:fillRect/>
           </a:stretch>
         </p:blipFill>
         <p:spPr>
-          <a:xfrm xmlns:a="http://schemas.openxmlformats.org/drawingml/2006/main">
+          <a:xfrm>
             <a:off x="232696" y="48901"/>
             <a:ext cx="1963460" cy="785761"/>
           </a:xfrm>
-          <a:prstGeom xmlns:a="http://schemas.openxmlformats.org/drawingml/2006/main" prst="rect">
+          <a:prstGeom prst="rect">
             <a:avLst/>
           </a:prstGeom>
-          <a:ln xmlns:a="http://schemas.openxmlformats.org/drawingml/2006/main" w="12700">
+          <a:ln w="12700">
             <a:miter/>
           </a:ln>
         </p:spPr>
@@ -5777,34 +5551,34 @@
       <p:sp>
         <p:nvSpPr>
           <p:cNvPr id="2" name="CuadroTexto 10">
-            <a:extLst xmlns:a="http://schemas.openxmlformats.org/drawingml/2006/main">
+            <a:extLst>
               <a:ext uri="{FF2B5EF4-FFF2-40B4-BE49-F238E27FC236}">
                 <a16:creationId xmlns:a16="http://schemas.microsoft.com/office/drawing/2014/main" id="{7D722B48-2A00-E3B5-866D-5F4063BA41DA}"/>
               </a:ext>
             </a:extLst>
           </p:cNvPr>
           <p:cNvSpPr>
-            <a:spLocks xmlns:a="http://schemas.openxmlformats.org/drawingml/2006/main" noGrp="1"/>
+            <a:spLocks noGrp="1"/>
           </p:cNvSpPr>
           <p:nvPr/>
         </p:nvSpPr>
         <p:spPr>
-          <a:xfrm xmlns:a="http://schemas.openxmlformats.org/drawingml/2006/main">
+          <a:xfrm>
             <a:off x="2634906" y="164719"/>
             <a:ext cx="8993342" cy="492443"/>
           </a:xfrm>
-          <a:prstGeom xmlns:a="http://schemas.openxmlformats.org/drawingml/2006/main" prst="rect">
+          <a:prstGeom prst="rect">
             <a:avLst/>
           </a:prstGeom>
-          <a:ln xmlns:a="http://schemas.openxmlformats.org/drawingml/2006/main" w="12700">
+          <a:ln w="12700">
             <a:miter/>
           </a:ln>
         </p:spPr>
         <p:txBody>
-          <a:bodyPr xmlns:a="http://schemas.openxmlformats.org/drawingml/2006/main" wrap="square" lIns="45719" rIns="45719">
+          <a:bodyPr wrap="square" lIns="45719" rIns="45719">
             <a:spAutoFit/>
           </a:bodyPr>
-          <a:lstStyle xmlns:a="http://schemas.openxmlformats.org/drawingml/2006/main">
+          <a:lstStyle>
             <a:lvl1pPr algn="ctr">
               <a:buNone/>
               <a:defRPr sz="3000">
@@ -5817,7 +5591,7 @@
               </a:defRPr>
             </a:lvl1pPr>
           </a:lstStyle>
-          <a:p xmlns:a="http://schemas.openxmlformats.org/drawingml/2006/main">
+          <a:p>
             <a:pPr algn="l">
               <a:buNone/>
             </a:pPr>
@@ -5838,46 +5612,52 @@
       <p:sp>
         <p:nvSpPr>
           <p:cNvPr id="4" name="Rectángulo redondeado 72">
-            <a:extLst xmlns:a="http://schemas.openxmlformats.org/drawingml/2006/main">
+            <a:extLst>
               <a:ext uri="{FF2B5EF4-FFF2-40B4-BE49-F238E27FC236}">
                 <a16:creationId xmlns:a16="http://schemas.microsoft.com/office/drawing/2014/main" id="{85C9079B-CF46-39CF-1D30-E86B12E5A2B8}"/>
               </a:ext>
             </a:extLst>
           </p:cNvPr>
           <p:cNvSpPr>
-            <a:spLocks xmlns:a="http://schemas.openxmlformats.org/drawingml/2006/main" noGrp="1"/>
+            <a:spLocks noGrp="1"/>
           </p:cNvSpPr>
           <p:nvPr/>
         </p:nvSpPr>
         <p:spPr>
-          <a:xfrm xmlns:a="http://schemas.openxmlformats.org/drawingml/2006/main" rot="0" flipH="0" flipV="0">
+          <a:xfrm>
             <a:off x="261072" y="1137185"/>
             <a:ext cx="356313" cy="360000"/>
           </a:xfrm>
-          <a:prstGeom xmlns:a="http://schemas.openxmlformats.org/drawingml/2006/main" prst="roundRect">
+          <a:prstGeom prst="roundRect">
             <a:avLst/>
           </a:prstGeom>
-          <a:solidFill xmlns:a="http://schemas.openxmlformats.org/drawingml/2006/main">
+          <a:solidFill>
             <a:srgbClr val="960E53"/>
           </a:solidFill>
-          <a:ln xmlns:a="http://schemas.openxmlformats.org/drawingml/2006/main" w="12700" cap="flat">
+          <a:ln w="12700" cap="flat">
             <a:noFill/>
             <a:prstDash val="solid"/>
             <a:miter/>
           </a:ln>
         </p:spPr>
         <p:style>
-          <a:lnRef xmlns:a="http://schemas.openxmlformats.org/drawingml/2006/main" idx="0"/>
-          <a:fillRef xmlns:a="http://schemas.openxmlformats.org/drawingml/2006/main" idx="0"/>
-          <a:effectRef xmlns:a="http://schemas.openxmlformats.org/drawingml/2006/main" idx="0"/>
-          <a:fontRef xmlns:a="http://schemas.openxmlformats.org/drawingml/2006/main"/>
+          <a:lnRef idx="0">
+            <a:scrgbClr r="0" g="0" b="0"/>
+          </a:lnRef>
+          <a:fillRef idx="0">
+            <a:scrgbClr r="0" g="0" b="0"/>
+          </a:fillRef>
+          <a:effectRef idx="0">
+            <a:scrgbClr r="0" g="0" b="0"/>
+          </a:effectRef>
+          <a:fontRef idx="major"/>
         </p:style>
         <p:txBody>
-          <a:bodyPr xmlns:a="http://schemas.openxmlformats.org/drawingml/2006/main" rot="0" spcFirstLastPara="1" vert="horz" wrap="square" lIns="45719" tIns="45719" rIns="45719" bIns="45719" anchor="ctr">
+          <a:bodyPr rot="0" spcFirstLastPara="1" vert="horz" wrap="square" lIns="45719" tIns="45719" rIns="45719" bIns="45719" anchor="ctr">
             <a:spAutoFit/>
           </a:bodyPr>
-          <a:lstStyle xmlns:a="http://schemas.openxmlformats.org/drawingml/2006/main"/>
-          <a:p xmlns:a="http://schemas.openxmlformats.org/drawingml/2006/main">
+          <a:lstStyle/>
+          <a:p>
             <a:pPr marL="0" marR="0" indent="0" algn="l" defTabSz="914400">
               <a:lnSpc>
                 <a:spcPct val="100000"/>
@@ -5910,23 +5690,24 @@
       <p:sp>
         <p:nvSpPr>
           <p:cNvPr id="5" name="Forma libre 73">
-            <a:extLst xmlns:a="http://schemas.openxmlformats.org/drawingml/2006/main">
+            <a:extLst>
               <a:ext uri="{FF2B5EF4-FFF2-40B4-BE49-F238E27FC236}">
                 <a16:creationId xmlns:a16="http://schemas.microsoft.com/office/drawing/2014/main" id="{39FF5203-1B31-851A-4334-4DAD7F321442}"/>
               </a:ext>
             </a:extLst>
           </p:cNvPr>
           <p:cNvSpPr>
-            <a:spLocks xmlns:a="http://schemas.openxmlformats.org/drawingml/2006/main" noGrp="1"/>
+            <a:spLocks noGrp="1"/>
           </p:cNvSpPr>
           <p:nvPr/>
         </p:nvSpPr>
         <p:spPr>
-          <a:xfrm xmlns:a="http://schemas.openxmlformats.org/drawingml/2006/main" rot="18900000" flipH="0" flipV="0">
+          <a:xfrm rot="18900000">
             <a:off x="315004" y="1203199"/>
             <a:ext cx="248448" cy="155237"/>
           </a:xfrm>
-          <a:custGeom xmlns:a="http://schemas.openxmlformats.org/drawingml/2006/main">
+          <a:custGeom>
+            <a:avLst/>
             <a:gdLst>
               <a:gd name="connsiteX0" fmla="*/ 242019 w 251019"/>
               <a:gd name="connsiteY0" fmla="*/ 101237 h 155237"/>
@@ -5955,6 +5736,8 @@
               <a:gd name="connsiteX12" fmla="*/ 54000 w 251019"/>
               <a:gd name="connsiteY12" fmla="*/ 101237 h 155237"/>
             </a:gdLst>
+            <a:ahLst/>
+            <a:cxnLst/>
             <a:rect l="l" t="t" r="r" b="b"/>
             <a:pathLst>
               <a:path w="251019" h="155237">
@@ -6011,10 +5794,10 @@
               </a:path>
             </a:pathLst>
           </a:custGeom>
-          <a:solidFill xmlns:a="http://schemas.openxmlformats.org/drawingml/2006/main">
+          <a:solidFill>
             <a:schemeClr val="bg1"/>
           </a:solidFill>
-          <a:ln xmlns:a="http://schemas.openxmlformats.org/drawingml/2006/main" w="12700" cap="flat">
+          <a:ln w="12700" cap="flat">
             <a:solidFill>
               <a:schemeClr val="bg1"/>
             </a:solidFill>
@@ -6023,17 +5806,23 @@
           </a:ln>
         </p:spPr>
         <p:style>
-          <a:lnRef xmlns:a="http://schemas.openxmlformats.org/drawingml/2006/main" idx="0"/>
-          <a:fillRef xmlns:a="http://schemas.openxmlformats.org/drawingml/2006/main" idx="0"/>
-          <a:effectRef xmlns:a="http://schemas.openxmlformats.org/drawingml/2006/main" idx="0"/>
-          <a:fontRef xmlns:a="http://schemas.openxmlformats.org/drawingml/2006/main"/>
+          <a:lnRef idx="0">
+            <a:scrgbClr r="0" g="0" b="0"/>
+          </a:lnRef>
+          <a:fillRef idx="0">
+            <a:scrgbClr r="0" g="0" b="0"/>
+          </a:fillRef>
+          <a:effectRef idx="0">
+            <a:scrgbClr r="0" g="0" b="0"/>
+          </a:effectRef>
+          <a:fontRef idx="major"/>
         </p:style>
         <p:txBody>
-          <a:bodyPr xmlns:a="http://schemas.openxmlformats.org/drawingml/2006/main" rot="0" spcFirstLastPara="1" vert="horz" wrap="square" lIns="45719" tIns="45719" rIns="45719" bIns="45719" anchor="ctr">
+          <a:bodyPr rot="0" spcFirstLastPara="1" vert="horz" wrap="square" lIns="45719" tIns="45719" rIns="45719" bIns="45719" anchor="ctr">
             <a:noAutofit/>
           </a:bodyPr>
-          <a:lstStyle xmlns:a="http://schemas.openxmlformats.org/drawingml/2006/main"/>
-          <a:p xmlns:a="http://schemas.openxmlformats.org/drawingml/2006/main">
+          <a:lstStyle/>
+          <a:p>
             <a:pPr marL="0" marR="0" indent="0" algn="l" defTabSz="914400">
               <a:lnSpc>
                 <a:spcPct val="100000"/>
@@ -6066,34 +5855,34 @@
       <p:sp>
         <p:nvSpPr>
           <p:cNvPr id="7" name="CuadroTexto 10">
-            <a:extLst xmlns:a="http://schemas.openxmlformats.org/drawingml/2006/main">
+            <a:extLst>
               <a:ext uri="{FF2B5EF4-FFF2-40B4-BE49-F238E27FC236}">
                 <a16:creationId xmlns:a16="http://schemas.microsoft.com/office/drawing/2014/main" id="{A694FFB7-3180-0E40-953B-32E4B3CEFFD6}"/>
               </a:ext>
             </a:extLst>
           </p:cNvPr>
           <p:cNvSpPr>
-            <a:spLocks xmlns:a="http://schemas.openxmlformats.org/drawingml/2006/main" noGrp="1"/>
+            <a:spLocks noGrp="1"/>
           </p:cNvSpPr>
           <p:nvPr/>
         </p:nvSpPr>
         <p:spPr>
-          <a:xfrm xmlns:a="http://schemas.openxmlformats.org/drawingml/2006/main">
+          <a:xfrm>
             <a:off x="656082" y="1103033"/>
             <a:ext cx="10766113" cy="426720"/>
           </a:xfrm>
-          <a:prstGeom xmlns:a="http://schemas.openxmlformats.org/drawingml/2006/main" prst="rect">
+          <a:prstGeom prst="rect">
             <a:avLst/>
           </a:prstGeom>
-          <a:ln xmlns:a="http://schemas.openxmlformats.org/drawingml/2006/main" w="12700">
+          <a:ln w="12700">
             <a:miter/>
           </a:ln>
         </p:spPr>
         <p:txBody>
-          <a:bodyPr xmlns:a="http://schemas.openxmlformats.org/drawingml/2006/main" wrap="square" lIns="45719" rIns="45719">
+          <a:bodyPr wrap="square" lIns="45719" rIns="45719">
             <a:spAutoFit/>
           </a:bodyPr>
-          <a:lstStyle xmlns:a="http://schemas.openxmlformats.org/drawingml/2006/main">
+          <a:lstStyle>
             <a:lvl1pPr algn="ctr">
               <a:buNone/>
               <a:defRPr sz="3000">
@@ -6106,7 +5895,7 @@
               </a:defRPr>
             </a:lvl1pPr>
           </a:lstStyle>
-          <a:p xmlns:a="http://schemas.openxmlformats.org/drawingml/2006/main">
+          <a:p>
             <a:pPr lvl="0" algn="just">
               <a:buNone/>
             </a:pPr>
@@ -6127,7 +5916,7 @@
       <p:graphicFrame>
         <p:nvGraphicFramePr>
           <p:cNvPr id="106" name="Chart">
-            <a:extLst xmlns:a="http://schemas.openxmlformats.org/drawingml/2006/main">
+            <a:extLst>
               <a:ext uri="{FF2B5EF4-FFF2-40B4-BE49-F238E27FC236}">
                 <a16:creationId xmlns:a16="http://schemas.microsoft.com/office/drawing/2014/main" id="{FA3287FA-1959-44E2-B03E-4EBC4BCA3037}"/>
               </a:ext>
@@ -6137,12 +5926,12 @@
           <p:nvPr/>
         </p:nvGraphicFramePr>
         <p:xfrm>
-          <a:off xmlns:a="http://schemas.openxmlformats.org/drawingml/2006/main" x="1666875" y="2209800"/>
-          <a:ext xmlns:a="http://schemas.openxmlformats.org/drawingml/2006/main" cx="8858250" cy="4381500"/>
+          <a:off x="1666875" y="2209800"/>
+          <a:ext cx="8858250" cy="4381500"/>
         </p:xfrm>
-        <a:graphic xmlns:a="http://schemas.openxmlformats.org/drawingml/2006/main">
+        <a:graphic>
           <a:graphicData uri="http://schemas.openxmlformats.org/drawingml/2006/chart">
-            <c:chart xmlns:r="http://schemas.openxmlformats.org/officeDocument/2006/relationships" xmlns:c="http://schemas.openxmlformats.org/drawingml/2006/chart" r:id="Re077fff7717b4444"/>
+            <c:chart xmlns:c="http://schemas.openxmlformats.org/drawingml/2006/chart" xmlns:r="http://schemas.openxmlformats.org/officeDocument/2006/relationships" r:id="rId4"/>
           </a:graphicData>
         </a:graphic>
       </p:graphicFrame>
@@ -6153,17 +5942,21 @@
       </p:ext>
     </p:extLst>
   </p:cSld>
+  <p:clrMapOvr>
+    <a:masterClrMapping/>
+  </p:clrMapOvr>
 </p:sld>
 </file>
 
 <file path=ppt/slides/slide4.xml><?xml version="1.0" encoding="utf-8"?>
-<p:sld xmlns:p="http://schemas.openxmlformats.org/presentationml/2006/main">
+<p:sld xmlns:a="http://schemas.openxmlformats.org/drawingml/2006/main" xmlns:r="http://schemas.openxmlformats.org/officeDocument/2006/relationships" xmlns:p="http://schemas.openxmlformats.org/presentationml/2006/main">
   <p:cSld>
     <p:bg>
       <p:bgPr>
-        <a:solidFill xmlns:a="http://schemas.openxmlformats.org/drawingml/2006/main">
+        <a:solidFill>
           <a:srgbClr val="D9D9D9"/>
         </a:solidFill>
+        <a:effectLst/>
       </p:bgPr>
     </p:bg>
     <p:spTree>
@@ -6173,41 +5966,46 @@
         <p:nvPr/>
       </p:nvGrpSpPr>
       <p:grpSpPr>
-        <a:xfrm xmlns:a="http://schemas.openxmlformats.org/drawingml/2006/main"/>
+        <a:xfrm>
+          <a:off x="0" y="0"/>
+          <a:ext cx="0" cy="0"/>
+          <a:chOff x="0" y="0"/>
+          <a:chExt cx="0" cy="0"/>
+        </a:xfrm>
       </p:grpSpPr>
       <p:sp>
         <p:nvSpPr>
           <p:cNvPr id="103" name="Rectángulo 6">
-            <a:extLst xmlns:a="http://schemas.openxmlformats.org/drawingml/2006/main">
+            <a:extLst>
               <a:ext uri="{FF2B5EF4-FFF2-40B4-BE49-F238E27FC236}">
                 <a16:creationId xmlns:a16="http://schemas.microsoft.com/office/drawing/2014/main" id="{FCD221F1-5C3E-8E5C-5EDA-B9348679197F}"/>
               </a:ext>
             </a:extLst>
           </p:cNvPr>
           <p:cNvSpPr>
-            <a:spLocks xmlns:a="http://schemas.openxmlformats.org/drawingml/2006/main" noGrp="1"/>
+            <a:spLocks noGrp="1"/>
           </p:cNvSpPr>
           <p:nvPr/>
         </p:nvSpPr>
         <p:spPr>
-          <a:xfrm xmlns:a="http://schemas.openxmlformats.org/drawingml/2006/main" rot="16201099">
+          <a:xfrm rot="16201099">
             <a:off x="5627744" y="-4787258"/>
             <a:ext cx="128582" cy="11460279"/>
           </a:xfrm>
-          <a:prstGeom xmlns:a="http://schemas.openxmlformats.org/drawingml/2006/main" prst="rect">
+          <a:prstGeom prst="rect">
             <a:avLst/>
           </a:prstGeom>
-          <a:solidFill xmlns:a="http://schemas.openxmlformats.org/drawingml/2006/main">
+          <a:solidFill>
             <a:srgbClr val="DC7F37"/>
           </a:solidFill>
-          <a:ln xmlns:a="http://schemas.openxmlformats.org/drawingml/2006/main" w="12700">
+          <a:ln w="12700">
             <a:miter/>
           </a:ln>
         </p:spPr>
         <p:txBody>
-          <a:bodyPr xmlns:a="http://schemas.openxmlformats.org/drawingml/2006/main" lIns="45719" rIns="45719" anchor="ctr"/>
-          <a:lstStyle xmlns:a="http://schemas.openxmlformats.org/drawingml/2006/main"/>
-          <a:p xmlns:a="http://schemas.openxmlformats.org/drawingml/2006/main">
+          <a:bodyPr lIns="45719" rIns="45719" anchor="ctr"/>
+          <a:lstStyle/>
+          <a:p>
             <a:pPr algn="ctr">
               <a:buNone/>
               <a:defRPr>
@@ -6223,36 +6021,36 @@
       <p:sp>
         <p:nvSpPr>
           <p:cNvPr id="104" name="Rectángulo 3">
-            <a:extLst xmlns:a="http://schemas.openxmlformats.org/drawingml/2006/main">
+            <a:extLst>
               <a:ext uri="{FF2B5EF4-FFF2-40B4-BE49-F238E27FC236}">
                 <a16:creationId xmlns:a16="http://schemas.microsoft.com/office/drawing/2014/main" id="{A912FD33-40FD-E689-D989-428D21D66651}"/>
               </a:ext>
             </a:extLst>
           </p:cNvPr>
           <p:cNvSpPr>
-            <a:spLocks xmlns:a="http://schemas.openxmlformats.org/drawingml/2006/main" noGrp="1"/>
+            <a:spLocks noGrp="1"/>
           </p:cNvSpPr>
           <p:nvPr/>
         </p:nvSpPr>
         <p:spPr>
-          <a:xfrm xmlns:a="http://schemas.openxmlformats.org/drawingml/2006/main">
+          <a:xfrm>
             <a:off x="0" y="0"/>
             <a:ext cx="2428853" cy="883564"/>
           </a:xfrm>
-          <a:prstGeom xmlns:a="http://schemas.openxmlformats.org/drawingml/2006/main" prst="rect">
+          <a:prstGeom prst="rect">
             <a:avLst/>
           </a:prstGeom>
-          <a:solidFill xmlns:a="http://schemas.openxmlformats.org/drawingml/2006/main">
+          <a:solidFill>
             <a:srgbClr val="960E53"/>
           </a:solidFill>
-          <a:ln xmlns:a="http://schemas.openxmlformats.org/drawingml/2006/main" w="12700">
+          <a:ln w="12700">
             <a:miter/>
           </a:ln>
         </p:spPr>
         <p:txBody>
-          <a:bodyPr xmlns:a="http://schemas.openxmlformats.org/drawingml/2006/main" lIns="45719" rIns="45719" anchor="ctr"/>
-          <a:lstStyle xmlns:a="http://schemas.openxmlformats.org/drawingml/2006/main"/>
-          <a:p xmlns:a="http://schemas.openxmlformats.org/drawingml/2006/main">
+          <a:bodyPr lIns="45719" rIns="45719" anchor="ctr"/>
+          <a:lstStyle/>
+          <a:p>
             <a:pPr algn="ctr">
               <a:buNone/>
               <a:defRPr>
@@ -6268,32 +6066,32 @@
       <p:pic>
         <p:nvPicPr>
           <p:cNvPr id="105" name="Imagen 5">
-            <a:extLst xmlns:a="http://schemas.openxmlformats.org/drawingml/2006/main">
+            <a:extLst>
               <a:ext uri="{FF2B5EF4-FFF2-40B4-BE49-F238E27FC236}">
                 <a16:creationId xmlns:a16="http://schemas.microsoft.com/office/drawing/2014/main" id="{C3088F4C-CC0D-42F4-96EE-F8AFBBB05609}"/>
               </a:ext>
             </a:extLst>
           </p:cNvPr>
           <p:cNvPicPr>
-            <a:picLocks xmlns:a="http://schemas.openxmlformats.org/drawingml/2006/main" noChangeAspect="1"/>
+            <a:picLocks noChangeAspect="1"/>
           </p:cNvPicPr>
           <p:nvPr/>
         </p:nvPicPr>
         <p:blipFill>
-          <a:blip xmlns:r="http://schemas.openxmlformats.org/officeDocument/2006/relationships" xmlns:a="http://schemas.openxmlformats.org/drawingml/2006/main" r:embed="Re3b8ed91d9b94eae"/>
-          <a:stretch xmlns:a="http://schemas.openxmlformats.org/drawingml/2006/main">
-            <a:fillRect l="0" t="0" r="0" b="0"/>
+          <a:blip r:embed="rId3"/>
+          <a:stretch>
+            <a:fillRect/>
           </a:stretch>
         </p:blipFill>
         <p:spPr>
-          <a:xfrm xmlns:a="http://schemas.openxmlformats.org/drawingml/2006/main">
+          <a:xfrm>
             <a:off x="232696" y="48901"/>
             <a:ext cx="1963460" cy="785761"/>
           </a:xfrm>
-          <a:prstGeom xmlns:a="http://schemas.openxmlformats.org/drawingml/2006/main" prst="rect">
+          <a:prstGeom prst="rect">
             <a:avLst/>
           </a:prstGeom>
-          <a:ln xmlns:a="http://schemas.openxmlformats.org/drawingml/2006/main" w="12700">
+          <a:ln w="12700">
             <a:miter/>
           </a:ln>
         </p:spPr>
@@ -6301,34 +6099,34 @@
       <p:sp>
         <p:nvSpPr>
           <p:cNvPr id="2" name="CuadroTexto 10">
-            <a:extLst xmlns:a="http://schemas.openxmlformats.org/drawingml/2006/main">
+            <a:extLst>
               <a:ext uri="{FF2B5EF4-FFF2-40B4-BE49-F238E27FC236}">
                 <a16:creationId xmlns:a16="http://schemas.microsoft.com/office/drawing/2014/main" id="{0000FAED-E800-2B25-82DB-8DD055A68059}"/>
               </a:ext>
             </a:extLst>
           </p:cNvPr>
           <p:cNvSpPr>
-            <a:spLocks xmlns:a="http://schemas.openxmlformats.org/drawingml/2006/main" noGrp="1"/>
+            <a:spLocks noGrp="1"/>
           </p:cNvSpPr>
           <p:nvPr/>
         </p:nvSpPr>
         <p:spPr>
-          <a:xfrm xmlns:a="http://schemas.openxmlformats.org/drawingml/2006/main">
+          <a:xfrm>
             <a:off x="2634906" y="164719"/>
             <a:ext cx="8993342" cy="492443"/>
           </a:xfrm>
-          <a:prstGeom xmlns:a="http://schemas.openxmlformats.org/drawingml/2006/main" prst="rect">
+          <a:prstGeom prst="rect">
             <a:avLst/>
           </a:prstGeom>
-          <a:ln xmlns:a="http://schemas.openxmlformats.org/drawingml/2006/main" w="12700">
+          <a:ln w="12700">
             <a:miter/>
           </a:ln>
         </p:spPr>
         <p:txBody>
-          <a:bodyPr xmlns:a="http://schemas.openxmlformats.org/drawingml/2006/main" wrap="square" lIns="45719" rIns="45719">
+          <a:bodyPr wrap="square" lIns="45719" rIns="45719">
             <a:spAutoFit/>
           </a:bodyPr>
-          <a:lstStyle xmlns:a="http://schemas.openxmlformats.org/drawingml/2006/main">
+          <a:lstStyle>
             <a:lvl1pPr algn="ctr">
               <a:buNone/>
               <a:defRPr sz="3000">
@@ -6341,7 +6139,7 @@
               </a:defRPr>
             </a:lvl1pPr>
           </a:lstStyle>
-          <a:p xmlns:a="http://schemas.openxmlformats.org/drawingml/2006/main">
+          <a:p>
             <a:pPr algn="l">
               <a:buNone/>
             </a:pPr>
@@ -6362,46 +6160,52 @@
       <p:sp>
         <p:nvSpPr>
           <p:cNvPr id="4" name="Rectángulo redondeado 72">
-            <a:extLst xmlns:a="http://schemas.openxmlformats.org/drawingml/2006/main">
+            <a:extLst>
               <a:ext uri="{FF2B5EF4-FFF2-40B4-BE49-F238E27FC236}">
                 <a16:creationId xmlns:a16="http://schemas.microsoft.com/office/drawing/2014/main" id="{6A7B7831-EC0D-D89C-D81D-2165A1954719}"/>
               </a:ext>
             </a:extLst>
           </p:cNvPr>
           <p:cNvSpPr>
-            <a:spLocks xmlns:a="http://schemas.openxmlformats.org/drawingml/2006/main" noGrp="1"/>
+            <a:spLocks noGrp="1"/>
           </p:cNvSpPr>
           <p:nvPr/>
         </p:nvSpPr>
         <p:spPr>
-          <a:xfrm xmlns:a="http://schemas.openxmlformats.org/drawingml/2006/main" rot="0" flipH="0" flipV="0">
+          <a:xfrm>
             <a:off x="261072" y="1137185"/>
             <a:ext cx="356313" cy="360000"/>
           </a:xfrm>
-          <a:prstGeom xmlns:a="http://schemas.openxmlformats.org/drawingml/2006/main" prst="roundRect">
+          <a:prstGeom prst="roundRect">
             <a:avLst/>
           </a:prstGeom>
-          <a:solidFill xmlns:a="http://schemas.openxmlformats.org/drawingml/2006/main">
+          <a:solidFill>
             <a:srgbClr val="960E53"/>
           </a:solidFill>
-          <a:ln xmlns:a="http://schemas.openxmlformats.org/drawingml/2006/main" w="12700" cap="flat">
+          <a:ln w="12700" cap="flat">
             <a:noFill/>
             <a:prstDash val="solid"/>
             <a:miter/>
           </a:ln>
         </p:spPr>
         <p:style>
-          <a:lnRef xmlns:a="http://schemas.openxmlformats.org/drawingml/2006/main" idx="0"/>
-          <a:fillRef xmlns:a="http://schemas.openxmlformats.org/drawingml/2006/main" idx="0"/>
-          <a:effectRef xmlns:a="http://schemas.openxmlformats.org/drawingml/2006/main" idx="0"/>
-          <a:fontRef xmlns:a="http://schemas.openxmlformats.org/drawingml/2006/main"/>
+          <a:lnRef idx="0">
+            <a:scrgbClr r="0" g="0" b="0"/>
+          </a:lnRef>
+          <a:fillRef idx="0">
+            <a:scrgbClr r="0" g="0" b="0"/>
+          </a:fillRef>
+          <a:effectRef idx="0">
+            <a:scrgbClr r="0" g="0" b="0"/>
+          </a:effectRef>
+          <a:fontRef idx="major"/>
         </p:style>
         <p:txBody>
-          <a:bodyPr xmlns:a="http://schemas.openxmlformats.org/drawingml/2006/main" rot="0" spcFirstLastPara="1" vert="horz" wrap="square" lIns="45719" tIns="45719" rIns="45719" bIns="45719" anchor="ctr">
+          <a:bodyPr rot="0" spcFirstLastPara="1" vert="horz" wrap="square" lIns="45719" tIns="45719" rIns="45719" bIns="45719" anchor="ctr">
             <a:spAutoFit/>
           </a:bodyPr>
-          <a:lstStyle xmlns:a="http://schemas.openxmlformats.org/drawingml/2006/main"/>
-          <a:p xmlns:a="http://schemas.openxmlformats.org/drawingml/2006/main">
+          <a:lstStyle/>
+          <a:p>
             <a:pPr marL="0" marR="0" indent="0" algn="l" defTabSz="914400">
               <a:lnSpc>
                 <a:spcPct val="100000"/>
@@ -6434,23 +6238,24 @@
       <p:sp>
         <p:nvSpPr>
           <p:cNvPr id="5" name="Forma libre 73">
-            <a:extLst xmlns:a="http://schemas.openxmlformats.org/drawingml/2006/main">
+            <a:extLst>
               <a:ext uri="{FF2B5EF4-FFF2-40B4-BE49-F238E27FC236}">
                 <a16:creationId xmlns:a16="http://schemas.microsoft.com/office/drawing/2014/main" id="{A0D64C9F-98E2-876C-6361-5DFB3D4096EF}"/>
               </a:ext>
             </a:extLst>
           </p:cNvPr>
           <p:cNvSpPr>
-            <a:spLocks xmlns:a="http://schemas.openxmlformats.org/drawingml/2006/main" noGrp="1"/>
+            <a:spLocks noGrp="1"/>
           </p:cNvSpPr>
           <p:nvPr/>
         </p:nvSpPr>
         <p:spPr>
-          <a:xfrm xmlns:a="http://schemas.openxmlformats.org/drawingml/2006/main" rot="18900000" flipH="0" flipV="0">
+          <a:xfrm rot="18900000">
             <a:off x="315004" y="1203199"/>
             <a:ext cx="248448" cy="155237"/>
           </a:xfrm>
-          <a:custGeom xmlns:a="http://schemas.openxmlformats.org/drawingml/2006/main">
+          <a:custGeom>
+            <a:avLst/>
             <a:gdLst>
               <a:gd name="connsiteX0" fmla="*/ 242019 w 251019"/>
               <a:gd name="connsiteY0" fmla="*/ 101237 h 155237"/>
@@ -6479,6 +6284,8 @@
               <a:gd name="connsiteX12" fmla="*/ 54000 w 251019"/>
               <a:gd name="connsiteY12" fmla="*/ 101237 h 155237"/>
             </a:gdLst>
+            <a:ahLst/>
+            <a:cxnLst/>
             <a:rect l="l" t="t" r="r" b="b"/>
             <a:pathLst>
               <a:path w="251019" h="155237">
@@ -6535,10 +6342,10 @@
               </a:path>
             </a:pathLst>
           </a:custGeom>
-          <a:solidFill xmlns:a="http://schemas.openxmlformats.org/drawingml/2006/main">
+          <a:solidFill>
             <a:schemeClr val="bg1"/>
           </a:solidFill>
-          <a:ln xmlns:a="http://schemas.openxmlformats.org/drawingml/2006/main" w="12700" cap="flat">
+          <a:ln w="12700" cap="flat">
             <a:solidFill>
               <a:schemeClr val="bg1"/>
             </a:solidFill>
@@ -6547,17 +6354,23 @@
           </a:ln>
         </p:spPr>
         <p:style>
-          <a:lnRef xmlns:a="http://schemas.openxmlformats.org/drawingml/2006/main" idx="0"/>
-          <a:fillRef xmlns:a="http://schemas.openxmlformats.org/drawingml/2006/main" idx="0"/>
-          <a:effectRef xmlns:a="http://schemas.openxmlformats.org/drawingml/2006/main" idx="0"/>
-          <a:fontRef xmlns:a="http://schemas.openxmlformats.org/drawingml/2006/main"/>
+          <a:lnRef idx="0">
+            <a:scrgbClr r="0" g="0" b="0"/>
+          </a:lnRef>
+          <a:fillRef idx="0">
+            <a:scrgbClr r="0" g="0" b="0"/>
+          </a:fillRef>
+          <a:effectRef idx="0">
+            <a:scrgbClr r="0" g="0" b="0"/>
+          </a:effectRef>
+          <a:fontRef idx="major"/>
         </p:style>
         <p:txBody>
-          <a:bodyPr xmlns:a="http://schemas.openxmlformats.org/drawingml/2006/main" rot="0" spcFirstLastPara="1" vert="horz" wrap="square" lIns="45719" tIns="45719" rIns="45719" bIns="45719" anchor="ctr">
+          <a:bodyPr rot="0" spcFirstLastPara="1" vert="horz" wrap="square" lIns="45719" tIns="45719" rIns="45719" bIns="45719" anchor="ctr">
             <a:noAutofit/>
           </a:bodyPr>
-          <a:lstStyle xmlns:a="http://schemas.openxmlformats.org/drawingml/2006/main"/>
-          <a:p xmlns:a="http://schemas.openxmlformats.org/drawingml/2006/main">
+          <a:lstStyle/>
+          <a:p>
             <a:pPr marL="0" marR="0" indent="0" algn="l" defTabSz="914400">
               <a:lnSpc>
                 <a:spcPct val="100000"/>
@@ -6590,34 +6403,34 @@
       <p:sp>
         <p:nvSpPr>
           <p:cNvPr id="7" name="CuadroTexto 10">
-            <a:extLst xmlns:a="http://schemas.openxmlformats.org/drawingml/2006/main">
+            <a:extLst>
               <a:ext uri="{FF2B5EF4-FFF2-40B4-BE49-F238E27FC236}">
                 <a16:creationId xmlns:a16="http://schemas.microsoft.com/office/drawing/2014/main" id="{EDC11872-73A3-83A1-DCFD-1F227EFC4692}"/>
               </a:ext>
             </a:extLst>
           </p:cNvPr>
           <p:cNvSpPr>
-            <a:spLocks xmlns:a="http://schemas.openxmlformats.org/drawingml/2006/main" noGrp="1"/>
+            <a:spLocks noGrp="1"/>
           </p:cNvSpPr>
           <p:nvPr/>
         </p:nvSpPr>
         <p:spPr>
-          <a:xfrm xmlns:a="http://schemas.openxmlformats.org/drawingml/2006/main">
+          <a:xfrm>
             <a:off x="656082" y="1103033"/>
             <a:ext cx="10766113" cy="426720"/>
           </a:xfrm>
-          <a:prstGeom xmlns:a="http://schemas.openxmlformats.org/drawingml/2006/main" prst="rect">
+          <a:prstGeom prst="rect">
             <a:avLst/>
           </a:prstGeom>
-          <a:ln xmlns:a="http://schemas.openxmlformats.org/drawingml/2006/main" w="12700">
+          <a:ln w="12700">
             <a:miter/>
           </a:ln>
         </p:spPr>
         <p:txBody>
-          <a:bodyPr xmlns:a="http://schemas.openxmlformats.org/drawingml/2006/main" wrap="square" lIns="45719" rIns="45719">
+          <a:bodyPr wrap="square" lIns="45719" rIns="45719">
             <a:spAutoFit/>
           </a:bodyPr>
-          <a:lstStyle xmlns:a="http://schemas.openxmlformats.org/drawingml/2006/main">
+          <a:lstStyle>
             <a:lvl1pPr algn="ctr">
               <a:buNone/>
               <a:defRPr sz="3000">
@@ -6630,7 +6443,7 @@
               </a:defRPr>
             </a:lvl1pPr>
           </a:lstStyle>
-          <a:p xmlns:a="http://schemas.openxmlformats.org/drawingml/2006/main">
+          <a:p>
             <a:pPr lvl="0" algn="just">
               <a:buNone/>
             </a:pPr>
@@ -6651,7 +6464,7 @@
       <p:graphicFrame>
         <p:nvGraphicFramePr>
           <p:cNvPr id="106" name="Chart">
-            <a:extLst xmlns:a="http://schemas.openxmlformats.org/drawingml/2006/main">
+            <a:extLst>
               <a:ext uri="{FF2B5EF4-FFF2-40B4-BE49-F238E27FC236}">
                 <a16:creationId xmlns:a16="http://schemas.microsoft.com/office/drawing/2014/main" id="{16A014E8-EE29-445F-AAF8-E7C84CD48667}"/>
               </a:ext>
@@ -6661,12 +6474,12 @@
           <p:nvPr/>
         </p:nvGraphicFramePr>
         <p:xfrm>
-          <a:off xmlns:a="http://schemas.openxmlformats.org/drawingml/2006/main" x="1666875" y="2333625"/>
-          <a:ext xmlns:a="http://schemas.openxmlformats.org/drawingml/2006/main" cx="8858250" cy="4286250"/>
+          <a:off x="1666875" y="2333625"/>
+          <a:ext cx="8858250" cy="4286250"/>
         </p:xfrm>
-        <a:graphic xmlns:a="http://schemas.openxmlformats.org/drawingml/2006/main">
+        <a:graphic>
           <a:graphicData uri="http://schemas.openxmlformats.org/drawingml/2006/chart">
-            <c:chart xmlns:r="http://schemas.openxmlformats.org/officeDocument/2006/relationships" xmlns:c="http://schemas.openxmlformats.org/drawingml/2006/chart" r:id="Rc70cc96d01894652"/>
+            <c:chart xmlns:c="http://schemas.openxmlformats.org/drawingml/2006/chart" xmlns:r="http://schemas.openxmlformats.org/officeDocument/2006/relationships" r:id="rId4"/>
           </a:graphicData>
         </a:graphic>
       </p:graphicFrame>
@@ -6677,17 +6490,21 @@
       </p:ext>
     </p:extLst>
   </p:cSld>
+  <p:clrMapOvr>
+    <a:masterClrMapping/>
+  </p:clrMapOvr>
 </p:sld>
 </file>
 
 <file path=ppt/slides/slide5.xml><?xml version="1.0" encoding="utf-8"?>
-<p:sld xmlns:p="http://schemas.openxmlformats.org/presentationml/2006/main">
+<p:sld xmlns:a="http://schemas.openxmlformats.org/drawingml/2006/main" xmlns:r="http://schemas.openxmlformats.org/officeDocument/2006/relationships" xmlns:p="http://schemas.openxmlformats.org/presentationml/2006/main">
   <p:cSld>
     <p:bg>
       <p:bgPr>
-        <a:solidFill xmlns:a="http://schemas.openxmlformats.org/drawingml/2006/main">
+        <a:solidFill>
           <a:srgbClr val="D9D9D9"/>
         </a:solidFill>
+        <a:effectLst/>
       </p:bgPr>
     </p:bg>
     <p:spTree>
@@ -6697,41 +6514,46 @@
         <p:nvPr/>
       </p:nvGrpSpPr>
       <p:grpSpPr>
-        <a:xfrm xmlns:a="http://schemas.openxmlformats.org/drawingml/2006/main"/>
+        <a:xfrm>
+          <a:off x="0" y="0"/>
+          <a:ext cx="0" cy="0"/>
+          <a:chOff x="0" y="0"/>
+          <a:chExt cx="0" cy="0"/>
+        </a:xfrm>
       </p:grpSpPr>
       <p:sp>
         <p:nvSpPr>
           <p:cNvPr id="103" name="Rectángulo 6">
-            <a:extLst xmlns:a="http://schemas.openxmlformats.org/drawingml/2006/main">
+            <a:extLst>
               <a:ext uri="{FF2B5EF4-FFF2-40B4-BE49-F238E27FC236}">
                 <a16:creationId xmlns:a16="http://schemas.microsoft.com/office/drawing/2014/main" id="{E04EE304-7003-322F-7E8D-9A396BFB7FCC}"/>
               </a:ext>
             </a:extLst>
           </p:cNvPr>
           <p:cNvSpPr>
-            <a:spLocks xmlns:a="http://schemas.openxmlformats.org/drawingml/2006/main" noGrp="1"/>
+            <a:spLocks noGrp="1"/>
           </p:cNvSpPr>
           <p:nvPr/>
         </p:nvSpPr>
         <p:spPr>
-          <a:xfrm xmlns:a="http://schemas.openxmlformats.org/drawingml/2006/main" rot="16201099">
+          <a:xfrm rot="16201099">
             <a:off x="5627744" y="-4787258"/>
             <a:ext cx="128582" cy="11460279"/>
           </a:xfrm>
-          <a:prstGeom xmlns:a="http://schemas.openxmlformats.org/drawingml/2006/main" prst="rect">
+          <a:prstGeom prst="rect">
             <a:avLst/>
           </a:prstGeom>
-          <a:solidFill xmlns:a="http://schemas.openxmlformats.org/drawingml/2006/main">
+          <a:solidFill>
             <a:srgbClr val="DC7F37"/>
           </a:solidFill>
-          <a:ln xmlns:a="http://schemas.openxmlformats.org/drawingml/2006/main" w="12700">
+          <a:ln w="12700">
             <a:miter/>
           </a:ln>
         </p:spPr>
         <p:txBody>
-          <a:bodyPr xmlns:a="http://schemas.openxmlformats.org/drawingml/2006/main" lIns="45719" rIns="45719" anchor="ctr"/>
-          <a:lstStyle xmlns:a="http://schemas.openxmlformats.org/drawingml/2006/main"/>
-          <a:p xmlns:a="http://schemas.openxmlformats.org/drawingml/2006/main">
+          <a:bodyPr lIns="45719" rIns="45719" anchor="ctr"/>
+          <a:lstStyle/>
+          <a:p>
             <a:pPr algn="ctr">
               <a:buNone/>
               <a:defRPr>
@@ -6747,36 +6569,36 @@
       <p:sp>
         <p:nvSpPr>
           <p:cNvPr id="104" name="Rectángulo 3">
-            <a:extLst xmlns:a="http://schemas.openxmlformats.org/drawingml/2006/main">
+            <a:extLst>
               <a:ext uri="{FF2B5EF4-FFF2-40B4-BE49-F238E27FC236}">
                 <a16:creationId xmlns:a16="http://schemas.microsoft.com/office/drawing/2014/main" id="{E521BF6B-0DF4-8F3F-BE3F-BB1B134C7EB3}"/>
               </a:ext>
             </a:extLst>
           </p:cNvPr>
           <p:cNvSpPr>
-            <a:spLocks xmlns:a="http://schemas.openxmlformats.org/drawingml/2006/main" noGrp="1"/>
+            <a:spLocks noGrp="1"/>
           </p:cNvSpPr>
           <p:nvPr/>
         </p:nvSpPr>
         <p:spPr>
-          <a:xfrm xmlns:a="http://schemas.openxmlformats.org/drawingml/2006/main">
+          <a:xfrm>
             <a:off x="0" y="0"/>
             <a:ext cx="2428853" cy="883564"/>
           </a:xfrm>
-          <a:prstGeom xmlns:a="http://schemas.openxmlformats.org/drawingml/2006/main" prst="rect">
+          <a:prstGeom prst="rect">
             <a:avLst/>
           </a:prstGeom>
-          <a:solidFill xmlns:a="http://schemas.openxmlformats.org/drawingml/2006/main">
+          <a:solidFill>
             <a:srgbClr val="960E53"/>
           </a:solidFill>
-          <a:ln xmlns:a="http://schemas.openxmlformats.org/drawingml/2006/main" w="12700">
+          <a:ln w="12700">
             <a:miter/>
           </a:ln>
         </p:spPr>
         <p:txBody>
-          <a:bodyPr xmlns:a="http://schemas.openxmlformats.org/drawingml/2006/main" lIns="45719" rIns="45719" anchor="ctr"/>
-          <a:lstStyle xmlns:a="http://schemas.openxmlformats.org/drawingml/2006/main"/>
-          <a:p xmlns:a="http://schemas.openxmlformats.org/drawingml/2006/main">
+          <a:bodyPr lIns="45719" rIns="45719" anchor="ctr"/>
+          <a:lstStyle/>
+          <a:p>
             <a:pPr algn="ctr">
               <a:buNone/>
               <a:defRPr>
@@ -6792,32 +6614,32 @@
       <p:pic>
         <p:nvPicPr>
           <p:cNvPr id="105" name="Imagen 5">
-            <a:extLst xmlns:a="http://schemas.openxmlformats.org/drawingml/2006/main">
+            <a:extLst>
               <a:ext uri="{FF2B5EF4-FFF2-40B4-BE49-F238E27FC236}">
                 <a16:creationId xmlns:a16="http://schemas.microsoft.com/office/drawing/2014/main" id="{EAA84F91-72D5-424D-990B-B1494BDB25A6}"/>
               </a:ext>
             </a:extLst>
           </p:cNvPr>
           <p:cNvPicPr>
-            <a:picLocks xmlns:a="http://schemas.openxmlformats.org/drawingml/2006/main" noChangeAspect="1"/>
+            <a:picLocks noChangeAspect="1"/>
           </p:cNvPicPr>
           <p:nvPr/>
         </p:nvPicPr>
         <p:blipFill>
-          <a:blip xmlns:r="http://schemas.openxmlformats.org/officeDocument/2006/relationships" xmlns:a="http://schemas.openxmlformats.org/drawingml/2006/main" r:embed="Re25027151603406a"/>
-          <a:stretch xmlns:a="http://schemas.openxmlformats.org/drawingml/2006/main">
-            <a:fillRect l="0" t="0" r="0" b="0"/>
+          <a:blip r:embed="rId3"/>
+          <a:stretch>
+            <a:fillRect/>
           </a:stretch>
         </p:blipFill>
         <p:spPr>
-          <a:xfrm xmlns:a="http://schemas.openxmlformats.org/drawingml/2006/main">
+          <a:xfrm>
             <a:off x="232696" y="48901"/>
             <a:ext cx="1963460" cy="785761"/>
           </a:xfrm>
-          <a:prstGeom xmlns:a="http://schemas.openxmlformats.org/drawingml/2006/main" prst="rect">
+          <a:prstGeom prst="rect">
             <a:avLst/>
           </a:prstGeom>
-          <a:ln xmlns:a="http://schemas.openxmlformats.org/drawingml/2006/main" w="12700">
+          <a:ln w="12700">
             <a:miter/>
           </a:ln>
         </p:spPr>
@@ -6825,34 +6647,34 @@
       <p:sp>
         <p:nvSpPr>
           <p:cNvPr id="2" name="CuadroTexto 10">
-            <a:extLst xmlns:a="http://schemas.openxmlformats.org/drawingml/2006/main">
+            <a:extLst>
               <a:ext uri="{FF2B5EF4-FFF2-40B4-BE49-F238E27FC236}">
                 <a16:creationId xmlns:a16="http://schemas.microsoft.com/office/drawing/2014/main" id="{55E9D232-7645-50A4-06F2-95490B55AE5E}"/>
               </a:ext>
             </a:extLst>
           </p:cNvPr>
           <p:cNvSpPr>
-            <a:spLocks xmlns:a="http://schemas.openxmlformats.org/drawingml/2006/main" noGrp="1"/>
+            <a:spLocks noGrp="1"/>
           </p:cNvSpPr>
           <p:nvPr/>
         </p:nvSpPr>
         <p:spPr>
-          <a:xfrm xmlns:a="http://schemas.openxmlformats.org/drawingml/2006/main">
+          <a:xfrm>
             <a:off x="2634906" y="164719"/>
             <a:ext cx="8993342" cy="492443"/>
           </a:xfrm>
-          <a:prstGeom xmlns:a="http://schemas.openxmlformats.org/drawingml/2006/main" prst="rect">
+          <a:prstGeom prst="rect">
             <a:avLst/>
           </a:prstGeom>
-          <a:ln xmlns:a="http://schemas.openxmlformats.org/drawingml/2006/main" w="12700">
+          <a:ln w="12700">
             <a:miter/>
           </a:ln>
         </p:spPr>
         <p:txBody>
-          <a:bodyPr xmlns:a="http://schemas.openxmlformats.org/drawingml/2006/main" wrap="square" lIns="45719" rIns="45719">
+          <a:bodyPr wrap="square" lIns="45719" rIns="45719">
             <a:spAutoFit/>
           </a:bodyPr>
-          <a:lstStyle xmlns:a="http://schemas.openxmlformats.org/drawingml/2006/main">
+          <a:lstStyle>
             <a:lvl1pPr algn="ctr">
               <a:buNone/>
               <a:defRPr sz="3000">
@@ -6865,7 +6687,7 @@
               </a:defRPr>
             </a:lvl1pPr>
           </a:lstStyle>
-          <a:p xmlns:a="http://schemas.openxmlformats.org/drawingml/2006/main">
+          <a:p>
             <a:pPr algn="l">
               <a:buNone/>
             </a:pPr>
@@ -6886,46 +6708,52 @@
       <p:sp>
         <p:nvSpPr>
           <p:cNvPr id="4" name="Rectángulo redondeado 72">
-            <a:extLst xmlns:a="http://schemas.openxmlformats.org/drawingml/2006/main">
+            <a:extLst>
               <a:ext uri="{FF2B5EF4-FFF2-40B4-BE49-F238E27FC236}">
                 <a16:creationId xmlns:a16="http://schemas.microsoft.com/office/drawing/2014/main" id="{24F1EAAE-74E1-DA22-2EC3-577B83523632}"/>
               </a:ext>
             </a:extLst>
           </p:cNvPr>
           <p:cNvSpPr>
-            <a:spLocks xmlns:a="http://schemas.openxmlformats.org/drawingml/2006/main" noGrp="1"/>
+            <a:spLocks noGrp="1"/>
           </p:cNvSpPr>
           <p:nvPr/>
         </p:nvSpPr>
         <p:spPr>
-          <a:xfrm xmlns:a="http://schemas.openxmlformats.org/drawingml/2006/main" rot="0" flipH="0" flipV="0">
+          <a:xfrm>
             <a:off x="261072" y="1137185"/>
             <a:ext cx="356313" cy="360000"/>
           </a:xfrm>
-          <a:prstGeom xmlns:a="http://schemas.openxmlformats.org/drawingml/2006/main" prst="roundRect">
+          <a:prstGeom prst="roundRect">
             <a:avLst/>
           </a:prstGeom>
-          <a:solidFill xmlns:a="http://schemas.openxmlformats.org/drawingml/2006/main">
+          <a:solidFill>
             <a:srgbClr val="960E53"/>
           </a:solidFill>
-          <a:ln xmlns:a="http://schemas.openxmlformats.org/drawingml/2006/main" w="12700" cap="flat">
+          <a:ln w="12700" cap="flat">
             <a:noFill/>
             <a:prstDash val="solid"/>
             <a:miter/>
           </a:ln>
         </p:spPr>
         <p:style>
-          <a:lnRef xmlns:a="http://schemas.openxmlformats.org/drawingml/2006/main" idx="0"/>
-          <a:fillRef xmlns:a="http://schemas.openxmlformats.org/drawingml/2006/main" idx="0"/>
-          <a:effectRef xmlns:a="http://schemas.openxmlformats.org/drawingml/2006/main" idx="0"/>
-          <a:fontRef xmlns:a="http://schemas.openxmlformats.org/drawingml/2006/main"/>
+          <a:lnRef idx="0">
+            <a:scrgbClr r="0" g="0" b="0"/>
+          </a:lnRef>
+          <a:fillRef idx="0">
+            <a:scrgbClr r="0" g="0" b="0"/>
+          </a:fillRef>
+          <a:effectRef idx="0">
+            <a:scrgbClr r="0" g="0" b="0"/>
+          </a:effectRef>
+          <a:fontRef idx="major"/>
         </p:style>
         <p:txBody>
-          <a:bodyPr xmlns:a="http://schemas.openxmlformats.org/drawingml/2006/main" rot="0" spcFirstLastPara="1" vert="horz" wrap="square" lIns="45719" tIns="45719" rIns="45719" bIns="45719" anchor="ctr">
+          <a:bodyPr rot="0" spcFirstLastPara="1" vert="horz" wrap="square" lIns="45719" tIns="45719" rIns="45719" bIns="45719" anchor="ctr">
             <a:spAutoFit/>
           </a:bodyPr>
-          <a:lstStyle xmlns:a="http://schemas.openxmlformats.org/drawingml/2006/main"/>
-          <a:p xmlns:a="http://schemas.openxmlformats.org/drawingml/2006/main">
+          <a:lstStyle/>
+          <a:p>
             <a:pPr marL="0" marR="0" indent="0" algn="l" defTabSz="914400">
               <a:lnSpc>
                 <a:spcPct val="100000"/>
@@ -6958,23 +6786,24 @@
       <p:sp>
         <p:nvSpPr>
           <p:cNvPr id="5" name="Forma libre 73">
-            <a:extLst xmlns:a="http://schemas.openxmlformats.org/drawingml/2006/main">
+            <a:extLst>
               <a:ext uri="{FF2B5EF4-FFF2-40B4-BE49-F238E27FC236}">
                 <a16:creationId xmlns:a16="http://schemas.microsoft.com/office/drawing/2014/main" id="{9CEE9A14-A6B7-3042-94CF-8F5D909A4EFF}"/>
               </a:ext>
             </a:extLst>
           </p:cNvPr>
           <p:cNvSpPr>
-            <a:spLocks xmlns:a="http://schemas.openxmlformats.org/drawingml/2006/main" noGrp="1"/>
+            <a:spLocks noGrp="1"/>
           </p:cNvSpPr>
           <p:nvPr/>
         </p:nvSpPr>
         <p:spPr>
-          <a:xfrm xmlns:a="http://schemas.openxmlformats.org/drawingml/2006/main" rot="18900000" flipH="0" flipV="0">
+          <a:xfrm rot="18900000">
             <a:off x="315004" y="1203199"/>
             <a:ext cx="248448" cy="155237"/>
           </a:xfrm>
-          <a:custGeom xmlns:a="http://schemas.openxmlformats.org/drawingml/2006/main">
+          <a:custGeom>
+            <a:avLst/>
             <a:gdLst>
               <a:gd name="connsiteX0" fmla="*/ 242019 w 251019"/>
               <a:gd name="connsiteY0" fmla="*/ 101237 h 155237"/>
@@ -7003,6 +6832,8 @@
               <a:gd name="connsiteX12" fmla="*/ 54000 w 251019"/>
               <a:gd name="connsiteY12" fmla="*/ 101237 h 155237"/>
             </a:gdLst>
+            <a:ahLst/>
+            <a:cxnLst/>
             <a:rect l="l" t="t" r="r" b="b"/>
             <a:pathLst>
               <a:path w="251019" h="155237">
@@ -7059,10 +6890,10 @@
               </a:path>
             </a:pathLst>
           </a:custGeom>
-          <a:solidFill xmlns:a="http://schemas.openxmlformats.org/drawingml/2006/main">
+          <a:solidFill>
             <a:schemeClr val="bg1"/>
           </a:solidFill>
-          <a:ln xmlns:a="http://schemas.openxmlformats.org/drawingml/2006/main" w="12700" cap="flat">
+          <a:ln w="12700" cap="flat">
             <a:solidFill>
               <a:schemeClr val="bg1"/>
             </a:solidFill>
@@ -7071,17 +6902,23 @@
           </a:ln>
         </p:spPr>
         <p:style>
-          <a:lnRef xmlns:a="http://schemas.openxmlformats.org/drawingml/2006/main" idx="0"/>
-          <a:fillRef xmlns:a="http://schemas.openxmlformats.org/drawingml/2006/main" idx="0"/>
-          <a:effectRef xmlns:a="http://schemas.openxmlformats.org/drawingml/2006/main" idx="0"/>
-          <a:fontRef xmlns:a="http://schemas.openxmlformats.org/drawingml/2006/main"/>
+          <a:lnRef idx="0">
+            <a:scrgbClr r="0" g="0" b="0"/>
+          </a:lnRef>
+          <a:fillRef idx="0">
+            <a:scrgbClr r="0" g="0" b="0"/>
+          </a:fillRef>
+          <a:effectRef idx="0">
+            <a:scrgbClr r="0" g="0" b="0"/>
+          </a:effectRef>
+          <a:fontRef idx="major"/>
         </p:style>
         <p:txBody>
-          <a:bodyPr xmlns:a="http://schemas.openxmlformats.org/drawingml/2006/main" rot="0" spcFirstLastPara="1" vert="horz" wrap="square" lIns="45719" tIns="45719" rIns="45719" bIns="45719" anchor="ctr">
+          <a:bodyPr rot="0" spcFirstLastPara="1" vert="horz" wrap="square" lIns="45719" tIns="45719" rIns="45719" bIns="45719" anchor="ctr">
             <a:noAutofit/>
           </a:bodyPr>
-          <a:lstStyle xmlns:a="http://schemas.openxmlformats.org/drawingml/2006/main"/>
-          <a:p xmlns:a="http://schemas.openxmlformats.org/drawingml/2006/main">
+          <a:lstStyle/>
+          <a:p>
             <a:pPr marL="0" marR="0" indent="0" algn="l" defTabSz="914400">
               <a:lnSpc>
                 <a:spcPct val="100000"/>
@@ -7114,34 +6951,34 @@
       <p:sp>
         <p:nvSpPr>
           <p:cNvPr id="7" name="CuadroTexto 10">
-            <a:extLst xmlns:a="http://schemas.openxmlformats.org/drawingml/2006/main">
+            <a:extLst>
               <a:ext uri="{FF2B5EF4-FFF2-40B4-BE49-F238E27FC236}">
                 <a16:creationId xmlns:a16="http://schemas.microsoft.com/office/drawing/2014/main" id="{6A4B1D09-6B6E-102F-CF33-772F8284CA19}"/>
               </a:ext>
             </a:extLst>
           </p:cNvPr>
           <p:cNvSpPr>
-            <a:spLocks xmlns:a="http://schemas.openxmlformats.org/drawingml/2006/main" noGrp="1"/>
+            <a:spLocks noGrp="1"/>
           </p:cNvSpPr>
           <p:nvPr/>
         </p:nvSpPr>
         <p:spPr>
-          <a:xfrm xmlns:a="http://schemas.openxmlformats.org/drawingml/2006/main">
+          <a:xfrm>
             <a:off x="656082" y="1103033"/>
             <a:ext cx="10766113" cy="426720"/>
           </a:xfrm>
-          <a:prstGeom xmlns:a="http://schemas.openxmlformats.org/drawingml/2006/main" prst="rect">
+          <a:prstGeom prst="rect">
             <a:avLst/>
           </a:prstGeom>
-          <a:ln xmlns:a="http://schemas.openxmlformats.org/drawingml/2006/main" w="12700">
+          <a:ln w="12700">
             <a:miter/>
           </a:ln>
         </p:spPr>
         <p:txBody>
-          <a:bodyPr xmlns:a="http://schemas.openxmlformats.org/drawingml/2006/main" wrap="square" lIns="45719" rIns="45719">
+          <a:bodyPr wrap="square" lIns="45719" rIns="45719">
             <a:spAutoFit/>
           </a:bodyPr>
-          <a:lstStyle xmlns:a="http://schemas.openxmlformats.org/drawingml/2006/main">
+          <a:lstStyle>
             <a:lvl1pPr algn="ctr">
               <a:buNone/>
               <a:defRPr sz="3000">
@@ -7154,7 +6991,7 @@
               </a:defRPr>
             </a:lvl1pPr>
           </a:lstStyle>
-          <a:p xmlns:a="http://schemas.openxmlformats.org/drawingml/2006/main">
+          <a:p>
             <a:pPr lvl="0" algn="just">
               <a:buNone/>
             </a:pPr>
@@ -7175,7 +7012,7 @@
       <p:graphicFrame>
         <p:nvGraphicFramePr>
           <p:cNvPr id="106" name="Chart">
-            <a:extLst xmlns:a="http://schemas.openxmlformats.org/drawingml/2006/main">
+            <a:extLst>
               <a:ext uri="{FF2B5EF4-FFF2-40B4-BE49-F238E27FC236}">
                 <a16:creationId xmlns:a16="http://schemas.microsoft.com/office/drawing/2014/main" id="{77B9A8B0-CA18-42E2-A700-37294F9AE7A6}"/>
               </a:ext>
@@ -7185,12 +7022,12 @@
           <p:nvPr/>
         </p:nvGraphicFramePr>
         <p:xfrm>
-          <a:off xmlns:a="http://schemas.openxmlformats.org/drawingml/2006/main" x="1238250" y="2114550"/>
-          <a:ext xmlns:a="http://schemas.openxmlformats.org/drawingml/2006/main" cx="9715500" cy="4419600"/>
+          <a:off x="1238250" y="2114550"/>
+          <a:ext cx="9715500" cy="4419600"/>
         </p:xfrm>
-        <a:graphic xmlns:a="http://schemas.openxmlformats.org/drawingml/2006/main">
+        <a:graphic>
           <a:graphicData uri="http://schemas.openxmlformats.org/drawingml/2006/chart">
-            <c:chart xmlns:r="http://schemas.openxmlformats.org/officeDocument/2006/relationships" xmlns:c="http://schemas.openxmlformats.org/drawingml/2006/chart" r:id="R0d4b0688753746a0"/>
+            <c:chart xmlns:c="http://schemas.openxmlformats.org/drawingml/2006/chart" xmlns:r="http://schemas.openxmlformats.org/officeDocument/2006/relationships" r:id="rId4"/>
           </a:graphicData>
         </a:graphic>
       </p:graphicFrame>
@@ -7201,11 +7038,14 @@
       </p:ext>
     </p:extLst>
   </p:cSld>
+  <p:clrMapOvr>
+    <a:masterClrMapping/>
+  </p:clrMapOvr>
 </p:sld>
 </file>
 
 <file path=ppt/slides/slide6.xml><?xml version="1.0" encoding="utf-8"?>
-<p:sld xmlns:p="http://schemas.openxmlformats.org/presentationml/2006/main">
+<p:sld xmlns:a="http://schemas.openxmlformats.org/drawingml/2006/main" xmlns:r="http://schemas.openxmlformats.org/officeDocument/2006/relationships" xmlns:p="http://schemas.openxmlformats.org/presentationml/2006/main">
   <p:cSld>
     <p:spTree>
       <p:nvGrpSpPr>
@@ -7214,41 +7054,46 @@
         <p:nvPr/>
       </p:nvGrpSpPr>
       <p:grpSpPr>
-        <a:xfrm xmlns:a="http://schemas.openxmlformats.org/drawingml/2006/main"/>
+        <a:xfrm>
+          <a:off x="0" y="0"/>
+          <a:ext cx="0" cy="0"/>
+          <a:chOff x="0" y="0"/>
+          <a:chExt cx="0" cy="0"/>
+        </a:xfrm>
       </p:grpSpPr>
       <p:sp>
         <p:nvSpPr>
           <p:cNvPr id="121" name="Rectángulo 3">
-            <a:extLst xmlns:a="http://schemas.openxmlformats.org/drawingml/2006/main">
+            <a:extLst>
               <a:ext uri="{FF2B5EF4-FFF2-40B4-BE49-F238E27FC236}">
                 <a16:creationId xmlns:a16="http://schemas.microsoft.com/office/drawing/2014/main" id="{C7B4AFFE-1710-465D-95DD-FFA189E0CFE2}"/>
               </a:ext>
             </a:extLst>
           </p:cNvPr>
           <p:cNvSpPr>
-            <a:spLocks xmlns:a="http://schemas.openxmlformats.org/drawingml/2006/main" noGrp="1"/>
+            <a:spLocks noGrp="1"/>
           </p:cNvSpPr>
           <p:nvPr/>
         </p:nvSpPr>
         <p:spPr>
-          <a:xfrm xmlns:a="http://schemas.openxmlformats.org/drawingml/2006/main">
+          <a:xfrm>
             <a:off x="0" y="0"/>
             <a:ext cx="12192000" cy="6858000"/>
           </a:xfrm>
-          <a:prstGeom xmlns:a="http://schemas.openxmlformats.org/drawingml/2006/main" prst="rect">
+          <a:prstGeom prst="rect">
             <a:avLst/>
           </a:prstGeom>
-          <a:solidFill xmlns:a="http://schemas.openxmlformats.org/drawingml/2006/main">
+          <a:solidFill>
             <a:srgbClr val="960E53"/>
           </a:solidFill>
-          <a:ln xmlns:a="http://schemas.openxmlformats.org/drawingml/2006/main" w="12700">
+          <a:ln w="12700">
             <a:miter/>
           </a:ln>
         </p:spPr>
         <p:txBody>
-          <a:bodyPr xmlns:a="http://schemas.openxmlformats.org/drawingml/2006/main" lIns="45719" rIns="45719" anchor="ctr"/>
-          <a:lstStyle xmlns:a="http://schemas.openxmlformats.org/drawingml/2006/main"/>
-          <a:p xmlns:a="http://schemas.openxmlformats.org/drawingml/2006/main">
+          <a:bodyPr lIns="45719" rIns="45719" anchor="ctr"/>
+          <a:lstStyle/>
+          <a:p>
             <a:pPr algn="ctr">
               <a:buNone/>
               <a:defRPr>
@@ -7264,32 +7109,32 @@
       <p:pic>
         <p:nvPicPr>
           <p:cNvPr id="122" name="Imagen 4">
-            <a:extLst xmlns:a="http://schemas.openxmlformats.org/drawingml/2006/main">
+            <a:extLst>
               <a:ext uri="{FF2B5EF4-FFF2-40B4-BE49-F238E27FC236}">
                 <a16:creationId xmlns:a16="http://schemas.microsoft.com/office/drawing/2014/main" id="{8B9CC8AE-134D-4B4E-829D-E457FBBC4CC9}"/>
               </a:ext>
             </a:extLst>
           </p:cNvPr>
           <p:cNvPicPr>
-            <a:picLocks xmlns:a="http://schemas.openxmlformats.org/drawingml/2006/main" noChangeAspect="1"/>
+            <a:picLocks noChangeAspect="1"/>
           </p:cNvPicPr>
           <p:nvPr/>
         </p:nvPicPr>
         <p:blipFill>
-          <a:blip xmlns:r="http://schemas.openxmlformats.org/officeDocument/2006/relationships" xmlns:a="http://schemas.openxmlformats.org/drawingml/2006/main" r:embed="R497241fa111445dc"/>
-          <a:stretch xmlns:a="http://schemas.openxmlformats.org/drawingml/2006/main">
-            <a:fillRect l="0" t="0" r="0" b="0"/>
+          <a:blip r:embed="rId3"/>
+          <a:stretch>
+            <a:fillRect/>
           </a:stretch>
         </p:blipFill>
         <p:spPr>
-          <a:xfrm xmlns:a="http://schemas.openxmlformats.org/drawingml/2006/main" rot="16200000">
+          <a:xfrm rot="16200000">
             <a:off x="8467332" y="2639986"/>
             <a:ext cx="6510029" cy="1578025"/>
           </a:xfrm>
-          <a:prstGeom xmlns:a="http://schemas.openxmlformats.org/drawingml/2006/main" prst="rect">
+          <a:prstGeom prst="rect">
             <a:avLst/>
           </a:prstGeom>
-          <a:ln xmlns:a="http://schemas.openxmlformats.org/drawingml/2006/main" w="12700">
+          <a:ln w="12700">
             <a:miter/>
           </a:ln>
         </p:spPr>
@@ -7297,32 +7142,32 @@
       <p:pic>
         <p:nvPicPr>
           <p:cNvPr id="123" name="Imagen 6">
-            <a:extLst xmlns:a="http://schemas.openxmlformats.org/drawingml/2006/main">
+            <a:extLst>
               <a:ext uri="{FF2B5EF4-FFF2-40B4-BE49-F238E27FC236}">
                 <a16:creationId xmlns:a16="http://schemas.microsoft.com/office/drawing/2014/main" id="{D8C9794A-8A74-4603-9451-8E6814801794}"/>
               </a:ext>
             </a:extLst>
           </p:cNvPr>
           <p:cNvPicPr>
-            <a:picLocks xmlns:a="http://schemas.openxmlformats.org/drawingml/2006/main" noChangeAspect="1"/>
+            <a:picLocks noChangeAspect="1"/>
           </p:cNvPicPr>
           <p:nvPr/>
         </p:nvPicPr>
         <p:blipFill>
-          <a:blip xmlns:r="http://schemas.openxmlformats.org/officeDocument/2006/relationships" xmlns:a="http://schemas.openxmlformats.org/drawingml/2006/main" r:embed="R497241fa111445dc"/>
-          <a:stretch xmlns:a="http://schemas.openxmlformats.org/drawingml/2006/main">
-            <a:fillRect l="0" t="0" r="0" b="0"/>
+          <a:blip r:embed="rId3"/>
+          <a:stretch>
+            <a:fillRect/>
           </a:stretch>
         </p:blipFill>
         <p:spPr>
-          <a:xfrm xmlns:a="http://schemas.openxmlformats.org/drawingml/2006/main" rot="5400000">
+          <a:xfrm rot="5400000">
             <a:off x="-2791599" y="2913684"/>
             <a:ext cx="6510030" cy="1578025"/>
           </a:xfrm>
-          <a:prstGeom xmlns:a="http://schemas.openxmlformats.org/drawingml/2006/main" prst="rect">
+          <a:prstGeom prst="rect">
             <a:avLst/>
           </a:prstGeom>
-          <a:ln xmlns:a="http://schemas.openxmlformats.org/drawingml/2006/main" w="12700">
+          <a:ln w="12700">
             <a:miter/>
           </a:ln>
         </p:spPr>
@@ -7330,32 +7175,32 @@
       <p:pic>
         <p:nvPicPr>
           <p:cNvPr id="124" name="Imagen 7">
-            <a:extLst xmlns:a="http://schemas.openxmlformats.org/drawingml/2006/main">
+            <a:extLst>
               <a:ext uri="{FF2B5EF4-FFF2-40B4-BE49-F238E27FC236}">
                 <a16:creationId xmlns:a16="http://schemas.microsoft.com/office/drawing/2014/main" id="{0533DDA8-2EA8-43D8-BD47-2A9BC3B40CD7}"/>
               </a:ext>
             </a:extLst>
           </p:cNvPr>
           <p:cNvPicPr>
-            <a:picLocks xmlns:a="http://schemas.openxmlformats.org/drawingml/2006/main" noChangeAspect="1"/>
+            <a:picLocks noChangeAspect="1"/>
           </p:cNvPicPr>
           <p:nvPr/>
         </p:nvPicPr>
         <p:blipFill>
-          <a:blip xmlns:r="http://schemas.openxmlformats.org/officeDocument/2006/relationships" xmlns:a="http://schemas.openxmlformats.org/drawingml/2006/main" r:embed="R77c45219b3854b5b"/>
-          <a:stretch xmlns:a="http://schemas.openxmlformats.org/drawingml/2006/main">
-            <a:fillRect l="0" t="0" r="0" b="0"/>
+          <a:blip r:embed="rId4"/>
+          <a:stretch>
+            <a:fillRect/>
           </a:stretch>
         </p:blipFill>
         <p:spPr>
-          <a:xfrm xmlns:a="http://schemas.openxmlformats.org/drawingml/2006/main">
+          <a:xfrm>
             <a:off x="3222383" y="1231643"/>
             <a:ext cx="5747234" cy="2299996"/>
           </a:xfrm>
-          <a:prstGeom xmlns:a="http://schemas.openxmlformats.org/drawingml/2006/main" prst="rect">
+          <a:prstGeom prst="rect">
             <a:avLst/>
           </a:prstGeom>
-          <a:ln xmlns:a="http://schemas.openxmlformats.org/drawingml/2006/main" w="12700">
+          <a:ln w="12700">
             <a:miter/>
           </a:ln>
         </p:spPr>
@@ -7363,32 +7208,32 @@
       <p:pic>
         <p:nvPicPr>
           <p:cNvPr id="125" name="Imagen 9">
-            <a:extLst xmlns:a="http://schemas.openxmlformats.org/drawingml/2006/main">
+            <a:extLst>
               <a:ext uri="{FF2B5EF4-FFF2-40B4-BE49-F238E27FC236}">
                 <a16:creationId xmlns:a16="http://schemas.microsoft.com/office/drawing/2014/main" id="{FAF28F3D-C5E2-4DB5-AFA0-50F7DB5C7EB8}"/>
               </a:ext>
             </a:extLst>
           </p:cNvPr>
           <p:cNvPicPr>
-            <a:picLocks xmlns:a="http://schemas.openxmlformats.org/drawingml/2006/main" noChangeAspect="1"/>
+            <a:picLocks noChangeAspect="1"/>
           </p:cNvPicPr>
           <p:nvPr/>
         </p:nvPicPr>
         <p:blipFill>
-          <a:blip xmlns:r="http://schemas.openxmlformats.org/officeDocument/2006/relationships" xmlns:a="http://schemas.openxmlformats.org/drawingml/2006/main" r:embed="R82d02b0b14a74f03"/>
-          <a:stretch xmlns:a="http://schemas.openxmlformats.org/drawingml/2006/main">
-            <a:fillRect l="0" t="0" r="0" b="0"/>
+          <a:blip r:embed="rId5"/>
+          <a:stretch>
+            <a:fillRect/>
           </a:stretch>
         </p:blipFill>
         <p:spPr>
-          <a:xfrm xmlns:a="http://schemas.openxmlformats.org/drawingml/2006/main">
+          <a:xfrm>
             <a:off x="3568989" y="3697430"/>
             <a:ext cx="5054023" cy="2542253"/>
           </a:xfrm>
-          <a:prstGeom xmlns:a="http://schemas.openxmlformats.org/drawingml/2006/main" prst="rect">
+          <a:prstGeom prst="rect">
             <a:avLst/>
           </a:prstGeom>
-          <a:ln xmlns:a="http://schemas.openxmlformats.org/drawingml/2006/main" w="12700">
+          <a:ln w="12700">
             <a:miter/>
           </a:ln>
         </p:spPr>
@@ -7396,36 +7241,36 @@
       <p:sp>
         <p:nvSpPr>
           <p:cNvPr id="126" name="Rectángulo 10">
-            <a:extLst xmlns:a="http://schemas.openxmlformats.org/drawingml/2006/main">
+            <a:extLst>
               <a:ext uri="{FF2B5EF4-FFF2-40B4-BE49-F238E27FC236}">
                 <a16:creationId xmlns:a16="http://schemas.microsoft.com/office/drawing/2014/main" id="{F5F68FC3-9EAC-45CE-BD47-978784D3C67A}"/>
               </a:ext>
             </a:extLst>
           </p:cNvPr>
           <p:cNvSpPr>
-            <a:spLocks xmlns:a="http://schemas.openxmlformats.org/drawingml/2006/main" noGrp="1"/>
+            <a:spLocks noGrp="1"/>
           </p:cNvSpPr>
           <p:nvPr/>
         </p:nvSpPr>
         <p:spPr>
-          <a:xfrm xmlns:a="http://schemas.openxmlformats.org/drawingml/2006/main" rot="16200000">
+          <a:xfrm rot="16200000">
             <a:off x="6047775" y="1525765"/>
             <a:ext cx="83976" cy="5747235"/>
           </a:xfrm>
-          <a:prstGeom xmlns:a="http://schemas.openxmlformats.org/drawingml/2006/main" prst="rect">
+          <a:prstGeom prst="rect">
             <a:avLst/>
           </a:prstGeom>
-          <a:solidFill xmlns:a="http://schemas.openxmlformats.org/drawingml/2006/main">
+          <a:solidFill>
             <a:srgbClr val="DC7F37"/>
           </a:solidFill>
-          <a:ln xmlns:a="http://schemas.openxmlformats.org/drawingml/2006/main" w="12700">
+          <a:ln w="12700">
             <a:miter/>
           </a:ln>
         </p:spPr>
         <p:txBody>
-          <a:bodyPr xmlns:a="http://schemas.openxmlformats.org/drawingml/2006/main" lIns="45719" rIns="45719" anchor="ctr"/>
-          <a:lstStyle xmlns:a="http://schemas.openxmlformats.org/drawingml/2006/main"/>
-          <a:p xmlns:a="http://schemas.openxmlformats.org/drawingml/2006/main">
+          <a:bodyPr lIns="45719" rIns="45719" anchor="ctr"/>
+          <a:lstStyle/>
+          <a:p>
             <a:pPr algn="ctr">
               <a:buNone/>
               <a:defRPr>
@@ -7445,6 +7290,9 @@
       </p:ext>
     </p:extLst>
   </p:cSld>
+  <p:clrMapOvr>
+    <a:masterClrMapping/>
+  </p:clrMapOvr>
 </p:sld>
 </file>
 
@@ -7635,5 +7483,199 @@
       </a:bgFillStyleLst>
     </a:fmtScheme>
   </a:themeElements>
+  <a:objectDefaults/>
+  <a:extraClrSchemeLst/>
+</a:theme>
+</file>
+
+<file path=ppt/theme/theme2.xml><?xml version="1.0" encoding="utf-8"?>
+<a:theme xmlns:a="http://schemas.openxmlformats.org/drawingml/2006/main" name="Tema de Office">
+  <a:themeElements>
+    <a:clrScheme name="Tema de Office">
+      <a:dk1>
+        <a:srgbClr val="000000"/>
+      </a:dk1>
+      <a:lt1>
+        <a:srgbClr val="FFFFFF"/>
+      </a:lt1>
+      <a:dk2>
+        <a:srgbClr val="A7A7A7"/>
+      </a:dk2>
+      <a:lt2>
+        <a:srgbClr val="535353"/>
+      </a:lt2>
+      <a:accent1>
+        <a:srgbClr val="4472C4"/>
+      </a:accent1>
+      <a:accent2>
+        <a:srgbClr val="ED7D31"/>
+      </a:accent2>
+      <a:accent3>
+        <a:srgbClr val="A5A5A5"/>
+      </a:accent3>
+      <a:accent4>
+        <a:srgbClr val="FFC000"/>
+      </a:accent4>
+      <a:accent5>
+        <a:srgbClr val="5B9BD5"/>
+      </a:accent5>
+      <a:accent6>
+        <a:srgbClr val="70AD47"/>
+      </a:accent6>
+      <a:hlink>
+        <a:srgbClr val="0000FF"/>
+      </a:hlink>
+      <a:folHlink>
+        <a:srgbClr val="FF00FF"/>
+      </a:folHlink>
+    </a:clrScheme>
+    <a:fontScheme name="Tema de Office">
+      <a:majorFont>
+        <a:latin typeface="Helvetica"/>
+        <a:ea typeface="Helvetica"/>
+        <a:cs typeface="Helvetica"/>
+      </a:majorFont>
+      <a:minorFont>
+        <a:latin typeface="Calibri"/>
+        <a:ea typeface="Calibri"/>
+        <a:cs typeface="Calibri"/>
+      </a:minorFont>
+    </a:fontScheme>
+    <a:fmtScheme name="Tema de Office">
+      <a:fillStyleLst>
+        <a:solidFill>
+          <a:schemeClr val="phClr"/>
+        </a:solidFill>
+        <a:gradFill rotWithShape="1">
+          <a:gsLst>
+            <a:gs pos="0">
+              <a:schemeClr val="phClr">
+                <a:tint val="50000"/>
+                <a:satMod val="300000"/>
+              </a:schemeClr>
+            </a:gs>
+            <a:gs pos="35000">
+              <a:schemeClr val="phClr">
+                <a:tint val="37000"/>
+                <a:satMod val="300000"/>
+              </a:schemeClr>
+            </a:gs>
+            <a:gs pos="100000">
+              <a:schemeClr val="phClr">
+                <a:tint val="15000"/>
+                <a:satMod val="350000"/>
+              </a:schemeClr>
+            </a:gs>
+          </a:gsLst>
+          <a:lin ang="16200000" scaled="1"/>
+        </a:gradFill>
+        <a:gradFill rotWithShape="1">
+          <a:gsLst>
+            <a:gs pos="0">
+              <a:schemeClr val="phClr">
+                <a:tint val="100000"/>
+                <a:shade val="100000"/>
+                <a:satMod val="129999"/>
+              </a:schemeClr>
+            </a:gs>
+            <a:gs pos="100000">
+              <a:schemeClr val="phClr">
+                <a:tint val="50000"/>
+                <a:shade val="100000"/>
+                <a:satMod val="350000"/>
+              </a:schemeClr>
+            </a:gs>
+          </a:gsLst>
+          <a:lin ang="16200000" scaled="0"/>
+        </a:gradFill>
+      </a:fillStyleLst>
+      <a:lnStyleLst>
+        <a:ln w="9525">
+          <a:solidFill>
+            <a:schemeClr val="phClr">
+              <a:shade val="95000"/>
+              <a:satMod val="104999"/>
+            </a:schemeClr>
+          </a:solidFill>
+          <a:prstDash val="solid"/>
+        </a:ln>
+        <a:ln w="25400">
+          <a:solidFill>
+            <a:schemeClr val="phClr"/>
+          </a:solidFill>
+          <a:prstDash val="solid"/>
+        </a:ln>
+        <a:ln w="38100">
+          <a:solidFill>
+            <a:schemeClr val="phClr"/>
+          </a:solidFill>
+          <a:prstDash val="solid"/>
+        </a:ln>
+      </a:lnStyleLst>
+      <a:effectStyleLst>
+        <a:effectStyle>
+          <a:effectLst/>
+        </a:effectStyle>
+        <a:effectStyle>
+          <a:effectLst/>
+        </a:effectStyle>
+        <a:effectStyle>
+          <a:effectLst/>
+        </a:effectStyle>
+      </a:effectStyleLst>
+      <a:bgFillStyleLst>
+        <a:solidFill>
+          <a:schemeClr val="phClr"/>
+        </a:solidFill>
+        <a:gradFill rotWithShape="1">
+          <a:gsLst>
+            <a:gs pos="0">
+              <a:schemeClr val="phClr">
+                <a:tint val="40000"/>
+                <a:satMod val="350000"/>
+              </a:schemeClr>
+            </a:gs>
+            <a:gs pos="40000">
+              <a:schemeClr val="phClr">
+                <a:tint val="45000"/>
+                <a:shade val="99000"/>
+                <a:satMod val="350000"/>
+              </a:schemeClr>
+            </a:gs>
+            <a:gs pos="100000">
+              <a:schemeClr val="phClr">
+                <a:shade val="20000"/>
+                <a:satMod val="255000"/>
+              </a:schemeClr>
+            </a:gs>
+          </a:gsLst>
+          <a:path path="circle">
+            <a:fillToRect l="50000" t="-80000" r="50000" b="180000"/>
+          </a:path>
+        </a:gradFill>
+        <a:gradFill rotWithShape="1">
+          <a:gsLst>
+            <a:gs pos="0">
+              <a:schemeClr val="phClr">
+                <a:tint val="80000"/>
+                <a:satMod val="300000"/>
+              </a:schemeClr>
+            </a:gs>
+            <a:gs pos="100000">
+              <a:schemeClr val="phClr">
+                <a:shade val="30000"/>
+                <a:satMod val="200000"/>
+              </a:schemeClr>
+            </a:gs>
+          </a:gsLst>
+          <a:path path="circle">
+            <a:fillToRect l="50000" t="50000" r="50000" b="50000"/>
+          </a:path>
+        </a:gradFill>
+      </a:bgFillStyleLst>
+    </a:fmtScheme>
+  </a:themeElements>
+  <a:objectDefaults/>
+  <a:extraClrSchemeLst/>
 </a:theme>
 </file>